--- a/doc/mtp_with_consistency_method_v2.pptx
+++ b/doc/mtp_with_consistency_method_v2.pptx
@@ -1052,7 +1052,7 @@
           <a:p>
             <a:fld id="{9779ACA5-036C-4CBB-B511-6278A555603E}" type="datetimeFigureOut">
               <a:rPr lang="zh-TW" altLang="en-US" smtClean="0"/>
-              <a:t>2026/7/31</a:t>
+              <a:t>2026/8/3</a:t>
             </a:fld>
             <a:endParaRPr lang="zh-TW" altLang="en-US"/>
           </a:p>
@@ -1550,7 +1550,7 @@
           <a:p>
             <a:fld id="{B77FA20A-AED8-411F-8362-4F08F634AD13}" type="datetime1">
               <a:rPr lang="zh-TW" altLang="en-US" smtClean="0"/>
-              <a:t>2026/7/31</a:t>
+              <a:t>2026/8/3</a:t>
             </a:fld>
             <a:endParaRPr lang="zh-TW" altLang="en-US"/>
           </a:p>
@@ -1748,7 +1748,7 @@
           <a:p>
             <a:fld id="{1868CC40-9425-4E64-AAA4-82535E935151}" type="datetime1">
               <a:rPr lang="zh-TW" altLang="en-US" smtClean="0"/>
-              <a:t>2026/7/31</a:t>
+              <a:t>2026/8/3</a:t>
             </a:fld>
             <a:endParaRPr lang="zh-TW" altLang="en-US"/>
           </a:p>
@@ -1956,7 +1956,7 @@
           <a:p>
             <a:fld id="{6E8EA640-B2FF-4BA9-9C86-A049658D2DA6}" type="datetime1">
               <a:rPr lang="zh-TW" altLang="en-US" smtClean="0"/>
-              <a:t>2026/7/31</a:t>
+              <a:t>2026/8/3</a:t>
             </a:fld>
             <a:endParaRPr lang="zh-TW" altLang="en-US"/>
           </a:p>
@@ -2154,7 +2154,7 @@
           <a:p>
             <a:fld id="{37C2809C-5694-4ADE-A195-81F49E6CD71C}" type="datetime1">
               <a:rPr lang="zh-TW" altLang="en-US" smtClean="0"/>
-              <a:t>2026/7/31</a:t>
+              <a:t>2026/8/3</a:t>
             </a:fld>
             <a:endParaRPr lang="zh-TW" altLang="en-US"/>
           </a:p>
@@ -2429,7 +2429,7 @@
           <a:p>
             <a:fld id="{69DD4B31-F13D-4F82-B0AC-ED9396B0F174}" type="datetime1">
               <a:rPr lang="zh-TW" altLang="en-US" smtClean="0"/>
-              <a:t>2026/7/31</a:t>
+              <a:t>2026/8/3</a:t>
             </a:fld>
             <a:endParaRPr lang="zh-TW" altLang="en-US"/>
           </a:p>
@@ -2694,7 +2694,7 @@
           <a:p>
             <a:fld id="{9474DB4A-D224-408E-93AF-7640A6CD6C9E}" type="datetime1">
               <a:rPr lang="zh-TW" altLang="en-US" smtClean="0"/>
-              <a:t>2026/7/31</a:t>
+              <a:t>2026/8/3</a:t>
             </a:fld>
             <a:endParaRPr lang="zh-TW" altLang="en-US"/>
           </a:p>
@@ -3106,7 +3106,7 @@
           <a:p>
             <a:fld id="{0648B68F-C8CE-4182-AD4D-6A41CE773149}" type="datetime1">
               <a:rPr lang="zh-TW" altLang="en-US" smtClean="0"/>
-              <a:t>2026/7/31</a:t>
+              <a:t>2026/8/3</a:t>
             </a:fld>
             <a:endParaRPr lang="zh-TW" altLang="en-US"/>
           </a:p>
@@ -3247,7 +3247,7 @@
           <a:p>
             <a:fld id="{3C61DB16-EF1C-4119-8174-C5B39ACBC5EC}" type="datetime1">
               <a:rPr lang="zh-TW" altLang="en-US" smtClean="0"/>
-              <a:t>2026/7/31</a:t>
+              <a:t>2026/8/3</a:t>
             </a:fld>
             <a:endParaRPr lang="zh-TW" altLang="en-US"/>
           </a:p>
@@ -3360,7 +3360,7 @@
           <a:p>
             <a:fld id="{3550C75B-D794-4B33-9008-BE85F7E8298A}" type="datetime1">
               <a:rPr lang="zh-TW" altLang="en-US" smtClean="0"/>
-              <a:t>2026/7/31</a:t>
+              <a:t>2026/8/3</a:t>
             </a:fld>
             <a:endParaRPr lang="zh-TW" altLang="en-US"/>
           </a:p>
@@ -3671,7 +3671,7 @@
           <a:p>
             <a:fld id="{DDDD30AD-8DDE-43B1-992C-B21FDC46B221}" type="datetime1">
               <a:rPr lang="zh-TW" altLang="en-US" smtClean="0"/>
-              <a:t>2026/7/31</a:t>
+              <a:t>2026/8/3</a:t>
             </a:fld>
             <a:endParaRPr lang="zh-TW" altLang="en-US"/>
           </a:p>
@@ -3959,7 +3959,7 @@
           <a:p>
             <a:fld id="{DFCDA636-6424-4643-98FF-F3C5490949A2}" type="datetime1">
               <a:rPr lang="zh-TW" altLang="en-US" smtClean="0"/>
-              <a:t>2026/7/31</a:t>
+              <a:t>2026/8/3</a:t>
             </a:fld>
             <a:endParaRPr lang="zh-TW" altLang="en-US"/>
           </a:p>
@@ -4200,7 +4200,7 @@
           <a:p>
             <a:fld id="{46203A9E-DDF2-4F1E-94E6-D0F53021B384}" type="datetime1">
               <a:rPr lang="zh-TW" altLang="en-US" smtClean="0"/>
-              <a:t>2026/7/31</a:t>
+              <a:t>2026/8/3</a:t>
             </a:fld>
             <a:endParaRPr lang="zh-TW" altLang="en-US"/>
           </a:p>
@@ -5050,7 +5050,18 @@
                 <a:ea typeface="微軟正黑體" panose="020B0604030504040204" pitchFamily="34" charset="-120"/>
                 <a:cs typeface="Noto Sans CJK TC" pitchFamily="34" charset="-120"/>
               </a:rPr>
-              <a:t>Part2: Related works / MTP</a:t>
+              <a:t>Part2: </a:t>
+            </a:r>
+            <a:r>
+              <a:rPr lang="en-US" b="1">
+                <a:solidFill>
+                  <a:srgbClr val="1B2E3A"/>
+                </a:solidFill>
+                <a:latin typeface="微軟正黑體" panose="020B0604030504040204" pitchFamily="34" charset="-120"/>
+                <a:ea typeface="微軟正黑體" panose="020B0604030504040204" pitchFamily="34" charset="-120"/>
+                <a:cs typeface="Noto Sans CJK TC" pitchFamily="34" charset="-120"/>
+              </a:rPr>
+              <a:t>Related works</a:t>
             </a:r>
             <a:endParaRPr lang="en-US" dirty="0">
               <a:latin typeface="微軟正黑體" panose="020B0604030504040204" pitchFamily="34" charset="-120"/>
@@ -7282,51 +7293,6 @@
               <a:t>Proposed method</a:t>
             </a:r>
             <a:endParaRPr lang="en-US" sz="2000" dirty="0"/>
-          </a:p>
-        </p:txBody>
-      </p:sp>
-      <p:sp>
-        <p:nvSpPr>
-          <p:cNvPr id="9" name="Text 7">
-            <a:extLst>
-              <a:ext uri="{FF2B5EF4-FFF2-40B4-BE49-F238E27FC236}">
-                <a16:creationId xmlns:a16="http://schemas.microsoft.com/office/drawing/2014/main" id="{A1BD54F6-EC6B-391E-AB59-51E1C42B4CBE}"/>
-              </a:ext>
-            </a:extLst>
-          </p:cNvPr>
-          <p:cNvSpPr/>
-          <p:nvPr/>
-        </p:nvSpPr>
-        <p:spPr>
-          <a:xfrm>
-            <a:off x="5623560" y="4361688"/>
-            <a:ext cx="914400" cy="118872"/>
-          </a:xfrm>
-          <a:prstGeom prst="rect">
-            <a:avLst/>
-          </a:prstGeom>
-          <a:noFill/>
-          <a:ln/>
-        </p:spPr>
-        <p:txBody>
-          <a:bodyPr wrap="square" lIns="0" tIns="0" rIns="0" bIns="0" rtlCol="0" anchor="ctr"/>
-          <a:lstStyle/>
-          <a:p>
-            <a:pPr marL="0" indent="0" algn="ctr">
-              <a:buNone/>
-            </a:pPr>
-            <a:r>
-              <a:rPr lang="en-US" sz="540" dirty="0">
-                <a:solidFill>
-                  <a:srgbClr val="FFFFFF"/>
-                </a:solidFill>
-                <a:latin typeface="Noto Sans CJK TC" pitchFamily="34" charset="0"/>
-                <a:ea typeface="Noto Sans CJK TC" pitchFamily="34" charset="-122"/>
-                <a:cs typeface="Noto Sans CJK TC" pitchFamily="34" charset="-120"/>
-              </a:rPr>
-              <a:t>THREE</a:t>
-            </a:r>
-            <a:endParaRPr lang="en-US" sz="540" dirty="0"/>
           </a:p>
         </p:txBody>
       </p:sp>
@@ -12895,8 +12861,8 @@
           </a:p>
         </p:txBody>
       </p:sp>
-      <mc:AlternateContent xmlns:mc="http://schemas.openxmlformats.org/markup-compatibility/2006">
-        <mc:Choice xmlns:a14="http://schemas.microsoft.com/office/drawing/2010/main" Requires="a14">
+      <mc:AlternateContent xmlns:mc="http://schemas.openxmlformats.org/markup-compatibility/2006" xmlns:a14="http://schemas.microsoft.com/office/drawing/2010/main">
+        <mc:Choice Requires="a14">
           <p:sp>
             <p:nvSpPr>
               <p:cNvPr id="87" name="文字方塊 86">
@@ -12990,7 +12956,7 @@
             </p:txBody>
           </p:sp>
         </mc:Choice>
-        <mc:Fallback>
+        <mc:Fallback xmlns="">
           <p:sp>
             <p:nvSpPr>
               <p:cNvPr id="87" name="文字方塊 86">
@@ -14208,7 +14174,7 @@
               <a:p>
                 <a:pPr algn="ctr"/>
                 <a:r>
-                  <a:rPr lang="en-US" altLang="zh-TW" sz="1200" b="1" dirty="0">
+                  <a:rPr lang="en-US" altLang="zh-TW" sz="1100" b="1" dirty="0">
                     <a:solidFill>
                       <a:schemeClr val="tx1"/>
                     </a:solidFill>
@@ -14217,7 +14183,7 @@
                   </a:rPr>
                   <a:t>LCM Loss 2</a:t>
                 </a:r>
-                <a:endParaRPr lang="zh-TW" altLang="en-US" sz="1200" b="1" dirty="0">
+                <a:endParaRPr lang="zh-TW" altLang="en-US" sz="1100" b="1" dirty="0">
                   <a:solidFill>
                     <a:schemeClr val="tx1"/>
                   </a:solidFill>
@@ -14270,7 +14236,7 @@
               <a:p>
                 <a:pPr algn="ctr"/>
                 <a:r>
-                  <a:rPr lang="en-US" altLang="zh-TW" sz="1200" b="1" dirty="0">
+                  <a:rPr lang="en-US" altLang="zh-TW" sz="1100" b="1" dirty="0">
                     <a:solidFill>
                       <a:schemeClr val="tx1"/>
                     </a:solidFill>
@@ -14280,7 +14246,7 @@
                   <a:t>CE</a:t>
                 </a:r>
                 <a:r>
-                  <a:rPr lang="zh-TW" altLang="en-US" sz="1200" b="1" dirty="0">
+                  <a:rPr lang="zh-TW" altLang="en-US" sz="1100" b="1" dirty="0">
                     <a:solidFill>
                       <a:schemeClr val="tx1"/>
                     </a:solidFill>
@@ -14290,7 +14256,7 @@
                   <a:t> </a:t>
                 </a:r>
                 <a:r>
-                  <a:rPr lang="en-US" altLang="zh-TW" sz="1200" b="1" dirty="0">
+                  <a:rPr lang="en-US" altLang="zh-TW" sz="1100" b="1" dirty="0">
                     <a:solidFill>
                       <a:schemeClr val="tx1"/>
                     </a:solidFill>
@@ -14299,7 +14265,7 @@
                   </a:rPr>
                   <a:t>Loss 2</a:t>
                 </a:r>
-                <a:endParaRPr lang="zh-TW" altLang="en-US" sz="1200" b="1" dirty="0">
+                <a:endParaRPr lang="zh-TW" altLang="en-US" sz="1100" b="1" dirty="0">
                   <a:solidFill>
                     <a:schemeClr val="tx1"/>
                   </a:solidFill>
@@ -14538,7 +14504,7 @@
                 <a:p>
                   <a:pPr algn="ctr"/>
                   <a:r>
-                    <a:rPr lang="en-US" altLang="zh-TW" dirty="0">
+                    <a:rPr lang="en-US" altLang="zh-TW" sz="1400" b="1" dirty="0">
                       <a:solidFill>
                         <a:schemeClr val="tx1"/>
                       </a:solidFill>
@@ -14547,7 +14513,7 @@
                     </a:rPr>
                     <a:t>Head 1</a:t>
                   </a:r>
-                  <a:endParaRPr lang="zh-TW" altLang="en-US" dirty="0">
+                  <a:endParaRPr lang="zh-TW" altLang="en-US" sz="1400" b="1" dirty="0">
                     <a:solidFill>
                       <a:schemeClr val="tx1"/>
                     </a:solidFill>
@@ -15131,7 +15097,7 @@
                 <a:p>
                   <a:pPr algn="ctr"/>
                   <a:r>
-                    <a:rPr lang="en-US" altLang="zh-TW" sz="1200" b="1" dirty="0">
+                    <a:rPr lang="en-US" altLang="zh-TW" sz="1100" b="1" dirty="0">
                       <a:solidFill>
                         <a:schemeClr val="tx1"/>
                       </a:solidFill>
@@ -15141,7 +15107,7 @@
                     <a:t>CE</a:t>
                   </a:r>
                   <a:r>
-                    <a:rPr lang="zh-TW" altLang="en-US" sz="1200" b="1" dirty="0">
+                    <a:rPr lang="zh-TW" altLang="en-US" sz="1100" b="1" dirty="0">
                       <a:solidFill>
                         <a:schemeClr val="tx1"/>
                       </a:solidFill>
@@ -15151,7 +15117,7 @@
                     <a:t> </a:t>
                   </a:r>
                   <a:r>
-                    <a:rPr lang="en-US" altLang="zh-TW" sz="1200" b="1" dirty="0">
+                    <a:rPr lang="en-US" altLang="zh-TW" sz="1100" b="1" dirty="0">
                       <a:solidFill>
                         <a:schemeClr val="tx1"/>
                       </a:solidFill>
@@ -15160,7 +15126,7 @@
                     </a:rPr>
                     <a:t>Loss 1</a:t>
                   </a:r>
-                  <a:endParaRPr lang="zh-TW" altLang="en-US" sz="1200" b="1" dirty="0">
+                  <a:endParaRPr lang="zh-TW" altLang="en-US" sz="1100" b="1" dirty="0">
                     <a:solidFill>
                       <a:schemeClr val="tx1"/>
                     </a:solidFill>
@@ -15584,7 +15550,7 @@
                   <a:p>
                     <a:pPr algn="ctr"/>
                     <a:r>
-                      <a:rPr lang="en-US" altLang="zh-TW" dirty="0">
+                      <a:rPr lang="en-US" altLang="zh-TW" sz="1600" dirty="0">
                         <a:solidFill>
                           <a:schemeClr val="tx1"/>
                         </a:solidFill>
@@ -15593,7 +15559,7 @@
                       </a:rPr>
                       <a:t>Head 2</a:t>
                     </a:r>
-                    <a:endParaRPr lang="zh-TW" altLang="en-US" dirty="0">
+                    <a:endParaRPr lang="zh-TW" altLang="en-US" sz="1600" dirty="0">
                       <a:solidFill>
                         <a:schemeClr val="tx1"/>
                       </a:solidFill>
@@ -15933,7 +15899,7 @@
                   <a:p>
                     <a:pPr algn="ctr"/>
                     <a:r>
-                      <a:rPr lang="en-US" altLang="zh-TW" sz="1200" b="1" dirty="0">
+                      <a:rPr lang="en-US" altLang="zh-TW" sz="1100" b="1" dirty="0">
                         <a:solidFill>
                           <a:schemeClr val="tx1"/>
                         </a:solidFill>
@@ -15943,7 +15909,7 @@
                       <a:t>CE</a:t>
                     </a:r>
                     <a:r>
-                      <a:rPr lang="zh-TW" altLang="en-US" sz="1200" b="1" dirty="0">
+                      <a:rPr lang="zh-TW" altLang="en-US" sz="1100" b="1" dirty="0">
                         <a:solidFill>
                           <a:schemeClr val="tx1"/>
                         </a:solidFill>
@@ -15953,7 +15919,7 @@
                       <a:t> </a:t>
                     </a:r>
                     <a:r>
-                      <a:rPr lang="en-US" altLang="zh-TW" sz="1200" b="1" dirty="0">
+                      <a:rPr lang="en-US" altLang="zh-TW" sz="1100" b="1" dirty="0">
                         <a:solidFill>
                           <a:schemeClr val="tx1"/>
                         </a:solidFill>
@@ -15962,7 +15928,7 @@
                       </a:rPr>
                       <a:t>Loss K</a:t>
                     </a:r>
-                    <a:endParaRPr lang="zh-TW" altLang="en-US" sz="1200" b="1" dirty="0">
+                    <a:endParaRPr lang="zh-TW" altLang="en-US" sz="1100" b="1" dirty="0">
                       <a:solidFill>
                         <a:schemeClr val="tx1"/>
                       </a:solidFill>
@@ -16302,7 +16268,7 @@
                   <a:p>
                     <a:pPr algn="ctr"/>
                     <a:r>
-                      <a:rPr lang="en-US" altLang="zh-TW" dirty="0">
+                      <a:rPr lang="en-US" altLang="zh-TW" sz="1600" dirty="0">
                         <a:solidFill>
                           <a:schemeClr val="tx1"/>
                         </a:solidFill>
@@ -16311,7 +16277,7 @@
                       </a:rPr>
                       <a:t>Head K</a:t>
                     </a:r>
-                    <a:endParaRPr lang="zh-TW" altLang="en-US" dirty="0">
+                    <a:endParaRPr lang="zh-TW" altLang="en-US" sz="1600" dirty="0">
                       <a:solidFill>
                         <a:schemeClr val="tx1"/>
                       </a:solidFill>
@@ -16609,7 +16575,7 @@
                   <a:p>
                     <a:pPr algn="ctr"/>
                     <a:r>
-                      <a:rPr lang="en-US" altLang="zh-TW" sz="1200" b="1" dirty="0">
+                      <a:rPr lang="en-US" altLang="zh-TW" sz="1100" b="1" dirty="0">
                         <a:solidFill>
                           <a:schemeClr val="tx1"/>
                         </a:solidFill>
@@ -16618,7 +16584,7 @@
                       </a:rPr>
                       <a:t>LCM Loss K</a:t>
                     </a:r>
-                    <a:endParaRPr lang="zh-TW" altLang="en-US" sz="1200" b="1" dirty="0">
+                    <a:endParaRPr lang="zh-TW" altLang="en-US" sz="1100" b="1" dirty="0">
                       <a:solidFill>
                         <a:schemeClr val="tx1"/>
                       </a:solidFill>
@@ -16671,7 +16637,7 @@
                   <a:p>
                     <a:pPr algn="ctr"/>
                     <a:r>
-                      <a:rPr lang="en-US" altLang="zh-TW" sz="1200" b="1" dirty="0">
+                      <a:rPr lang="en-US" altLang="zh-TW" sz="1100" b="1" dirty="0">
                         <a:solidFill>
                           <a:schemeClr val="tx1"/>
                         </a:solidFill>
@@ -16680,7 +16646,7 @@
                       </a:rPr>
                       <a:t>SDC Loss K</a:t>
                     </a:r>
-                    <a:endParaRPr lang="zh-TW" altLang="en-US" sz="1200" b="1" dirty="0">
+                    <a:endParaRPr lang="zh-TW" altLang="en-US" sz="1100" b="1" dirty="0">
                       <a:solidFill>
                         <a:schemeClr val="tx1"/>
                       </a:solidFill>
@@ -16897,7 +16863,7 @@
               <a:p>
                 <a:pPr algn="ctr"/>
                 <a:r>
-                  <a:rPr lang="en-US" altLang="zh-TW" sz="1200" b="1" dirty="0">
+                  <a:rPr lang="en-US" altLang="zh-TW" sz="1100" b="1" dirty="0">
                     <a:solidFill>
                       <a:schemeClr val="tx1"/>
                     </a:solidFill>
@@ -16906,7 +16872,7 @@
                   </a:rPr>
                   <a:t>SDC Loss K</a:t>
                 </a:r>
-                <a:endParaRPr lang="zh-TW" altLang="en-US" sz="1200" b="1" dirty="0">
+                <a:endParaRPr lang="zh-TW" altLang="en-US" sz="1100" b="1" dirty="0">
                   <a:solidFill>
                     <a:schemeClr val="tx1"/>
                   </a:solidFill>
@@ -17422,54 +17388,6 @@
               <a:t>Experiment results</a:t>
             </a:r>
             <a:endParaRPr lang="en-US" sz="2000" dirty="0">
-              <a:latin typeface="微軟正黑體" panose="020B0604030504040204" pitchFamily="34" charset="-120"/>
-              <a:ea typeface="微軟正黑體" panose="020B0604030504040204" pitchFamily="34" charset="-120"/>
-            </a:endParaRPr>
-          </a:p>
-        </p:txBody>
-      </p:sp>
-      <p:sp>
-        <p:nvSpPr>
-          <p:cNvPr id="9" name="Text 7">
-            <a:extLst>
-              <a:ext uri="{FF2B5EF4-FFF2-40B4-BE49-F238E27FC236}">
-                <a16:creationId xmlns:a16="http://schemas.microsoft.com/office/drawing/2014/main" id="{073F3B76-779C-0596-DD2D-665C8B8DD6CE}"/>
-              </a:ext>
-            </a:extLst>
-          </p:cNvPr>
-          <p:cNvSpPr/>
-          <p:nvPr/>
-        </p:nvSpPr>
-        <p:spPr>
-          <a:xfrm>
-            <a:off x="5623560" y="4361688"/>
-            <a:ext cx="914400" cy="118872"/>
-          </a:xfrm>
-          <a:prstGeom prst="rect">
-            <a:avLst/>
-          </a:prstGeom>
-          <a:noFill/>
-          <a:ln/>
-        </p:spPr>
-        <p:txBody>
-          <a:bodyPr wrap="square" lIns="0" tIns="0" rIns="0" bIns="0" rtlCol="0" anchor="ctr"/>
-          <a:lstStyle/>
-          <a:p>
-            <a:pPr marL="0" indent="0" algn="ctr">
-              <a:buNone/>
-            </a:pPr>
-            <a:r>
-              <a:rPr lang="en-US" sz="540" dirty="0">
-                <a:solidFill>
-                  <a:srgbClr val="FFFFFF"/>
-                </a:solidFill>
-                <a:latin typeface="微軟正黑體" panose="020B0604030504040204" pitchFamily="34" charset="-120"/>
-                <a:ea typeface="微軟正黑體" panose="020B0604030504040204" pitchFamily="34" charset="-120"/>
-                <a:cs typeface="Noto Sans CJK TC" pitchFamily="34" charset="-120"/>
-              </a:rPr>
-              <a:t>FOUR</a:t>
-            </a:r>
-            <a:endParaRPr lang="en-US" sz="540" dirty="0">
               <a:latin typeface="微軟正黑體" panose="020B0604030504040204" pitchFamily="34" charset="-120"/>
               <a:ea typeface="微軟正黑體" panose="020B0604030504040204" pitchFamily="34" charset="-120"/>
             </a:endParaRPr>
@@ -20919,7 +20837,7 @@
                 <a:latin typeface="微軟正黑體" panose="020B0604030504040204" pitchFamily="34" charset="-120"/>
                 <a:ea typeface="微軟正黑體" panose="020B0604030504040204" pitchFamily="34" charset="-120"/>
               </a:rPr>
-              <a:t>每次只生成一個</a:t>
+              <a:t>每次只</a:t>
             </a:r>
             <a:r>
               <a:rPr lang="en-US" altLang="zh-TW" sz="1600" dirty="0">
@@ -20929,7 +20847,7 @@
                 <a:latin typeface="微軟正黑體" panose="020B0604030504040204" pitchFamily="34" charset="-120"/>
                 <a:ea typeface="微軟正黑體" panose="020B0604030504040204" pitchFamily="34" charset="-120"/>
               </a:rPr>
-              <a:t>token</a:t>
+              <a:t>forward</a:t>
             </a:r>
             <a:r>
               <a:rPr lang="zh-TW" altLang="en-US" sz="1600" dirty="0">
@@ -20939,7 +20857,7 @@
                 <a:latin typeface="微軟正黑體" panose="020B0604030504040204" pitchFamily="34" charset="-120"/>
                 <a:ea typeface="微軟正黑體" panose="020B0604030504040204" pitchFamily="34" charset="-120"/>
               </a:rPr>
-              <a:t>就結束</a:t>
+              <a:t>一次後統計</a:t>
             </a:r>
             <a:r>
               <a:rPr lang="en-US" altLang="zh-TW" sz="1600" dirty="0">
@@ -23358,7 +23276,7 @@
           <p:nvPr>
             <p:extLst>
               <p:ext uri="{D42A27DB-BD31-4B8C-83A1-F6EECF244321}">
-                <p14:modId xmlns:p14="http://schemas.microsoft.com/office/powerpoint/2010/main" val="3903650014"/>
+                <p14:modId xmlns:p14="http://schemas.microsoft.com/office/powerpoint/2010/main" val="3898035455"/>
               </p:ext>
             </p:extLst>
           </p:nvPr>
@@ -23604,10 +23522,47 @@
                     <a:p>
                       <a:pPr algn="ctr"/>
                       <a:r>
-                        <a:rPr lang="en-US" altLang="zh-TW" sz="1600" dirty="0"/>
-                        <a:t>consistency mainly improves distant draft prediction.</a:t>
-                      </a:r>
-                      <a:endParaRPr lang="zh-TW" altLang="en-US" sz="1600" dirty="0"/>
+                        <a:rPr lang="en-US" altLang="zh-TW" sz="1400" dirty="0" err="1">
+                          <a:latin typeface="微軟正黑體" panose="020B0604030504040204" pitchFamily="34" charset="-120"/>
+                          <a:ea typeface="微軟正黑體" panose="020B0604030504040204" pitchFamily="34" charset="-120"/>
+                        </a:rPr>
+                        <a:t>WikiText</a:t>
+                      </a:r>
+                      <a:r>
+                        <a:rPr lang="en-US" altLang="zh-TW" sz="1400" dirty="0">
+                          <a:latin typeface="微軟正黑體" panose="020B0604030504040204" pitchFamily="34" charset="-120"/>
+                          <a:ea typeface="微軟正黑體" panose="020B0604030504040204" pitchFamily="34" charset="-120"/>
+                        </a:rPr>
+                        <a:t> </a:t>
+                      </a:r>
+                      <a:r>
+                        <a:rPr lang="zh-TW" altLang="en-US" sz="1400" dirty="0">
+                          <a:latin typeface="微軟正黑體" panose="020B0604030504040204" pitchFamily="34" charset="-120"/>
+                          <a:ea typeface="微軟正黑體" panose="020B0604030504040204" pitchFamily="34" charset="-120"/>
+                        </a:rPr>
+                        <a:t>與 </a:t>
+                      </a:r>
+                      <a:r>
+                        <a:rPr lang="en-US" altLang="zh-TW" sz="1400" dirty="0" err="1">
+                          <a:latin typeface="微軟正黑體" panose="020B0604030504040204" pitchFamily="34" charset="-120"/>
+                          <a:ea typeface="微軟正黑體" panose="020B0604030504040204" pitchFamily="34" charset="-120"/>
+                        </a:rPr>
+                        <a:t>OpenWebText</a:t>
+                      </a:r>
+                      <a:r>
+                        <a:rPr lang="en-US" altLang="zh-TW" sz="1400" dirty="0">
+                          <a:latin typeface="微軟正黑體" panose="020B0604030504040204" pitchFamily="34" charset="-120"/>
+                          <a:ea typeface="微軟正黑體" panose="020B0604030504040204" pitchFamily="34" charset="-120"/>
+                        </a:rPr>
+                        <a:t> </a:t>
+                      </a:r>
+                      <a:r>
+                        <a:rPr lang="zh-TW" altLang="en-US" sz="1400" dirty="0">
+                          <a:latin typeface="微軟正黑體" panose="020B0604030504040204" pitchFamily="34" charset="-120"/>
+                          <a:ea typeface="微軟正黑體" panose="020B0604030504040204" pitchFamily="34" charset="-120"/>
+                        </a:rPr>
+                        <a:t>均屬於涵蓋多主題的一般英文文本，因此可能呈現相似的表現趨勢。</a:t>
+                      </a:r>
                     </a:p>
                   </a:txBody>
                   <a:tcPr anchor="ctr"/>
@@ -23696,10 +23651,26 @@
                     <a:p>
                       <a:pPr algn="ctr"/>
                       <a:r>
-                        <a:rPr lang="en-US" altLang="zh-TW" sz="1600" dirty="0"/>
-                        <a:t>regular syntax leads to gains across all heads.</a:t>
-                      </a:r>
-                      <a:endParaRPr lang="zh-TW" altLang="en-US" sz="1600" dirty="0"/>
+                        <a:rPr lang="zh-TW" altLang="en-US" sz="1400" dirty="0">
+                          <a:latin typeface="微軟正黑體" panose="020B0604030504040204" pitchFamily="34" charset="-120"/>
+                          <a:ea typeface="微軟正黑體" panose="020B0604030504040204" pitchFamily="34" charset="-120"/>
+                        </a:rPr>
+                        <a:t>較正式且規則的句子結構，可能有助於所有 </a:t>
+                      </a:r>
+                      <a:r>
+                        <a:rPr lang="en-US" altLang="zh-TW" sz="1400" dirty="0">
+                          <a:latin typeface="微軟正黑體" panose="020B0604030504040204" pitchFamily="34" charset="-120"/>
+                          <a:ea typeface="微軟正黑體" panose="020B0604030504040204" pitchFamily="34" charset="-120"/>
+                        </a:rPr>
+                        <a:t>prediction heads </a:t>
+                      </a:r>
+                      <a:r>
+                        <a:rPr lang="zh-TW" altLang="en-US" sz="1400" dirty="0">
+                          <a:latin typeface="微軟正黑體" panose="020B0604030504040204" pitchFamily="34" charset="-120"/>
+                          <a:ea typeface="微軟正黑體" panose="020B0604030504040204" pitchFamily="34" charset="-120"/>
+                        </a:rPr>
+                        <a:t>都獲得一致的改善。</a:t>
+                      </a:r>
                     </a:p>
                   </a:txBody>
                   <a:tcPr anchor="ctr"/>
@@ -23805,9 +23776,30 @@
                         <a:defRPr/>
                       </a:pPr>
                       <a:r>
-                        <a:rPr lang="en-US" altLang="zh-TW" sz="1600" dirty="0"/>
-                        <a:t>strong context dependence produces the largest Head 1 gain.</a:t>
-                      </a:r>
+                        <a:rPr lang="zh-TW" altLang="en-US" sz="1400" dirty="0">
+                          <a:latin typeface="微軟正黑體" panose="020B0604030504040204" pitchFamily="34" charset="-120"/>
+                          <a:ea typeface="微軟正黑體" panose="020B0604030504040204" pitchFamily="34" charset="-120"/>
+                        </a:rPr>
+                        <a:t>對長距離上下文的高度依賴，可能是 </a:t>
+                      </a:r>
+                      <a:r>
+                        <a:rPr lang="en-US" altLang="zh-TW" sz="1400" dirty="0">
+                          <a:latin typeface="微軟正黑體" panose="020B0604030504040204" pitchFamily="34" charset="-120"/>
+                          <a:ea typeface="微軟正黑體" panose="020B0604030504040204" pitchFamily="34" charset="-120"/>
+                        </a:rPr>
+                        <a:t>Head 1 </a:t>
+                      </a:r>
+                      <a:r>
+                        <a:rPr lang="zh-TW" altLang="en-US" sz="1400" dirty="0">
+                          <a:latin typeface="微軟正黑體" panose="020B0604030504040204" pitchFamily="34" charset="-120"/>
+                          <a:ea typeface="微軟正黑體" panose="020B0604030504040204" pitchFamily="34" charset="-120"/>
+                        </a:rPr>
+                        <a:t>改善幅度較大的原因。</a:t>
+                      </a:r>
+                      <a:endParaRPr lang="en-US" altLang="zh-TW" sz="1400" dirty="0">
+                        <a:latin typeface="微軟正黑體" panose="020B0604030504040204" pitchFamily="34" charset="-120"/>
+                        <a:ea typeface="微軟正黑體" panose="020B0604030504040204" pitchFamily="34" charset="-120"/>
+                      </a:endParaRPr>
                     </a:p>
                   </a:txBody>
                   <a:tcPr anchor="ctr"/>
@@ -23897,10 +23889,40 @@
                     <a:p>
                       <a:pPr algn="ctr"/>
                       <a:r>
-                        <a:rPr lang="en-US" altLang="zh-TW" sz="1600" dirty="0"/>
-                        <a:t>domain-specific knowledge limits improvement.</a:t>
-                      </a:r>
-                      <a:endParaRPr lang="zh-TW" altLang="en-US" sz="1600" dirty="0"/>
+                        <a:rPr lang="zh-TW" altLang="en-US" sz="1400" dirty="0">
+                          <a:latin typeface="微軟正黑體" panose="020B0604030504040204" pitchFamily="34" charset="-120"/>
+                          <a:ea typeface="微軟正黑體" panose="020B0604030504040204" pitchFamily="34" charset="-120"/>
+                        </a:rPr>
+                        <a:t>有許多</a:t>
+                      </a:r>
+                      <a:r>
+                        <a:rPr lang="en-US" altLang="zh-TW" sz="1400" dirty="0">
+                          <a:latin typeface="微軟正黑體" panose="020B0604030504040204" pitchFamily="34" charset="-120"/>
+                          <a:ea typeface="微軟正黑體" panose="020B0604030504040204" pitchFamily="34" charset="-120"/>
+                        </a:rPr>
+                        <a:t>latex</a:t>
+                      </a:r>
+                      <a:r>
+                        <a:rPr lang="zh-TW" altLang="en-US" sz="1400" dirty="0">
+                          <a:latin typeface="微軟正黑體" panose="020B0604030504040204" pitchFamily="34" charset="-120"/>
+                          <a:ea typeface="微軟正黑體" panose="020B0604030504040204" pitchFamily="34" charset="-120"/>
+                        </a:rPr>
+                        <a:t>程式碼，可能限制各個 </a:t>
+                      </a:r>
+                      <a:r>
+                        <a:rPr lang="en-US" altLang="zh-TW" sz="1400" dirty="0">
+                          <a:latin typeface="微軟正黑體" panose="020B0604030504040204" pitchFamily="34" charset="-120"/>
+                          <a:ea typeface="微軟正黑體" panose="020B0604030504040204" pitchFamily="34" charset="-120"/>
+                        </a:rPr>
+                        <a:t>prediction heads </a:t>
+                      </a:r>
+                      <a:r>
+                        <a:rPr lang="zh-TW" altLang="en-US" sz="1400" dirty="0">
+                          <a:latin typeface="微軟正黑體" panose="020B0604030504040204" pitchFamily="34" charset="-120"/>
+                          <a:ea typeface="微軟正黑體" panose="020B0604030504040204" pitchFamily="34" charset="-120"/>
+                        </a:rPr>
+                        <a:t>的改善幅度。</a:t>
+                      </a:r>
                     </a:p>
                   </a:txBody>
                   <a:tcPr anchor="ctr"/>
@@ -23990,10 +24012,26 @@
                     <a:p>
                       <a:pPr algn="ctr"/>
                       <a:r>
-                        <a:rPr lang="en-US" altLang="zh-TW" sz="1600" dirty="0"/>
-                        <a:t>structured biomedical writing provides stable gains across heads.</a:t>
-                      </a:r>
-                      <a:endParaRPr lang="zh-TW" altLang="en-US" sz="1600" dirty="0"/>
+                        <a:rPr lang="zh-TW" altLang="en-US" sz="1400" dirty="0">
+                          <a:latin typeface="微軟正黑體" panose="020B0604030504040204" pitchFamily="34" charset="-120"/>
+                          <a:ea typeface="微軟正黑體" panose="020B0604030504040204" pitchFamily="34" charset="-120"/>
+                        </a:rPr>
+                        <a:t>結構化且領域一致的寫作風格，可能有助於所有 </a:t>
+                      </a:r>
+                      <a:r>
+                        <a:rPr lang="en-US" altLang="zh-TW" sz="1400" dirty="0">
+                          <a:latin typeface="微軟正黑體" panose="020B0604030504040204" pitchFamily="34" charset="-120"/>
+                          <a:ea typeface="微軟正黑體" panose="020B0604030504040204" pitchFamily="34" charset="-120"/>
+                        </a:rPr>
+                        <a:t>heads </a:t>
+                      </a:r>
+                      <a:r>
+                        <a:rPr lang="zh-TW" altLang="en-US" sz="1400" dirty="0">
+                          <a:latin typeface="微軟正黑體" panose="020B0604030504040204" pitchFamily="34" charset="-120"/>
+                          <a:ea typeface="微軟正黑體" panose="020B0604030504040204" pitchFamily="34" charset="-120"/>
+                        </a:rPr>
+                        <a:t>獲得穩定改善。</a:t>
+                      </a:r>
                     </a:p>
                   </a:txBody>
                   <a:tcPr anchor="ctr"/>
@@ -24064,8 +24102,8 @@
         </p:nvSpPr>
         <p:spPr>
           <a:xfrm>
-            <a:off x="347469" y="5044009"/>
-            <a:ext cx="10580943" cy="1384995"/>
+            <a:off x="347470" y="5044009"/>
+            <a:ext cx="11193501" cy="1292662"/>
           </a:xfrm>
           <a:prstGeom prst="rect">
             <a:avLst/>
@@ -24093,178 +24131,285 @@
             </a:endParaRPr>
           </a:p>
           <a:p>
-            <a:pPr marL="285750" indent="-285750">
-              <a:buFont typeface="Arial" panose="020B0604020202020204" pitchFamily="34" charset="0"/>
-              <a:buChar char="•"/>
-            </a:pPr>
-            <a:r>
-              <a:rPr lang="en-US" altLang="zh-TW" sz="1600" dirty="0">
-                <a:latin typeface="微軟正黑體" panose="020B0604030504040204" pitchFamily="34" charset="-120"/>
-                <a:ea typeface="微軟正黑體" panose="020B0604030504040204" pitchFamily="34" charset="-120"/>
-              </a:rPr>
-              <a:t>SDC+LCM</a:t>
-            </a:r>
-            <a:r>
-              <a:rPr lang="zh-TW" altLang="en-US" sz="1600" dirty="0">
-                <a:latin typeface="微軟正黑體" panose="020B0604030504040204" pitchFamily="34" charset="-120"/>
-                <a:ea typeface="微軟正黑體" panose="020B0604030504040204" pitchFamily="34" charset="-120"/>
-              </a:rPr>
-              <a:t>能提升</a:t>
-            </a:r>
-            <a:r>
-              <a:rPr lang="en-US" altLang="zh-TW" sz="1600" dirty="0">
-                <a:latin typeface="微軟正黑體" panose="020B0604030504040204" pitchFamily="34" charset="-120"/>
-                <a:ea typeface="微軟正黑體" panose="020B0604030504040204" pitchFamily="34" charset="-120"/>
-              </a:rPr>
-              <a:t>Head 1(teacher)</a:t>
-            </a:r>
-            <a:r>
-              <a:rPr lang="zh-TW" altLang="en-US" sz="1600" dirty="0">
-                <a:latin typeface="微軟正黑體" panose="020B0604030504040204" pitchFamily="34" charset="-120"/>
-                <a:ea typeface="微軟正黑體" panose="020B0604030504040204" pitchFamily="34" charset="-120"/>
-              </a:rPr>
-              <a:t>在有結構性語句的表現</a:t>
-            </a:r>
-            <a:endParaRPr lang="en-US" altLang="zh-TW" sz="1600" dirty="0">
-              <a:latin typeface="微軟正黑體" panose="020B0604030504040204" pitchFamily="34" charset="-120"/>
-              <a:ea typeface="微軟正黑體" panose="020B0604030504040204" pitchFamily="34" charset="-120"/>
-            </a:endParaRPr>
-          </a:p>
-          <a:p>
-            <a:pPr marL="285750" indent="-285750">
-              <a:buFont typeface="Arial" panose="020B0604020202020204" pitchFamily="34" charset="0"/>
-              <a:buChar char="•"/>
-            </a:pPr>
-            <a:r>
-              <a:rPr lang="en-US" altLang="zh-TW" sz="1600" dirty="0" err="1">
-                <a:latin typeface="微軟正黑體" panose="020B0604030504040204" pitchFamily="34" charset="-120"/>
-                <a:ea typeface="微軟正黑體" panose="020B0604030504040204" pitchFamily="34" charset="-120"/>
-              </a:rPr>
-              <a:t>Wikitext</a:t>
-            </a:r>
-            <a:r>
-              <a:rPr lang="zh-TW" altLang="en-US" sz="1600" dirty="0">
-                <a:latin typeface="微軟正黑體" panose="020B0604030504040204" pitchFamily="34" charset="-120"/>
-                <a:ea typeface="微軟正黑體" panose="020B0604030504040204" pitchFamily="34" charset="-120"/>
-              </a:rPr>
-              <a:t>與</a:t>
-            </a:r>
-            <a:r>
-              <a:rPr lang="en-US" altLang="zh-TW" sz="1600" dirty="0" err="1">
-                <a:latin typeface="微軟正黑體" panose="020B0604030504040204" pitchFamily="34" charset="-120"/>
-                <a:ea typeface="微軟正黑體" panose="020B0604030504040204" pitchFamily="34" charset="-120"/>
-              </a:rPr>
-              <a:t>Openwebtext</a:t>
-            </a:r>
-            <a:r>
-              <a:rPr lang="zh-TW" altLang="en-US" sz="1600" dirty="0">
-                <a:latin typeface="微軟正黑體" panose="020B0604030504040204" pitchFamily="34" charset="-120"/>
-                <a:ea typeface="微軟正黑體" panose="020B0604030504040204" pitchFamily="34" charset="-120"/>
-              </a:rPr>
-              <a:t>類似，所以只在</a:t>
-            </a:r>
-            <a:r>
-              <a:rPr lang="en-US" altLang="zh-TW" sz="1600" dirty="0">
-                <a:latin typeface="微軟正黑體" panose="020B0604030504040204" pitchFamily="34" charset="-120"/>
-                <a:ea typeface="微軟正黑體" panose="020B0604030504040204" pitchFamily="34" charset="-120"/>
-              </a:rPr>
-              <a:t>Head 2~4</a:t>
-            </a:r>
-            <a:r>
-              <a:rPr lang="zh-TW" altLang="en-US" sz="1600" dirty="0">
-                <a:latin typeface="微軟正黑體" panose="020B0604030504040204" pitchFamily="34" charset="-120"/>
-                <a:ea typeface="微軟正黑體" panose="020B0604030504040204" pitchFamily="34" charset="-120"/>
-              </a:rPr>
-              <a:t>有提升</a:t>
-            </a:r>
-            <a:endParaRPr lang="en-US" altLang="zh-TW" sz="1600" dirty="0">
-              <a:latin typeface="微軟正黑體" panose="020B0604030504040204" pitchFamily="34" charset="-120"/>
-              <a:ea typeface="微軟正黑體" panose="020B0604030504040204" pitchFamily="34" charset="-120"/>
-            </a:endParaRPr>
-          </a:p>
-          <a:p>
-            <a:pPr marL="285750" indent="-285750">
-              <a:buFont typeface="Arial" panose="020B0604020202020204" pitchFamily="34" charset="0"/>
-              <a:buChar char="•"/>
-            </a:pPr>
-            <a:r>
-              <a:rPr lang="zh-TW" altLang="en-US" sz="1600" dirty="0">
-                <a:latin typeface="微軟正黑體" panose="020B0604030504040204" pitchFamily="34" charset="-120"/>
-                <a:ea typeface="微軟正黑體" panose="020B0604030504040204" pitchFamily="34" charset="-120"/>
-              </a:rPr>
-              <a:t>縮然有使用</a:t>
-            </a:r>
-            <a:r>
-              <a:rPr lang="en-US" altLang="zh-TW" sz="1600" dirty="0">
-                <a:latin typeface="微軟正黑體" panose="020B0604030504040204" pitchFamily="34" charset="-120"/>
-                <a:ea typeface="微軟正黑體" panose="020B0604030504040204" pitchFamily="34" charset="-120"/>
-              </a:rPr>
-              <a:t>SDC + LCM</a:t>
-            </a:r>
-            <a:r>
-              <a:rPr lang="zh-TW" altLang="en-US" sz="1600" dirty="0">
-                <a:latin typeface="微軟正黑體" panose="020B0604030504040204" pitchFamily="34" charset="-120"/>
-                <a:ea typeface="微軟正黑體" panose="020B0604030504040204" pitchFamily="34" charset="-120"/>
-              </a:rPr>
-              <a:t>約束</a:t>
-            </a:r>
-            <a:r>
-              <a:rPr lang="en-US" altLang="zh-TW" sz="1600" dirty="0">
-                <a:latin typeface="微軟正黑體" panose="020B0604030504040204" pitchFamily="34" charset="-120"/>
-                <a:ea typeface="微軟正黑體" panose="020B0604030504040204" pitchFamily="34" charset="-120"/>
-              </a:rPr>
-              <a:t>Head 2~4</a:t>
-            </a:r>
-            <a:r>
-              <a:rPr lang="zh-TW" altLang="en-US" sz="1600" dirty="0">
-                <a:latin typeface="微軟正黑體" panose="020B0604030504040204" pitchFamily="34" charset="-120"/>
-                <a:ea typeface="微軟正黑體" panose="020B0604030504040204" pitchFamily="34" charset="-120"/>
-              </a:rPr>
-              <a:t>，但實際上</a:t>
-            </a:r>
-            <a:r>
-              <a:rPr lang="en-US" altLang="zh-TW" sz="1600" dirty="0">
-                <a:latin typeface="微軟正黑體" panose="020B0604030504040204" pitchFamily="34" charset="-120"/>
-                <a:ea typeface="微軟正黑體" panose="020B0604030504040204" pitchFamily="34" charset="-120"/>
-              </a:rPr>
-              <a:t>Head 4</a:t>
-            </a:r>
-            <a:r>
-              <a:rPr lang="zh-TW" altLang="en-US" sz="1600" dirty="0">
-                <a:latin typeface="微軟正黑體" panose="020B0604030504040204" pitchFamily="34" charset="-120"/>
-                <a:ea typeface="微軟正黑體" panose="020B0604030504040204" pitchFamily="34" charset="-120"/>
-              </a:rPr>
-              <a:t>相比其他</a:t>
-            </a:r>
-            <a:r>
-              <a:rPr lang="en-US" altLang="zh-TW" sz="1600" dirty="0">
-                <a:latin typeface="微軟正黑體" panose="020B0604030504040204" pitchFamily="34" charset="-120"/>
-                <a:ea typeface="微軟正黑體" panose="020B0604030504040204" pitchFamily="34" charset="-120"/>
-              </a:rPr>
-              <a:t>Head</a:t>
-            </a:r>
-            <a:r>
-              <a:rPr lang="zh-TW" altLang="en-US" sz="1600" dirty="0">
-                <a:latin typeface="微軟正黑體" panose="020B0604030504040204" pitchFamily="34" charset="-120"/>
-                <a:ea typeface="微軟正黑體" panose="020B0604030504040204" pitchFamily="34" charset="-120"/>
-              </a:rPr>
-              <a:t>在</a:t>
-            </a:r>
-            <a:r>
-              <a:rPr lang="en-US" altLang="zh-TW" sz="1600" dirty="0">
-                <a:latin typeface="微軟正黑體" panose="020B0604030504040204" pitchFamily="34" charset="-120"/>
-                <a:ea typeface="微軟正黑體" panose="020B0604030504040204" pitchFamily="34" charset="-120"/>
-              </a:rPr>
-              <a:t>unseen</a:t>
-            </a:r>
-            <a:r>
-              <a:rPr lang="zh-TW" altLang="en-US" sz="1600" dirty="0">
-                <a:latin typeface="微軟正黑體" panose="020B0604030504040204" pitchFamily="34" charset="-120"/>
-                <a:ea typeface="微軟正黑體" panose="020B0604030504040204" pitchFamily="34" charset="-120"/>
-              </a:rPr>
-              <a:t>的文本上提升不明顯</a:t>
-            </a:r>
-            <a:endParaRPr lang="en-US" altLang="zh-TW" sz="1600" dirty="0">
+            <a:r>
+              <a:rPr lang="en-US" altLang="zh-TW" sz="1400" dirty="0">
+                <a:latin typeface="微軟正黑體" panose="020B0604030504040204" pitchFamily="34" charset="-120"/>
+                <a:ea typeface="微軟正黑體" panose="020B0604030504040204" pitchFamily="34" charset="-120"/>
+              </a:rPr>
+              <a:t>Head 1 </a:t>
+            </a:r>
+            <a:r>
+              <a:rPr lang="zh-TW" altLang="en-US" sz="1400" dirty="0">
+                <a:latin typeface="微軟正黑體" panose="020B0604030504040204" pitchFamily="34" charset="-120"/>
+                <a:ea typeface="微軟正黑體" panose="020B0604030504040204" pitchFamily="34" charset="-120"/>
+              </a:rPr>
+              <a:t>的改善程度與資料集特性高度相關，其中 </a:t>
+            </a:r>
+            <a:r>
+              <a:rPr lang="en-US" altLang="zh-TW" sz="1400" dirty="0">
+                <a:latin typeface="微軟正黑體" panose="020B0604030504040204" pitchFamily="34" charset="-120"/>
+                <a:ea typeface="微軟正黑體" panose="020B0604030504040204" pitchFamily="34" charset="-120"/>
+              </a:rPr>
+              <a:t>PTB</a:t>
+            </a:r>
+            <a:r>
+              <a:rPr lang="zh-TW" altLang="en-US" sz="1400" dirty="0">
+                <a:latin typeface="微軟正黑體" panose="020B0604030504040204" pitchFamily="34" charset="-120"/>
+                <a:ea typeface="微軟正黑體" panose="020B0604030504040204" pitchFamily="34" charset="-120"/>
+              </a:rPr>
+              <a:t>、</a:t>
+            </a:r>
+            <a:r>
+              <a:rPr lang="en-US" altLang="zh-TW" sz="1400" dirty="0">
+                <a:latin typeface="微軟正黑體" panose="020B0604030504040204" pitchFamily="34" charset="-120"/>
+                <a:ea typeface="微軟正黑體" panose="020B0604030504040204" pitchFamily="34" charset="-120"/>
+              </a:rPr>
+              <a:t>LAMBADA </a:t>
+            </a:r>
+            <a:r>
+              <a:rPr lang="zh-TW" altLang="en-US" sz="1400" dirty="0">
+                <a:latin typeface="微軟正黑體" panose="020B0604030504040204" pitchFamily="34" charset="-120"/>
+                <a:ea typeface="微軟正黑體" panose="020B0604030504040204" pitchFamily="34" charset="-120"/>
+              </a:rPr>
+              <a:t>與 </a:t>
+            </a:r>
+            <a:r>
+              <a:rPr lang="en-US" altLang="zh-TW" sz="1400" dirty="0">
+                <a:latin typeface="微軟正黑體" panose="020B0604030504040204" pitchFamily="34" charset="-120"/>
+                <a:ea typeface="微軟正黑體" panose="020B0604030504040204" pitchFamily="34" charset="-120"/>
+              </a:rPr>
+              <a:t>PubMed </a:t>
+            </a:r>
+            <a:r>
+              <a:rPr lang="zh-TW" altLang="en-US" sz="1400" dirty="0">
+                <a:latin typeface="微軟正黑體" panose="020B0604030504040204" pitchFamily="34" charset="-120"/>
+                <a:ea typeface="微軟正黑體" panose="020B0604030504040204" pitchFamily="34" charset="-120"/>
+              </a:rPr>
+              <a:t>的提升較明顯。</a:t>
+            </a:r>
+            <a:br>
+              <a:rPr lang="zh-TW" altLang="en-US" sz="1400" dirty="0">
+                <a:latin typeface="微軟正黑體" panose="020B0604030504040204" pitchFamily="34" charset="-120"/>
+                <a:ea typeface="微軟正黑體" panose="020B0604030504040204" pitchFamily="34" charset="-120"/>
+              </a:rPr>
+            </a:br>
+            <a:r>
+              <a:rPr lang="en-US" altLang="zh-TW" sz="1400" dirty="0" err="1">
+                <a:latin typeface="微軟正黑體" panose="020B0604030504040204" pitchFamily="34" charset="-120"/>
+                <a:ea typeface="微軟正黑體" panose="020B0604030504040204" pitchFamily="34" charset="-120"/>
+              </a:rPr>
+              <a:t>WikiText</a:t>
+            </a:r>
+            <a:r>
+              <a:rPr lang="en-US" altLang="zh-TW" sz="1400" dirty="0">
+                <a:latin typeface="微軟正黑體" panose="020B0604030504040204" pitchFamily="34" charset="-120"/>
+                <a:ea typeface="微軟正黑體" panose="020B0604030504040204" pitchFamily="34" charset="-120"/>
+              </a:rPr>
+              <a:t> </a:t>
+            </a:r>
+            <a:r>
+              <a:rPr lang="zh-TW" altLang="en-US" sz="1400" dirty="0">
+                <a:latin typeface="微軟正黑體" panose="020B0604030504040204" pitchFamily="34" charset="-120"/>
+                <a:ea typeface="微軟正黑體" panose="020B0604030504040204" pitchFamily="34" charset="-120"/>
+              </a:rPr>
+              <a:t>與 </a:t>
+            </a:r>
+            <a:r>
+              <a:rPr lang="en-US" altLang="zh-TW" sz="1400" dirty="0" err="1">
+                <a:latin typeface="微軟正黑體" panose="020B0604030504040204" pitchFamily="34" charset="-120"/>
+                <a:ea typeface="微軟正黑體" panose="020B0604030504040204" pitchFamily="34" charset="-120"/>
+              </a:rPr>
+              <a:t>OpenWebText</a:t>
+            </a:r>
+            <a:r>
+              <a:rPr lang="en-US" altLang="zh-TW" sz="1400" dirty="0">
+                <a:latin typeface="微軟正黑體" panose="020B0604030504040204" pitchFamily="34" charset="-120"/>
+                <a:ea typeface="微軟正黑體" panose="020B0604030504040204" pitchFamily="34" charset="-120"/>
+              </a:rPr>
+              <a:t> </a:t>
+            </a:r>
+            <a:r>
+              <a:rPr lang="zh-TW" altLang="en-US" sz="1400" dirty="0">
+                <a:latin typeface="微軟正黑體" panose="020B0604030504040204" pitchFamily="34" charset="-120"/>
+                <a:ea typeface="微軟正黑體" panose="020B0604030504040204" pitchFamily="34" charset="-120"/>
+              </a:rPr>
+              <a:t>均屬於一般領域英文文本，可能因此呈現相似的表現趨勢；</a:t>
+            </a:r>
+            <a:r>
+              <a:rPr lang="en-US" altLang="zh-TW" sz="1400" dirty="0">
+                <a:latin typeface="微軟正黑體" panose="020B0604030504040204" pitchFamily="34" charset="-120"/>
+                <a:ea typeface="微軟正黑體" panose="020B0604030504040204" pitchFamily="34" charset="-120"/>
+              </a:rPr>
+              <a:t>Head 1 </a:t>
+            </a:r>
+            <a:r>
+              <a:rPr lang="zh-TW" altLang="en-US" sz="1400" dirty="0">
+                <a:latin typeface="微軟正黑體" panose="020B0604030504040204" pitchFamily="34" charset="-120"/>
+                <a:ea typeface="微軟正黑體" panose="020B0604030504040204" pitchFamily="34" charset="-120"/>
+              </a:rPr>
+              <a:t>改善有限，提升主要集中於 </a:t>
+            </a:r>
+            <a:r>
+              <a:rPr lang="en-US" altLang="zh-TW" sz="1400" dirty="0">
+                <a:latin typeface="微軟正黑體" panose="020B0604030504040204" pitchFamily="34" charset="-120"/>
+                <a:ea typeface="微軟正黑體" panose="020B0604030504040204" pitchFamily="34" charset="-120"/>
+              </a:rPr>
+              <a:t>Head 2</a:t>
+            </a:r>
+            <a:r>
+              <a:rPr lang="zh-TW" altLang="en-US" sz="1400" dirty="0">
+                <a:latin typeface="微軟正黑體" panose="020B0604030504040204" pitchFamily="34" charset="-120"/>
+                <a:ea typeface="微軟正黑體" panose="020B0604030504040204" pitchFamily="34" charset="-120"/>
+              </a:rPr>
+              <a:t>～</a:t>
+            </a:r>
+            <a:r>
+              <a:rPr lang="en-US" altLang="zh-TW" sz="1400" dirty="0">
+                <a:latin typeface="微軟正黑體" panose="020B0604030504040204" pitchFamily="34" charset="-120"/>
+                <a:ea typeface="微軟正黑體" panose="020B0604030504040204" pitchFamily="34" charset="-120"/>
+              </a:rPr>
+              <a:t>4</a:t>
+            </a:r>
+            <a:r>
+              <a:rPr lang="zh-TW" altLang="en-US" sz="1400" dirty="0">
+                <a:latin typeface="微軟正黑體" panose="020B0604030504040204" pitchFamily="34" charset="-120"/>
+                <a:ea typeface="微軟正黑體" panose="020B0604030504040204" pitchFamily="34" charset="-120"/>
+              </a:rPr>
+              <a:t>。</a:t>
+            </a:r>
+            <a:br>
+              <a:rPr lang="en-US" altLang="zh-TW" sz="1400" dirty="0">
+                <a:latin typeface="微軟正黑體" panose="020B0604030504040204" pitchFamily="34" charset="-120"/>
+                <a:ea typeface="微軟正黑體" panose="020B0604030504040204" pitchFamily="34" charset="-120"/>
+              </a:rPr>
+            </a:br>
+            <a:r>
+              <a:rPr lang="zh-TW" altLang="en-US" sz="1400" dirty="0">
+                <a:latin typeface="微軟正黑體" panose="020B0604030504040204" pitchFamily="34" charset="-120"/>
+                <a:ea typeface="微軟正黑體" panose="020B0604030504040204" pitchFamily="34" charset="-120"/>
+              </a:rPr>
+              <a:t>雖然 </a:t>
+            </a:r>
+            <a:r>
+              <a:rPr lang="en-US" altLang="zh-TW" sz="1400" dirty="0">
+                <a:latin typeface="微軟正黑體" panose="020B0604030504040204" pitchFamily="34" charset="-120"/>
+                <a:ea typeface="微軟正黑體" panose="020B0604030504040204" pitchFamily="34" charset="-120"/>
+              </a:rPr>
+              <a:t>SDC </a:t>
+            </a:r>
+            <a:r>
+              <a:rPr lang="zh-TW" altLang="en-US" sz="1400" dirty="0">
+                <a:latin typeface="微軟正黑體" panose="020B0604030504040204" pitchFamily="34" charset="-120"/>
+                <a:ea typeface="微軟正黑體" panose="020B0604030504040204" pitchFamily="34" charset="-120"/>
+              </a:rPr>
+              <a:t>與 </a:t>
+            </a:r>
+            <a:r>
+              <a:rPr lang="en-US" altLang="zh-TW" sz="1400" dirty="0">
+                <a:latin typeface="微軟正黑體" panose="020B0604030504040204" pitchFamily="34" charset="-120"/>
+                <a:ea typeface="微軟正黑體" panose="020B0604030504040204" pitchFamily="34" charset="-120"/>
+              </a:rPr>
+              <a:t>LCM </a:t>
+            </a:r>
+            <a:r>
+              <a:rPr lang="zh-TW" altLang="en-US" sz="1400" dirty="0">
+                <a:latin typeface="微軟正黑體" panose="020B0604030504040204" pitchFamily="34" charset="-120"/>
+                <a:ea typeface="微軟正黑體" panose="020B0604030504040204" pitchFamily="34" charset="-120"/>
+              </a:rPr>
+              <a:t>直接約束 </a:t>
+            </a:r>
+            <a:r>
+              <a:rPr lang="en-US" altLang="zh-TW" sz="1400" dirty="0">
+                <a:latin typeface="微軟正黑體" panose="020B0604030504040204" pitchFamily="34" charset="-120"/>
+                <a:ea typeface="微軟正黑體" panose="020B0604030504040204" pitchFamily="34" charset="-120"/>
+              </a:rPr>
+              <a:t>Head 2</a:t>
+            </a:r>
+            <a:r>
+              <a:rPr lang="zh-TW" altLang="en-US" sz="1400" dirty="0">
+                <a:latin typeface="微軟正黑體" panose="020B0604030504040204" pitchFamily="34" charset="-120"/>
+                <a:ea typeface="微軟正黑體" panose="020B0604030504040204" pitchFamily="34" charset="-120"/>
+              </a:rPr>
+              <a:t>～</a:t>
+            </a:r>
+            <a:r>
+              <a:rPr lang="en-US" altLang="zh-TW" sz="1400" dirty="0">
+                <a:latin typeface="微軟正黑體" panose="020B0604030504040204" pitchFamily="34" charset="-120"/>
+                <a:ea typeface="微軟正黑體" panose="020B0604030504040204" pitchFamily="34" charset="-120"/>
+              </a:rPr>
+              <a:t>4</a:t>
+            </a:r>
+            <a:r>
+              <a:rPr lang="zh-TW" altLang="en-US" sz="1400" dirty="0">
+                <a:latin typeface="微軟正黑體" panose="020B0604030504040204" pitchFamily="34" charset="-120"/>
+                <a:ea typeface="微軟正黑體" panose="020B0604030504040204" pitchFamily="34" charset="-120"/>
+              </a:rPr>
+              <a:t>，但 </a:t>
+            </a:r>
+            <a:r>
+              <a:rPr lang="en-US" altLang="zh-TW" sz="1400" dirty="0">
+                <a:latin typeface="微軟正黑體" panose="020B0604030504040204" pitchFamily="34" charset="-120"/>
+                <a:ea typeface="微軟正黑體" panose="020B0604030504040204" pitchFamily="34" charset="-120"/>
+              </a:rPr>
+              <a:t>Head 4 </a:t>
+            </a:r>
+            <a:r>
+              <a:rPr lang="zh-TW" altLang="en-US" sz="1400" dirty="0">
+                <a:latin typeface="微軟正黑體" panose="020B0604030504040204" pitchFamily="34" charset="-120"/>
+                <a:ea typeface="微軟正黑體" panose="020B0604030504040204" pitchFamily="34" charset="-120"/>
+              </a:rPr>
+              <a:t>在不同 </a:t>
+            </a:r>
+            <a:r>
+              <a:rPr lang="en-US" altLang="zh-TW" sz="1400" dirty="0">
+                <a:latin typeface="微軟正黑體" panose="020B0604030504040204" pitchFamily="34" charset="-120"/>
+                <a:ea typeface="微軟正黑體" panose="020B0604030504040204" pitchFamily="34" charset="-120"/>
+              </a:rPr>
+              <a:t>unseen datasets </a:t>
+            </a:r>
+            <a:r>
+              <a:rPr lang="zh-TW" altLang="en-US" sz="1400" dirty="0">
+                <a:latin typeface="微軟正黑體" panose="020B0604030504040204" pitchFamily="34" charset="-120"/>
+                <a:ea typeface="微軟正黑體" panose="020B0604030504040204" pitchFamily="34" charset="-120"/>
+              </a:rPr>
+              <a:t>上的改善幅度並不一致，尤其在 </a:t>
+            </a:r>
+            <a:r>
+              <a:rPr lang="en-US" altLang="zh-TW" sz="1400" dirty="0" err="1">
+                <a:latin typeface="微軟正黑體" panose="020B0604030504040204" pitchFamily="34" charset="-120"/>
+                <a:ea typeface="微軟正黑體" panose="020B0604030504040204" pitchFamily="34" charset="-120"/>
+              </a:rPr>
+              <a:t>arXiv</a:t>
+            </a:r>
+            <a:r>
+              <a:rPr lang="en-US" altLang="zh-TW" sz="1400" dirty="0">
+                <a:latin typeface="微軟正黑體" panose="020B0604030504040204" pitchFamily="34" charset="-120"/>
+                <a:ea typeface="微軟正黑體" panose="020B0604030504040204" pitchFamily="34" charset="-120"/>
+              </a:rPr>
+              <a:t> </a:t>
+            </a:r>
+            <a:r>
+              <a:rPr lang="zh-TW" altLang="en-US" sz="1400" dirty="0">
+                <a:latin typeface="微軟正黑體" panose="020B0604030504040204" pitchFamily="34" charset="-120"/>
+                <a:ea typeface="微軟正黑體" panose="020B0604030504040204" pitchFamily="34" charset="-120"/>
+              </a:rPr>
+              <a:t>上僅提升 </a:t>
+            </a:r>
+            <a:r>
+              <a:rPr lang="en-US" altLang="zh-TW" sz="1400" dirty="0">
+                <a:latin typeface="微軟正黑體" panose="020B0604030504040204" pitchFamily="34" charset="-120"/>
+                <a:ea typeface="微軟正黑體" panose="020B0604030504040204" pitchFamily="34" charset="-120"/>
+              </a:rPr>
+              <a:t>0.27%</a:t>
+            </a:r>
+            <a:r>
+              <a:rPr lang="zh-TW" altLang="en-US" sz="1400" dirty="0">
+                <a:latin typeface="微軟正黑體" panose="020B0604030504040204" pitchFamily="34" charset="-120"/>
+                <a:ea typeface="微軟正黑體" panose="020B0604030504040204" pitchFamily="34" charset="-120"/>
+              </a:rPr>
+              <a:t>。</a:t>
+            </a:r>
+            <a:endParaRPr lang="en-US" altLang="zh-TW" sz="1400" dirty="0">
               <a:latin typeface="微軟正黑體" panose="020B0604030504040204" pitchFamily="34" charset="-120"/>
               <a:ea typeface="微軟正黑體" panose="020B0604030504040204" pitchFamily="34" charset="-120"/>
             </a:endParaRPr>
@@ -24592,7 +24737,7 @@
           <p:nvPr>
             <p:extLst>
               <p:ext uri="{D42A27DB-BD31-4B8C-83A1-F6EECF244321}">
-                <p14:modId xmlns:p14="http://schemas.microsoft.com/office/powerpoint/2010/main" val="2879433079"/>
+                <p14:modId xmlns:p14="http://schemas.microsoft.com/office/powerpoint/2010/main" val="3658686297"/>
               </p:ext>
             </p:extLst>
           </p:nvPr>
@@ -27125,7 +27270,7 @@
           <p:nvPr>
             <p:extLst>
               <p:ext uri="{D42A27DB-BD31-4B8C-83A1-F6EECF244321}">
-                <p14:modId xmlns:p14="http://schemas.microsoft.com/office/powerpoint/2010/main" val="1864701827"/>
+                <p14:modId xmlns:p14="http://schemas.microsoft.com/office/powerpoint/2010/main" val="977746666"/>
               </p:ext>
             </p:extLst>
           </p:nvPr>
@@ -27941,7 +28086,7 @@
                         <a:buNone/>
                       </a:pPr>
                       <a:r>
-                        <a:rPr lang="en-US" altLang="zh-TW" sz="1600"/>
+                        <a:rPr lang="en-US" altLang="zh-TW" sz="1600" dirty="0"/>
                         <a:t>0.6414 ± 0.0000</a:t>
                       </a:r>
                     </a:p>
@@ -28249,7 +28394,7 @@
                         <a:buNone/>
                       </a:pPr>
                       <a:r>
-                        <a:rPr lang="en-US" altLang="zh-TW" sz="1600"/>
+                        <a:rPr lang="en-US" altLang="zh-TW" sz="1600" dirty="0"/>
                         <a:t>0.6398 ± 0.0000</a:t>
                       </a:r>
                     </a:p>
@@ -28869,7 +29014,7 @@
                         <a:buNone/>
                       </a:pPr>
                       <a:r>
-                        <a:rPr lang="en-US" altLang="zh-TW" sz="1600"/>
+                        <a:rPr lang="en-US" altLang="zh-TW" sz="1600" dirty="0"/>
                         <a:t>0.6495 ± 0.0000</a:t>
                       </a:r>
                     </a:p>
@@ -31664,51 +31809,6 @@
       </p:sp>
       <p:sp>
         <p:nvSpPr>
-          <p:cNvPr id="9" name="Text 7">
-            <a:extLst>
-              <a:ext uri="{FF2B5EF4-FFF2-40B4-BE49-F238E27FC236}">
-                <a16:creationId xmlns:a16="http://schemas.microsoft.com/office/drawing/2014/main" id="{B2DB645C-01D2-9638-1550-7382E67650BC}"/>
-              </a:ext>
-            </a:extLst>
-          </p:cNvPr>
-          <p:cNvSpPr/>
-          <p:nvPr/>
-        </p:nvSpPr>
-        <p:spPr>
-          <a:xfrm>
-            <a:off x="5623560" y="4361688"/>
-            <a:ext cx="914400" cy="118872"/>
-          </a:xfrm>
-          <a:prstGeom prst="rect">
-            <a:avLst/>
-          </a:prstGeom>
-          <a:noFill/>
-          <a:ln/>
-        </p:spPr>
-        <p:txBody>
-          <a:bodyPr wrap="square" lIns="0" tIns="0" rIns="0" bIns="0" rtlCol="0" anchor="ctr"/>
-          <a:lstStyle/>
-          <a:p>
-            <a:pPr marL="0" indent="0" algn="ctr">
-              <a:buNone/>
-            </a:pPr>
-            <a:r>
-              <a:rPr lang="en-US" sz="540" dirty="0">
-                <a:solidFill>
-                  <a:srgbClr val="FFFFFF"/>
-                </a:solidFill>
-                <a:latin typeface="Noto Sans CJK TC" pitchFamily="34" charset="0"/>
-                <a:ea typeface="Noto Sans CJK TC" pitchFamily="34" charset="-122"/>
-                <a:cs typeface="Noto Sans CJK TC" pitchFamily="34" charset="-120"/>
-              </a:rPr>
-              <a:t>FIVE</a:t>
-            </a:r>
-            <a:endParaRPr lang="en-US" sz="540" dirty="0"/>
-          </a:p>
-        </p:txBody>
-      </p:sp>
-      <p:sp>
-        <p:nvSpPr>
           <p:cNvPr id="4" name="投影片編號版面配置區 3">
             <a:extLst>
               <a:ext uri="{FF2B5EF4-FFF2-40B4-BE49-F238E27FC236}">
@@ -31960,7 +32060,7 @@
         <p:spPr>
           <a:xfrm>
             <a:off x="914400" y="4892040"/>
-            <a:ext cx="10332720" cy="502920"/>
+            <a:ext cx="10608816" cy="502920"/>
           </a:xfrm>
           <a:prstGeom prst="rect">
             <a:avLst/>
@@ -31980,7 +32080,7 @@
               <a:buNone/>
             </a:pPr>
             <a:r>
-              <a:rPr lang="en-US" sz="1600" dirty="0" err="1">
+              <a:rPr lang="en-US" sz="1600" b="1" dirty="0">
                 <a:solidFill>
                   <a:srgbClr val="27323A"/>
                 </a:solidFill>
@@ -31988,10 +32088,10 @@
                 <a:ea typeface="微軟正黑體" panose="020B0604030504040204" pitchFamily="34" charset="-120"/>
                 <a:cs typeface="Noto Sans CJK TC" pitchFamily="34" charset="-120"/>
               </a:rPr>
-              <a:t>核心訊息：consistency-based</a:t>
-            </a:r>
-            <a:r>
-              <a:rPr lang="en-US" sz="1600" dirty="0">
+              <a:t>consistency-based training 能</a:t>
+            </a:r>
+            <a:r>
+              <a:rPr lang="zh-TW" altLang="en-US" sz="1600" b="1" dirty="0">
                 <a:solidFill>
                   <a:srgbClr val="27323A"/>
                 </a:solidFill>
@@ -31999,9 +32099,42 @@
                 <a:ea typeface="微軟正黑體" panose="020B0604030504040204" pitchFamily="34" charset="-120"/>
                 <a:cs typeface="Noto Sans CJK TC" pitchFamily="34" charset="-120"/>
               </a:rPr>
-              <a:t> training 能有效降低 draft heads 的分佈漂移，使 semi-autoregressive generation 更穩定。</a:t>
-            </a:r>
-            <a:endParaRPr lang="en-US" sz="1600" dirty="0">
+              <a:t>提升</a:t>
+            </a:r>
+            <a:r>
+              <a:rPr lang="en-US" sz="1600" b="1" dirty="0">
+                <a:solidFill>
+                  <a:srgbClr val="27323A"/>
+                </a:solidFill>
+                <a:latin typeface="微軟正黑體" panose="020B0604030504040204" pitchFamily="34" charset="-120"/>
+                <a:ea typeface="微軟正黑體" panose="020B0604030504040204" pitchFamily="34" charset="-120"/>
+                <a:cs typeface="Noto Sans CJK TC" pitchFamily="34" charset="-120"/>
+              </a:rPr>
+              <a:t> draft heads 的</a:t>
+            </a:r>
+            <a:r>
+              <a:rPr lang="zh-TW" altLang="en-US" sz="1600" b="1" dirty="0">
+                <a:solidFill>
+                  <a:srgbClr val="27323A"/>
+                </a:solidFill>
+                <a:latin typeface="微軟正黑體" panose="020B0604030504040204" pitchFamily="34" charset="-120"/>
+                <a:ea typeface="微軟正黑體" panose="020B0604030504040204" pitchFamily="34" charset="-120"/>
+                <a:cs typeface="Noto Sans CJK TC" pitchFamily="34" charset="-120"/>
+              </a:rPr>
+              <a:t>最佳化</a:t>
+            </a:r>
+            <a:r>
+              <a:rPr lang="en-US" sz="1600" b="1" dirty="0">
+                <a:solidFill>
+                  <a:srgbClr val="27323A"/>
+                </a:solidFill>
+                <a:latin typeface="微軟正黑體" panose="020B0604030504040204" pitchFamily="34" charset="-120"/>
+                <a:ea typeface="微軟正黑體" panose="020B0604030504040204" pitchFamily="34" charset="-120"/>
+                <a:cs typeface="Noto Sans CJK TC" pitchFamily="34" charset="-120"/>
+              </a:rPr>
+              <a:t>，使 semi-autoregressive generation 更穩定。</a:t>
+            </a:r>
+            <a:endParaRPr lang="en-US" sz="1600" b="1" dirty="0">
               <a:latin typeface="微軟正黑體" panose="020B0604030504040204" pitchFamily="34" charset="-120"/>
               <a:ea typeface="微軟正黑體" panose="020B0604030504040204" pitchFamily="34" charset="-120"/>
             </a:endParaRPr>
@@ -32970,51 +33103,6 @@
           </a:p>
         </p:txBody>
       </p:sp>
-      <p:sp>
-        <p:nvSpPr>
-          <p:cNvPr id="9" name="Text 7">
-            <a:extLst>
-              <a:ext uri="{FF2B5EF4-FFF2-40B4-BE49-F238E27FC236}">
-                <a16:creationId xmlns:a16="http://schemas.microsoft.com/office/drawing/2014/main" id="{EA43D940-7285-B6AE-7967-706A72C435E7}"/>
-              </a:ext>
-            </a:extLst>
-          </p:cNvPr>
-          <p:cNvSpPr/>
-          <p:nvPr/>
-        </p:nvSpPr>
-        <p:spPr>
-          <a:xfrm>
-            <a:off x="5623560" y="4361688"/>
-            <a:ext cx="2543896" cy="1018180"/>
-          </a:xfrm>
-          <a:prstGeom prst="rect">
-            <a:avLst/>
-          </a:prstGeom>
-          <a:noFill/>
-          <a:ln/>
-        </p:spPr>
-        <p:txBody>
-          <a:bodyPr wrap="square" lIns="0" tIns="0" rIns="0" bIns="0" rtlCol="0" anchor="ctr"/>
-          <a:lstStyle/>
-          <a:p>
-            <a:pPr marL="0" indent="0" algn="ctr">
-              <a:buNone/>
-            </a:pPr>
-            <a:r>
-              <a:rPr lang="en-US" dirty="0">
-                <a:solidFill>
-                  <a:srgbClr val="FFFFFF"/>
-                </a:solidFill>
-                <a:latin typeface="Noto Sans CJK TC" pitchFamily="34" charset="0"/>
-                <a:ea typeface="Noto Sans CJK TC" pitchFamily="34" charset="-122"/>
-                <a:cs typeface="Noto Sans CJK TC" pitchFamily="34" charset="-120"/>
-              </a:rPr>
-              <a:t>ONE</a:t>
-            </a:r>
-            <a:endParaRPr lang="en-US" dirty="0"/>
-          </a:p>
-        </p:txBody>
-      </p:sp>
     </p:spTree>
     <p:extLst>
       <p:ext uri="{BB962C8B-B14F-4D97-AF65-F5344CB8AC3E}">
@@ -33676,17 +33764,6 @@
               <a:buNone/>
             </a:pPr>
             <a:r>
-              <a:rPr lang="en-US" sz="1600" b="1" dirty="0" err="1">
-                <a:solidFill>
-                  <a:srgbClr val="27323A"/>
-                </a:solidFill>
-                <a:latin typeface="微軟正黑體" panose="020B0604030504040204" pitchFamily="34" charset="-120"/>
-                <a:ea typeface="微軟正黑體" panose="020B0604030504040204" pitchFamily="34" charset="-120"/>
-                <a:cs typeface="Noto Sans CJK TC" pitchFamily="34" charset="-120"/>
-              </a:rPr>
-              <a:t>核心假設：若</a:t>
-            </a:r>
-            <a:r>
               <a:rPr lang="en-US" sz="1600" b="1" dirty="0">
                 <a:solidFill>
                   <a:srgbClr val="27323A"/>
@@ -33695,7 +33772,7 @@
                 <a:ea typeface="微軟正黑體" panose="020B0604030504040204" pitchFamily="34" charset="-120"/>
                 <a:cs typeface="Noto Sans CJK TC" pitchFamily="34" charset="-120"/>
               </a:rPr>
-              <a:t> draft</a:t>
+              <a:t>若 draft</a:t>
             </a:r>
             <a:r>
               <a:rPr lang="zh-TW" altLang="en-US" sz="1600" b="1" dirty="0">
@@ -34111,29 +34188,7 @@
                 <a:ea typeface="微軟正黑體" panose="020B0604030504040204" pitchFamily="34" charset="-120"/>
                 <a:cs typeface="Noto Sans CJK TC" pitchFamily="34" charset="-120"/>
               </a:rPr>
-              <a:t>Motivation — deeper </a:t>
-            </a:r>
-            <a:r>
-              <a:rPr lang="en-US" sz="1600">
-                <a:solidFill>
-                  <a:srgbClr val="60707A"/>
-                </a:solidFill>
-                <a:latin typeface="微軟正黑體" panose="020B0604030504040204" pitchFamily="34" charset="-120"/>
-                <a:ea typeface="微軟正黑體" panose="020B0604030504040204" pitchFamily="34" charset="-120"/>
-                <a:cs typeface="Noto Sans CJK TC" pitchFamily="34" charset="-120"/>
-              </a:rPr>
-              <a:t>draft model </a:t>
-            </a:r>
-            <a:r>
-              <a:rPr lang="en-US" sz="1600" dirty="0">
-                <a:solidFill>
-                  <a:srgbClr val="60707A"/>
-                </a:solidFill>
-                <a:latin typeface="微軟正黑體" panose="020B0604030504040204" pitchFamily="34" charset="-120"/>
-                <a:ea typeface="微軟正黑體" panose="020B0604030504040204" pitchFamily="34" charset="-120"/>
-                <a:cs typeface="Noto Sans CJK TC" pitchFamily="34" charset="-120"/>
-              </a:rPr>
-              <a:t>are harder to optimize</a:t>
+              <a:t>Motivation — deeper draft model are harder to optimize</a:t>
             </a:r>
             <a:endParaRPr lang="en-US" sz="1600" dirty="0">
               <a:latin typeface="微軟正黑體" panose="020B0604030504040204" pitchFamily="34" charset="-120"/>
@@ -34279,17 +34334,6 @@
             <a:pPr marL="0" indent="0">
               <a:buNone/>
             </a:pPr>
-            <a:r>
-              <a:rPr lang="en-US" sz="1600" b="1" dirty="0">
-                <a:solidFill>
-                  <a:srgbClr val="27323A"/>
-                </a:solidFill>
-                <a:latin typeface="微軟正黑體" panose="020B0604030504040204" pitchFamily="34" charset="-120"/>
-                <a:ea typeface="微軟正黑體" panose="020B0604030504040204" pitchFamily="34" charset="-120"/>
-                <a:cs typeface="Noto Sans CJK TC" pitchFamily="34" charset="-120"/>
-              </a:rPr>
-              <a:t>研究焦點：</a:t>
-            </a:r>
             <a:r>
               <a:rPr lang="zh-TW" altLang="en-US" sz="1600" b="1" dirty="0">
                 <a:solidFill>
@@ -36986,7 +37030,7 @@
                 <a:latin typeface="微軟正黑體" panose="020B0604030504040204" pitchFamily="34" charset="-120"/>
                 <a:ea typeface="微軟正黑體" panose="020B0604030504040204" pitchFamily="34" charset="-120"/>
               </a:rPr>
-              <a:t>Part2: Related works / MTP</a:t>
+              <a:t>Part2: Related works</a:t>
             </a:r>
           </a:p>
         </p:txBody>
@@ -41237,7 +41281,7 @@
                 <a:latin typeface="微軟正黑體" panose="020B0604030504040204" pitchFamily="34" charset="-120"/>
                 <a:ea typeface="微軟正黑體" panose="020B0604030504040204" pitchFamily="34" charset="-120"/>
               </a:rPr>
-              <a:t>模型架構重點：計算成本主要集中在 </a:t>
+              <a:t>計算成本主要集中在 </a:t>
             </a:r>
             <a:r>
               <a:rPr lang="en-US" altLang="zh-TW" sz="1400" dirty="0">

--- a/doc/mtp_with_consistency_method_v2.pptx
+++ b/doc/mtp_with_consistency_method_v2.pptx
@@ -1347,6 +1347,13 @@
           </p:nvPr>
         </p:nvSpPr>
         <p:spPr/>
+        <p:txBody>
+          <a:bodyPr/>
+          <a:lstStyle/>
+          <a:p>
+            <a:endParaRPr lang="zh-TW" altLang="en-US"/>
+          </a:p>
+        </p:txBody>
       </p:sp>
       <p:sp>
         <p:nvSpPr>
@@ -5191,15 +5198,60 @@
               <a:buNone/>
             </a:pPr>
             <a:r>
-              <a:rPr lang="en-US" sz="1400" b="1" dirty="0">
-                <a:solidFill>
-                  <a:srgbClr val="27323A"/>
-                </a:solidFill>
-                <a:latin typeface="微軟正黑體" panose="020B0604030504040204" pitchFamily="34" charset="-120"/>
-                <a:ea typeface="微軟正黑體" panose="020B0604030504040204" pitchFamily="34" charset="-120"/>
-                <a:cs typeface="Noto Sans CJK TC" pitchFamily="34" charset="-120"/>
-              </a:rPr>
-              <a:t>未加入 consistency 時，每個 head 只根據自己的 target offset 計算 CE loss。</a:t>
+              <a:rPr lang="zh-TW" altLang="en-US" sz="1400" b="1">
+                <a:latin typeface="微軟正黑體" panose="020B0604030504040204" pitchFamily="34" charset="-120"/>
+                <a:ea typeface="微軟正黑體" panose="020B0604030504040204" pitchFamily="34" charset="-120"/>
+              </a:rPr>
+              <a:t>未加入 </a:t>
+            </a:r>
+            <a:r>
+              <a:rPr lang="en-US" sz="1400" b="1">
+                <a:latin typeface="微軟正黑體" panose="020B0604030504040204" pitchFamily="34" charset="-120"/>
+                <a:ea typeface="微軟正黑體" panose="020B0604030504040204" pitchFamily="34" charset="-120"/>
+              </a:rPr>
+              <a:t>consistency </a:t>
+            </a:r>
+            <a:r>
+              <a:rPr lang="zh-TW" altLang="en-US" sz="1400" b="1">
+                <a:latin typeface="微軟正黑體" panose="020B0604030504040204" pitchFamily="34" charset="-120"/>
+                <a:ea typeface="微軟正黑體" panose="020B0604030504040204" pitchFamily="34" charset="-120"/>
+              </a:rPr>
+              <a:t>時，各 </a:t>
+            </a:r>
+            <a:r>
+              <a:rPr lang="en-US" sz="1400" b="1">
+                <a:latin typeface="微軟正黑體" panose="020B0604030504040204" pitchFamily="34" charset="-120"/>
+                <a:ea typeface="微軟正黑體" panose="020B0604030504040204" pitchFamily="34" charset="-120"/>
+              </a:rPr>
+              <a:t>head </a:t>
+            </a:r>
+            <a:r>
+              <a:rPr lang="zh-TW" altLang="en-US" sz="1400" b="1">
+                <a:latin typeface="微軟正黑體" panose="020B0604030504040204" pitchFamily="34" charset="-120"/>
+                <a:ea typeface="微軟正黑體" panose="020B0604030504040204" pitchFamily="34" charset="-120"/>
+              </a:rPr>
+              <a:t>僅針對對應的 </a:t>
+            </a:r>
+            <a:r>
+              <a:rPr lang="en-US" sz="1400" b="1">
+                <a:latin typeface="微軟正黑體" panose="020B0604030504040204" pitchFamily="34" charset="-120"/>
+                <a:ea typeface="微軟正黑體" panose="020B0604030504040204" pitchFamily="34" charset="-120"/>
+              </a:rPr>
+              <a:t>ground-truth token </a:t>
+            </a:r>
+            <a:r>
+              <a:rPr lang="zh-TW" altLang="en-US" sz="1400" b="1">
+                <a:latin typeface="微軟正黑體" panose="020B0604030504040204" pitchFamily="34" charset="-120"/>
+                <a:ea typeface="微軟正黑體" panose="020B0604030504040204" pitchFamily="34" charset="-120"/>
+              </a:rPr>
+              <a:t>獨立計算 </a:t>
+            </a:r>
+            <a:r>
+              <a:rPr lang="en-US" sz="1400" b="1">
+                <a:latin typeface="微軟正黑體" panose="020B0604030504040204" pitchFamily="34" charset="-120"/>
+                <a:ea typeface="微軟正黑體" panose="020B0604030504040204" pitchFamily="34" charset="-120"/>
+              </a:rPr>
+              <a:t>CE loss。</a:t>
             </a:r>
             <a:endParaRPr lang="en-US" sz="1400" b="1" dirty="0">
               <a:latin typeface="微軟正黑體" panose="020B0604030504040204" pitchFamily="34" charset="-120"/>
@@ -5311,7 +5363,7 @@
                 <a:latin typeface="微軟正黑體" panose="020B0604030504040204" pitchFamily="34" charset="-120"/>
                 <a:ea typeface="微軟正黑體" panose="020B0604030504040204" pitchFamily="34" charset="-120"/>
               </a:rPr>
-              <a:t>teacher / Head 1 </a:t>
+              <a:t>Head 1 </a:t>
             </a:r>
             <a:r>
               <a:rPr lang="zh-TW" altLang="en-US" sz="1400" dirty="0">
@@ -7398,6 +7450,13 @@
             <a:prstDash val="solid"/>
           </a:ln>
         </p:spPr>
+        <p:txBody>
+          <a:bodyPr/>
+          <a:lstStyle/>
+          <a:p>
+            <a:endParaRPr lang="zh-TW" altLang="en-US"/>
+          </a:p>
+        </p:txBody>
       </p:sp>
       <p:sp>
         <p:nvSpPr>
@@ -7523,6 +7582,13 @@
             <a:prstDash val="solid"/>
           </a:ln>
         </p:spPr>
+        <p:txBody>
+          <a:bodyPr/>
+          <a:lstStyle/>
+          <a:p>
+            <a:endParaRPr lang="zh-TW" altLang="en-US"/>
+          </a:p>
+        </p:txBody>
       </p:sp>
       <p:sp>
         <p:nvSpPr>
@@ -7575,7 +7641,7 @@
                 <a:latin typeface="微軟正黑體" panose="020B0604030504040204" pitchFamily="34" charset="-120"/>
                 <a:ea typeface="微軟正黑體" panose="020B0604030504040204" pitchFamily="34" charset="-120"/>
               </a:rPr>
-              <a:t>控制噪聲遮罩。</a:t>
+              <a:t>控制噪聲遮罩閾值。</a:t>
             </a:r>
           </a:p>
           <a:p>
@@ -10719,6 +10785,13 @@
             <a:prstDash val="solid"/>
           </a:ln>
         </p:spPr>
+        <p:txBody>
+          <a:bodyPr/>
+          <a:lstStyle/>
+          <a:p>
+            <a:endParaRPr lang="zh-TW" altLang="en-US"/>
+          </a:p>
+        </p:txBody>
       </p:sp>
       <p:sp>
         <p:nvSpPr>
@@ -10844,6 +10917,13 @@
             <a:prstDash val="solid"/>
           </a:ln>
         </p:spPr>
+        <p:txBody>
+          <a:bodyPr/>
+          <a:lstStyle/>
+          <a:p>
+            <a:endParaRPr lang="zh-TW" altLang="en-US"/>
+          </a:p>
+        </p:txBody>
       </p:sp>
       <p:sp>
         <p:nvSpPr>
@@ -10904,17 +10984,6 @@
               <a:t>不直接對齊 </a:t>
             </a:r>
             <a:r>
-              <a:rPr lang="en-US" sz="1400" b="1" dirty="0" err="1">
-                <a:solidFill>
-                  <a:srgbClr val="27323A"/>
-                </a:solidFill>
-                <a:latin typeface="微軟正黑體" panose="020B0604030504040204" pitchFamily="34" charset="-120"/>
-                <a:ea typeface="微軟正黑體" panose="020B0604030504040204" pitchFamily="34" charset="-120"/>
-                <a:cs typeface="Noto Sans CJK TC" pitchFamily="34" charset="-120"/>
-              </a:rPr>
-              <a:t>softmax</a:t>
-            </a:r>
-            <a:r>
               <a:rPr lang="en-US" sz="1400" b="1" dirty="0">
                 <a:solidFill>
                   <a:srgbClr val="27323A"/>
@@ -10923,7 +10992,7 @@
                 <a:ea typeface="微軟正黑體" panose="020B0604030504040204" pitchFamily="34" charset="-120"/>
                 <a:cs typeface="Noto Sans CJK TC" pitchFamily="34" charset="-120"/>
               </a:rPr>
-              <a:t> probability distribution，</a:t>
+              <a:t>probability distribution，</a:t>
             </a:r>
             <a:r>
               <a:rPr lang="zh-TW" altLang="en-US" sz="1400" b="1" dirty="0">
@@ -13269,7 +13338,7 @@
                 <a:ea typeface="微軟正黑體" panose="020B0604030504040204" pitchFamily="34" charset="-120"/>
                 <a:cs typeface="Noto Sans CJK TC" pitchFamily="34" charset="-120"/>
               </a:rPr>
-              <a:t>teacher</a:t>
+              <a:t>teacher </a:t>
             </a:r>
             <a:r>
               <a:rPr lang="zh-TW" altLang="en-US" sz="1400" b="1" dirty="0">
@@ -13280,7 +13349,7 @@
                 <a:ea typeface="微軟正黑體" panose="020B0604030504040204" pitchFamily="34" charset="-120"/>
                 <a:cs typeface="Noto Sans CJK TC" pitchFamily="34" charset="-120"/>
               </a:rPr>
-              <a:t>和</a:t>
+              <a:t>和 </a:t>
             </a:r>
             <a:r>
               <a:rPr lang="en-US" altLang="zh-TW" sz="1400" b="1" dirty="0">
@@ -13302,7 +13371,7 @@
                 <a:ea typeface="微軟正黑體" panose="020B0604030504040204" pitchFamily="34" charset="-120"/>
                 <a:cs typeface="Noto Sans CJK TC" pitchFamily="34" charset="-120"/>
               </a:rPr>
-              <a:t>在</a:t>
+              <a:t>在 </a:t>
             </a:r>
             <a:r>
               <a:rPr lang="en-US" altLang="zh-TW" sz="1400" b="1" dirty="0">
@@ -13313,7 +13382,7 @@
                 <a:ea typeface="微軟正黑體" panose="020B0604030504040204" pitchFamily="34" charset="-120"/>
                 <a:cs typeface="Noto Sans CJK TC" pitchFamily="34" charset="-120"/>
               </a:rPr>
-              <a:t>probability</a:t>
+              <a:t>probability </a:t>
             </a:r>
             <a:r>
               <a:rPr lang="zh-TW" altLang="en-US" sz="1400" b="1" dirty="0">
@@ -13324,7 +13393,7 @@
                 <a:ea typeface="微軟正黑體" panose="020B0604030504040204" pitchFamily="34" charset="-120"/>
                 <a:cs typeface="Noto Sans CJK TC" pitchFamily="34" charset="-120"/>
               </a:rPr>
-              <a:t>與</a:t>
+              <a:t>與 </a:t>
             </a:r>
             <a:r>
               <a:rPr lang="en-US" altLang="zh-TW" sz="1400" b="1" dirty="0">
@@ -13335,7 +13404,7 @@
                 <a:ea typeface="微軟正黑體" panose="020B0604030504040204" pitchFamily="34" charset="-120"/>
                 <a:cs typeface="Noto Sans CJK TC" pitchFamily="34" charset="-120"/>
               </a:rPr>
-              <a:t>latent</a:t>
+              <a:t>latent </a:t>
             </a:r>
             <a:r>
               <a:rPr lang="zh-TW" altLang="en-US" sz="1400" b="1" dirty="0">
@@ -17345,6 +17414,13 @@
             <a:prstDash val="solid"/>
           </a:ln>
         </p:spPr>
+        <p:txBody>
+          <a:bodyPr/>
+          <a:lstStyle/>
+          <a:p>
+            <a:endParaRPr lang="zh-TW" altLang="en-US"/>
+          </a:p>
+        </p:txBody>
       </p:sp>
       <p:sp>
         <p:nvSpPr>
@@ -19173,6 +19249,13 @@
             <a:prstDash val="solid"/>
           </a:ln>
         </p:spPr>
+        <p:txBody>
+          <a:bodyPr/>
+          <a:lstStyle/>
+          <a:p>
+            <a:endParaRPr lang="zh-TW" altLang="en-US"/>
+          </a:p>
+        </p:txBody>
       </p:sp>
       <p:sp>
         <p:nvSpPr>
@@ -19298,6 +19381,13 @@
             <a:prstDash val="solid"/>
           </a:ln>
         </p:spPr>
+        <p:txBody>
+          <a:bodyPr/>
+          <a:lstStyle/>
+          <a:p>
+            <a:endParaRPr lang="zh-TW" altLang="en-US"/>
+          </a:p>
+        </p:txBody>
       </p:sp>
       <p:graphicFrame>
         <p:nvGraphicFramePr>
@@ -19984,6 +20074,13 @@
             <a:prstDash val="solid"/>
           </a:ln>
         </p:spPr>
+        <p:txBody>
+          <a:bodyPr/>
+          <a:lstStyle/>
+          <a:p>
+            <a:endParaRPr lang="zh-TW" altLang="en-US"/>
+          </a:p>
+        </p:txBody>
       </p:sp>
       <p:sp>
         <p:nvSpPr>
@@ -20109,6 +20206,13 @@
             <a:prstDash val="solid"/>
           </a:ln>
         </p:spPr>
+        <p:txBody>
+          <a:bodyPr/>
+          <a:lstStyle/>
+          <a:p>
+            <a:endParaRPr lang="zh-TW" altLang="en-US"/>
+          </a:p>
+        </p:txBody>
       </p:sp>
       <p:graphicFrame>
         <p:nvGraphicFramePr>
@@ -20929,6 +21033,13 @@
             <a:prstDash val="solid"/>
           </a:ln>
         </p:spPr>
+        <p:txBody>
+          <a:bodyPr/>
+          <a:lstStyle/>
+          <a:p>
+            <a:endParaRPr lang="zh-TW" altLang="en-US"/>
+          </a:p>
+        </p:txBody>
       </p:sp>
       <p:sp>
         <p:nvSpPr>
@@ -21050,6 +21161,13 @@
             <a:prstDash val="solid"/>
           </a:ln>
         </p:spPr>
+        <p:txBody>
+          <a:bodyPr/>
+          <a:lstStyle/>
+          <a:p>
+            <a:endParaRPr lang="zh-TW" altLang="en-US"/>
+          </a:p>
+        </p:txBody>
       </p:sp>
       <p:graphicFrame>
         <p:nvGraphicFramePr>
@@ -23081,6 +23199,13 @@
             <a:prstDash val="solid"/>
           </a:ln>
         </p:spPr>
+        <p:txBody>
+          <a:bodyPr/>
+          <a:lstStyle/>
+          <a:p>
+            <a:endParaRPr lang="zh-TW" altLang="en-US"/>
+          </a:p>
+        </p:txBody>
       </p:sp>
       <p:sp>
         <p:nvSpPr>
@@ -23260,6 +23385,13 @@
             <a:prstDash val="solid"/>
           </a:ln>
         </p:spPr>
+        <p:txBody>
+          <a:bodyPr/>
+          <a:lstStyle/>
+          <a:p>
+            <a:endParaRPr lang="zh-TW" altLang="en-US"/>
+          </a:p>
+        </p:txBody>
       </p:sp>
       <p:graphicFrame>
         <p:nvGraphicFramePr>
@@ -24476,6 +24608,13 @@
             <a:prstDash val="solid"/>
           </a:ln>
         </p:spPr>
+        <p:txBody>
+          <a:bodyPr/>
+          <a:lstStyle/>
+          <a:p>
+            <a:endParaRPr lang="zh-TW" altLang="en-US"/>
+          </a:p>
+        </p:txBody>
       </p:sp>
       <p:sp>
         <p:nvSpPr>
@@ -24721,6 +24860,13 @@
             <a:prstDash val="solid"/>
           </a:ln>
         </p:spPr>
+        <p:txBody>
+          <a:bodyPr/>
+          <a:lstStyle/>
+          <a:p>
+            <a:endParaRPr lang="zh-TW" altLang="en-US"/>
+          </a:p>
+        </p:txBody>
       </p:sp>
       <p:graphicFrame>
         <p:nvGraphicFramePr>
@@ -27135,6 +27281,13 @@
             <a:prstDash val="solid"/>
           </a:ln>
         </p:spPr>
+        <p:txBody>
+          <a:bodyPr/>
+          <a:lstStyle/>
+          <a:p>
+            <a:endParaRPr lang="zh-TW" altLang="en-US"/>
+          </a:p>
+        </p:txBody>
       </p:sp>
       <p:sp>
         <p:nvSpPr>
@@ -27254,6 +27407,13 @@
             <a:prstDash val="solid"/>
           </a:ln>
         </p:spPr>
+        <p:txBody>
+          <a:bodyPr/>
+          <a:lstStyle/>
+          <a:p>
+            <a:endParaRPr lang="zh-TW" altLang="en-US"/>
+          </a:p>
+        </p:txBody>
       </p:sp>
       <p:graphicFrame>
         <p:nvGraphicFramePr>
@@ -29659,6 +29819,13 @@
             <a:prstDash val="solid"/>
           </a:ln>
         </p:spPr>
+        <p:txBody>
+          <a:bodyPr/>
+          <a:lstStyle/>
+          <a:p>
+            <a:endParaRPr lang="zh-TW" altLang="en-US"/>
+          </a:p>
+        </p:txBody>
       </p:sp>
       <p:sp>
         <p:nvSpPr>
@@ -29824,6 +29991,13 @@
             <a:prstDash val="solid"/>
           </a:ln>
         </p:spPr>
+        <p:txBody>
+          <a:bodyPr/>
+          <a:lstStyle/>
+          <a:p>
+            <a:endParaRPr lang="zh-TW" altLang="en-US"/>
+          </a:p>
+        </p:txBody>
       </p:sp>
       <p:graphicFrame>
         <p:nvGraphicFramePr>
@@ -31730,6 +31904,13 @@
             <a:prstDash val="solid"/>
           </a:ln>
         </p:spPr>
+        <p:txBody>
+          <a:bodyPr/>
+          <a:lstStyle/>
+          <a:p>
+            <a:endParaRPr lang="zh-TW" altLang="en-US"/>
+          </a:p>
+        </p:txBody>
       </p:sp>
       <p:sp>
         <p:nvSpPr>
@@ -31761,6 +31942,13 @@
             <a:prstDash val="solid"/>
           </a:ln>
         </p:spPr>
+        <p:txBody>
+          <a:bodyPr/>
+          <a:lstStyle/>
+          <a:p>
+            <a:endParaRPr lang="zh-TW" altLang="en-US"/>
+          </a:p>
+        </p:txBody>
       </p:sp>
       <p:sp>
         <p:nvSpPr>
@@ -32044,6 +32232,13 @@
             <a:prstDash val="solid"/>
           </a:ln>
         </p:spPr>
+        <p:txBody>
+          <a:bodyPr/>
+          <a:lstStyle/>
+          <a:p>
+            <a:endParaRPr lang="zh-TW" altLang="en-US"/>
+          </a:p>
+        </p:txBody>
       </p:sp>
       <p:sp>
         <p:nvSpPr>
@@ -32767,6 +32962,13 @@
             <a:prstDash val="solid"/>
           </a:ln>
         </p:spPr>
+        <p:txBody>
+          <a:bodyPr/>
+          <a:lstStyle/>
+          <a:p>
+            <a:endParaRPr lang="zh-TW" altLang="en-US"/>
+          </a:p>
+        </p:txBody>
       </p:sp>
       <p:sp>
         <p:nvSpPr>
@@ -33436,87 +33638,19 @@
                 <a:ea typeface="微軟正黑體" panose="020B0604030504040204" pitchFamily="34" charset="-120"/>
                 <a:cs typeface="Noto Sans CJK TC" pitchFamily="34" charset="-120"/>
               </a:rPr>
-              <a:t> forward 不只預測下一個 token，也讓多個 draft models 預測更遠的 future tokens。</a:t>
-            </a:r>
-            <a:endParaRPr lang="en-US" sz="1600" dirty="0">
-              <a:latin typeface="微軟正黑體" panose="020B0604030504040204" pitchFamily="34" charset="-120"/>
-              <a:ea typeface="微軟正黑體" panose="020B0604030504040204" pitchFamily="34" charset="-120"/>
-            </a:endParaRPr>
-          </a:p>
-        </p:txBody>
-      </p:sp>
-      <p:sp>
-        <p:nvSpPr>
-          <p:cNvPr id="11" name="Shape 8">
-            <a:extLst>
-              <a:ext uri="{FF2B5EF4-FFF2-40B4-BE49-F238E27FC236}">
-                <a16:creationId xmlns:a16="http://schemas.microsoft.com/office/drawing/2014/main" id="{BE2123A7-5657-506C-0440-C41A37A7C777}"/>
-              </a:ext>
-            </a:extLst>
-          </p:cNvPr>
-          <p:cNvSpPr/>
-          <p:nvPr/>
-        </p:nvSpPr>
-        <p:spPr>
-          <a:xfrm flipV="1">
-            <a:off x="2297883" y="2752364"/>
-            <a:ext cx="1080000" cy="5504"/>
-          </a:xfrm>
-          <a:prstGeom prst="line">
-            <a:avLst/>
-          </a:prstGeom>
-          <a:noFill/>
-          <a:ln w="12700">
-            <a:solidFill>
-              <a:srgbClr val="5B839B"/>
-            </a:solidFill>
-            <a:prstDash val="solid"/>
-            <a:headEnd type="none"/>
-            <a:tailEnd type="triangle"/>
-          </a:ln>
-        </p:spPr>
-        <p:txBody>
-          <a:bodyPr/>
-          <a:lstStyle/>
-          <a:p>
-            <a:endParaRPr lang="zh-TW" altLang="en-US"/>
-          </a:p>
-        </p:txBody>
-      </p:sp>
-      <p:sp>
-        <p:nvSpPr>
-          <p:cNvPr id="12" name="Text 11">
-            <a:extLst>
-              <a:ext uri="{FF2B5EF4-FFF2-40B4-BE49-F238E27FC236}">
-                <a16:creationId xmlns:a16="http://schemas.microsoft.com/office/drawing/2014/main" id="{610B4AEF-9601-8981-AF8D-0A367E00D703}"/>
-              </a:ext>
-            </a:extLst>
-          </p:cNvPr>
-          <p:cNvSpPr/>
-          <p:nvPr/>
-        </p:nvSpPr>
-        <p:spPr>
-          <a:xfrm>
-            <a:off x="1008585" y="2277973"/>
-            <a:ext cx="1285240" cy="900000"/>
-          </a:xfrm>
-          <a:prstGeom prst="rect">
-            <a:avLst/>
-          </a:prstGeom>
-          <a:noFill/>
-          <a:ln>
-            <a:noFill/>
-          </a:ln>
-        </p:spPr>
-        <p:txBody>
-          <a:bodyPr wrap="square" lIns="635" tIns="635" rIns="635" bIns="635" rtlCol="0" anchor="ctr">
-            <a:normAutofit/>
-          </a:bodyPr>
-          <a:lstStyle/>
-          <a:p>
-            <a:pPr marL="0" indent="0" algn="ctr">
-              <a:buNone/>
-            </a:pPr>
+              <a:t> forward 不只預測下一個 </a:t>
+            </a:r>
+            <a:r>
+              <a:rPr lang="en-US" sz="1600" b="1" dirty="0" err="1">
+                <a:solidFill>
+                  <a:srgbClr val="27323A"/>
+                </a:solidFill>
+                <a:latin typeface="微軟正黑體" panose="020B0604030504040204" pitchFamily="34" charset="-120"/>
+                <a:ea typeface="微軟正黑體" panose="020B0604030504040204" pitchFamily="34" charset="-120"/>
+                <a:cs typeface="Noto Sans CJK TC" pitchFamily="34" charset="-120"/>
+              </a:rPr>
+              <a:t>token，也讓多個</a:t>
+            </a:r>
             <a:r>
               <a:rPr lang="en-US" sz="1600" b="1" dirty="0">
                 <a:solidFill>
@@ -33526,203 +33660,9 @@
                 <a:ea typeface="微軟正黑體" panose="020B0604030504040204" pitchFamily="34" charset="-120"/>
                 <a:cs typeface="Noto Sans CJK TC" pitchFamily="34" charset="-120"/>
               </a:rPr>
-              <a:t>Input</a:t>
-            </a:r>
-            <a:r>
-              <a:rPr lang="en-US" sz="1600" dirty="0">
-                <a:latin typeface="微軟正黑體" panose="020B0604030504040204" pitchFamily="34" charset="-120"/>
-                <a:ea typeface="微軟正黑體" panose="020B0604030504040204" pitchFamily="34" charset="-120"/>
-              </a:rPr>
-              <a:t>: </a:t>
-            </a:r>
-            <a:r>
-              <a:rPr lang="en-US" sz="1600" b="1" dirty="0">
-                <a:solidFill>
-                  <a:srgbClr val="27323A"/>
-                </a:solidFill>
-                <a:latin typeface="微軟正黑體" panose="020B0604030504040204" pitchFamily="34" charset="-120"/>
-                <a:ea typeface="微軟正黑體" panose="020B0604030504040204" pitchFamily="34" charset="-120"/>
-                <a:cs typeface="Noto Sans CJK TC" pitchFamily="34" charset="-120"/>
-              </a:rPr>
-              <a:t>t₀</a:t>
+              <a:t> prediction heads 預測更遠的 future tokens。</a:t>
             </a:r>
             <a:endParaRPr lang="en-US" sz="1600" dirty="0">
-              <a:latin typeface="微軟正黑體" panose="020B0604030504040204" pitchFamily="34" charset="-120"/>
-              <a:ea typeface="微軟正黑體" panose="020B0604030504040204" pitchFamily="34" charset="-120"/>
-            </a:endParaRPr>
-          </a:p>
-        </p:txBody>
-      </p:sp>
-      <p:sp>
-        <p:nvSpPr>
-          <p:cNvPr id="13" name="Text 13">
-            <a:extLst>
-              <a:ext uri="{FF2B5EF4-FFF2-40B4-BE49-F238E27FC236}">
-                <a16:creationId xmlns:a16="http://schemas.microsoft.com/office/drawing/2014/main" id="{78320403-216C-E725-4CC6-A86BC60C4514}"/>
-              </a:ext>
-            </a:extLst>
-          </p:cNvPr>
-          <p:cNvSpPr/>
-          <p:nvPr/>
-        </p:nvSpPr>
-        <p:spPr>
-          <a:xfrm>
-            <a:off x="3377879" y="2322525"/>
-            <a:ext cx="1800000" cy="900000"/>
-          </a:xfrm>
-          <a:prstGeom prst="rect">
-            <a:avLst/>
-          </a:prstGeom>
-          <a:solidFill>
-            <a:srgbClr val="FFF3C8"/>
-          </a:solidFill>
-          <a:ln>
-            <a:solidFill>
-              <a:srgbClr val="C8D6DE"/>
-            </a:solidFill>
-          </a:ln>
-        </p:spPr>
-        <p:txBody>
-          <a:bodyPr wrap="square" lIns="635" tIns="635" rIns="635" bIns="635" rtlCol="0" anchor="ctr">
-            <a:normAutofit/>
-          </a:bodyPr>
-          <a:lstStyle/>
-          <a:p>
-            <a:pPr marL="0" indent="0" algn="ctr">
-              <a:buNone/>
-            </a:pPr>
-            <a:r>
-              <a:rPr lang="en-US" sz="1600" dirty="0">
-                <a:solidFill>
-                  <a:srgbClr val="27323A"/>
-                </a:solidFill>
-                <a:latin typeface="微軟正黑體" panose="020B0604030504040204" pitchFamily="34" charset="-120"/>
-                <a:ea typeface="微軟正黑體" panose="020B0604030504040204" pitchFamily="34" charset="-120"/>
-                <a:cs typeface="Noto Sans CJK TC" pitchFamily="34" charset="-120"/>
-              </a:rPr>
-              <a:t>Model</a:t>
-            </a:r>
-          </a:p>
-          <a:p>
-            <a:pPr marL="0" indent="0" algn="ctr">
-              <a:buNone/>
-            </a:pPr>
-            <a:r>
-              <a:rPr lang="en-US" altLang="zh-TW" sz="1600" dirty="0">
-                <a:solidFill>
-                  <a:srgbClr val="27323A"/>
-                </a:solidFill>
-                <a:latin typeface="微軟正黑體" panose="020B0604030504040204" pitchFamily="34" charset="-120"/>
-                <a:ea typeface="微軟正黑體" panose="020B0604030504040204" pitchFamily="34" charset="-120"/>
-              </a:rPr>
-              <a:t>(target + draft)</a:t>
-            </a:r>
-            <a:endParaRPr lang="en-US" sz="1600" dirty="0">
-              <a:latin typeface="微軟正黑體" panose="020B0604030504040204" pitchFamily="34" charset="-120"/>
-              <a:ea typeface="微軟正黑體" panose="020B0604030504040204" pitchFamily="34" charset="-120"/>
-            </a:endParaRPr>
-          </a:p>
-        </p:txBody>
-      </p:sp>
-      <p:sp>
-        <p:nvSpPr>
-          <p:cNvPr id="14" name="Text 15">
-            <a:extLst>
-              <a:ext uri="{FF2B5EF4-FFF2-40B4-BE49-F238E27FC236}">
-                <a16:creationId xmlns:a16="http://schemas.microsoft.com/office/drawing/2014/main" id="{655F93E8-79DA-8CA5-012E-0FEA8456961F}"/>
-              </a:ext>
-            </a:extLst>
-          </p:cNvPr>
-          <p:cNvSpPr/>
-          <p:nvPr/>
-        </p:nvSpPr>
-        <p:spPr>
-          <a:xfrm>
-            <a:off x="9020095" y="2315909"/>
-            <a:ext cx="1800000" cy="900000"/>
-          </a:xfrm>
-          <a:prstGeom prst="rect">
-            <a:avLst/>
-          </a:prstGeom>
-          <a:noFill/>
-          <a:ln>
-            <a:noFill/>
-          </a:ln>
-        </p:spPr>
-        <p:txBody>
-          <a:bodyPr wrap="square" lIns="635" tIns="635" rIns="635" bIns="635" rtlCol="0" anchor="ctr">
-            <a:normAutofit/>
-          </a:bodyPr>
-          <a:lstStyle/>
-          <a:p>
-            <a:pPr algn="ctr"/>
-            <a:r>
-              <a:rPr lang="en-US" sz="1600" b="1" dirty="0">
-                <a:solidFill>
-                  <a:srgbClr val="27323A"/>
-                </a:solidFill>
-                <a:latin typeface="微軟正黑體" panose="020B0604030504040204" pitchFamily="34" charset="-120"/>
-                <a:ea typeface="微軟正黑體" panose="020B0604030504040204" pitchFamily="34" charset="-120"/>
-                <a:cs typeface="Noto Sans CJK TC" pitchFamily="34" charset="-120"/>
-              </a:rPr>
-              <a:t>Output: </a:t>
-            </a:r>
-            <a:r>
-              <a:rPr lang="en-US" altLang="zh-TW" sz="1600" b="1" dirty="0">
-                <a:solidFill>
-                  <a:srgbClr val="27323A"/>
-                </a:solidFill>
-                <a:latin typeface="微軟正黑體" panose="020B0604030504040204" pitchFamily="34" charset="-120"/>
-                <a:ea typeface="微軟正黑體" panose="020B0604030504040204" pitchFamily="34" charset="-120"/>
-                <a:cs typeface="Noto Sans CJK TC" pitchFamily="34" charset="-120"/>
-              </a:rPr>
-              <a:t>t</a:t>
-            </a:r>
-            <a:r>
-              <a:rPr lang="en-US" altLang="zh-TW" sz="1600" b="1" baseline="-25000" dirty="0">
-                <a:solidFill>
-                  <a:srgbClr val="27323A"/>
-                </a:solidFill>
-                <a:latin typeface="微軟正黑體" panose="020B0604030504040204" pitchFamily="34" charset="-120"/>
-                <a:ea typeface="微軟正黑體" panose="020B0604030504040204" pitchFamily="34" charset="-120"/>
-                <a:cs typeface="Noto Sans CJK TC" pitchFamily="34" charset="-120"/>
-              </a:rPr>
-              <a:t>1</a:t>
-            </a:r>
-            <a:r>
-              <a:rPr lang="en-US" altLang="zh-TW" sz="1600" b="1" dirty="0">
-                <a:solidFill>
-                  <a:srgbClr val="27323A"/>
-                </a:solidFill>
-                <a:latin typeface="微軟正黑體" panose="020B0604030504040204" pitchFamily="34" charset="-120"/>
-                <a:ea typeface="微軟正黑體" panose="020B0604030504040204" pitchFamily="34" charset="-120"/>
-                <a:cs typeface="Noto Sans CJK TC" pitchFamily="34" charset="-120"/>
-              </a:rPr>
-              <a:t>… </a:t>
-            </a:r>
-            <a:r>
-              <a:rPr lang="en-US" altLang="zh-TW" sz="1600" b="1" dirty="0" err="1">
-                <a:solidFill>
-                  <a:srgbClr val="27323A"/>
-                </a:solidFill>
-                <a:latin typeface="微軟正黑體" panose="020B0604030504040204" pitchFamily="34" charset="-120"/>
-                <a:ea typeface="微軟正黑體" panose="020B0604030504040204" pitchFamily="34" charset="-120"/>
-                <a:cs typeface="Noto Sans CJK TC" pitchFamily="34" charset="-120"/>
-              </a:rPr>
-              <a:t>t</a:t>
-            </a:r>
-            <a:r>
-              <a:rPr lang="en-US" altLang="zh-TW" sz="1600" b="1" baseline="-25000" dirty="0" err="1">
-                <a:solidFill>
-                  <a:srgbClr val="27323A"/>
-                </a:solidFill>
-                <a:latin typeface="微軟正黑體" panose="020B0604030504040204" pitchFamily="34" charset="-120"/>
-                <a:ea typeface="微軟正黑體" panose="020B0604030504040204" pitchFamily="34" charset="-120"/>
-                <a:cs typeface="Noto Sans CJK TC" pitchFamily="34" charset="-120"/>
-              </a:rPr>
-              <a:t>k</a:t>
-            </a:r>
-            <a:endParaRPr lang="en-US" sz="1600" baseline="-25000" dirty="0">
               <a:latin typeface="微軟正黑體" panose="020B0604030504040204" pitchFamily="34" charset="-120"/>
               <a:ea typeface="微軟正黑體" panose="020B0604030504040204" pitchFamily="34" charset="-120"/>
             </a:endParaRPr>
@@ -33743,8 +33683,8 @@
         </p:nvSpPr>
         <p:spPr>
           <a:xfrm>
-            <a:off x="502920" y="4692814"/>
-            <a:ext cx="10713720" cy="502920"/>
+            <a:off x="502921" y="4692814"/>
+            <a:ext cx="11402034" cy="502920"/>
           </a:xfrm>
           <a:prstGeom prst="rect">
             <a:avLst/>
@@ -33760,9 +33700,6 @@
           </a:bodyPr>
           <a:lstStyle/>
           <a:p>
-            <a:pPr marL="0" indent="0">
-              <a:buNone/>
-            </a:pPr>
             <a:r>
               <a:rPr lang="en-US" sz="1600" b="1" dirty="0">
                 <a:solidFill>
@@ -33772,7 +33709,7 @@
                 <a:ea typeface="微軟正黑體" panose="020B0604030504040204" pitchFamily="34" charset="-120"/>
                 <a:cs typeface="Noto Sans CJK TC" pitchFamily="34" charset="-120"/>
               </a:rPr>
-              <a:t>若 draft</a:t>
+              <a:t>若</a:t>
             </a:r>
             <a:r>
               <a:rPr lang="zh-TW" altLang="en-US" sz="1600" b="1" dirty="0">
@@ -33783,6 +33720,28 @@
                 <a:ea typeface="微軟正黑體" panose="020B0604030504040204" pitchFamily="34" charset="-120"/>
                 <a:cs typeface="Noto Sans CJK TC" pitchFamily="34" charset="-120"/>
               </a:rPr>
+              <a:t>其他 </a:t>
+            </a:r>
+            <a:r>
+              <a:rPr lang="en-US" altLang="zh-TW" sz="1600" b="1" dirty="0">
+                <a:solidFill>
+                  <a:srgbClr val="27323A"/>
+                </a:solidFill>
+                <a:latin typeface="微軟正黑體" panose="020B0604030504040204" pitchFamily="34" charset="-120"/>
+                <a:ea typeface="微軟正黑體" panose="020B0604030504040204" pitchFamily="34" charset="-120"/>
+                <a:cs typeface="Noto Sans CJK TC" pitchFamily="34" charset="-120"/>
+              </a:rPr>
+              <a:t>prediction heads</a:t>
+            </a:r>
+            <a:r>
+              <a:rPr lang="zh-TW" altLang="en-US" sz="1600" b="1" dirty="0">
+                <a:solidFill>
+                  <a:srgbClr val="27323A"/>
+                </a:solidFill>
+                <a:latin typeface="微軟正黑體" panose="020B0604030504040204" pitchFamily="34" charset="-120"/>
+                <a:ea typeface="微軟正黑體" panose="020B0604030504040204" pitchFamily="34" charset="-120"/>
+                <a:cs typeface="Noto Sans CJK TC" pitchFamily="34" charset="-120"/>
+              </a:rPr>
               <a:t> </a:t>
             </a:r>
             <a:r>
@@ -33794,7 +33753,18 @@
                 <a:ea typeface="微軟正黑體" panose="020B0604030504040204" pitchFamily="34" charset="-120"/>
                 <a:cs typeface="Noto Sans CJK TC" pitchFamily="34" charset="-120"/>
               </a:rPr>
-              <a:t>的預測與主模型一致，self-speculative</a:t>
+              <a:t>的預測與</a:t>
+            </a:r>
+            <a:r>
+              <a:rPr lang="zh-TW" altLang="en-US" sz="1600" b="1" dirty="0">
+                <a:solidFill>
+                  <a:srgbClr val="27323A"/>
+                </a:solidFill>
+                <a:latin typeface="微軟正黑體" panose="020B0604030504040204" pitchFamily="34" charset="-120"/>
+                <a:ea typeface="微軟正黑體" panose="020B0604030504040204" pitchFamily="34" charset="-120"/>
+                <a:cs typeface="Noto Sans CJK TC" pitchFamily="34" charset="-120"/>
+              </a:rPr>
+              <a:t> </a:t>
             </a:r>
             <a:r>
               <a:rPr lang="en-US" sz="1600" b="1" dirty="0">
@@ -33805,7 +33775,18 @@
                 <a:ea typeface="微軟正黑體" panose="020B0604030504040204" pitchFamily="34" charset="-120"/>
                 <a:cs typeface="Noto Sans CJK TC" pitchFamily="34" charset="-120"/>
               </a:rPr>
-              <a:t> decoding 就能一次接受多個 </a:t>
+              <a:t>next-token output head</a:t>
+            </a:r>
+            <a:r>
+              <a:rPr lang="zh-TW" altLang="en-US" sz="1600" b="1" dirty="0">
+                <a:solidFill>
+                  <a:srgbClr val="27323A"/>
+                </a:solidFill>
+                <a:latin typeface="微軟正黑體" panose="020B0604030504040204" pitchFamily="34" charset="-120"/>
+                <a:ea typeface="微軟正黑體" panose="020B0604030504040204" pitchFamily="34" charset="-120"/>
+                <a:cs typeface="Noto Sans CJK TC" pitchFamily="34" charset="-120"/>
+              </a:rPr>
+              <a:t> </a:t>
             </a:r>
             <a:r>
               <a:rPr lang="en-US" sz="1600" b="1" dirty="0" err="1">
@@ -33816,7 +33797,18 @@
                 <a:ea typeface="微軟正黑體" panose="020B0604030504040204" pitchFamily="34" charset="-120"/>
                 <a:cs typeface="Noto Sans CJK TC" pitchFamily="34" charset="-120"/>
               </a:rPr>
-              <a:t>token，降低實際</a:t>
+              <a:t>一致，就能一次接受多個</a:t>
+            </a:r>
+            <a:r>
+              <a:rPr lang="en-US" sz="1600" b="1" dirty="0">
+                <a:solidFill>
+                  <a:srgbClr val="27323A"/>
+                </a:solidFill>
+                <a:latin typeface="微軟正黑體" panose="020B0604030504040204" pitchFamily="34" charset="-120"/>
+                <a:ea typeface="微軟正黑體" panose="020B0604030504040204" pitchFamily="34" charset="-120"/>
+                <a:cs typeface="Noto Sans CJK TC" pitchFamily="34" charset="-120"/>
+              </a:rPr>
+              <a:t> token</a:t>
             </a:r>
             <a:r>
               <a:rPr lang="zh-TW" altLang="en-US" sz="1600" b="1" dirty="0">
@@ -33827,7 +33819,7 @@
                 <a:ea typeface="微軟正黑體" panose="020B0604030504040204" pitchFamily="34" charset="-120"/>
                 <a:cs typeface="Noto Sans CJK TC" pitchFamily="34" charset="-120"/>
               </a:rPr>
-              <a:t>推論</a:t>
+              <a:t> </a:t>
             </a:r>
             <a:r>
               <a:rPr lang="en-US" sz="1600" b="1" dirty="0" err="1">
@@ -33838,7 +33830,40 @@
                 <a:ea typeface="微軟正黑體" panose="020B0604030504040204" pitchFamily="34" charset="-120"/>
                 <a:cs typeface="Noto Sans CJK TC" pitchFamily="34" charset="-120"/>
               </a:rPr>
+              <a:t>降低實際</a:t>
+            </a:r>
+            <a:r>
+              <a:rPr lang="zh-TW" altLang="en-US" sz="1600" b="1" dirty="0">
+                <a:solidFill>
+                  <a:srgbClr val="27323A"/>
+                </a:solidFill>
+                <a:latin typeface="微軟正黑體" panose="020B0604030504040204" pitchFamily="34" charset="-120"/>
+                <a:ea typeface="微軟正黑體" panose="020B0604030504040204" pitchFamily="34" charset="-120"/>
+                <a:cs typeface="Noto Sans CJK TC" pitchFamily="34" charset="-120"/>
+              </a:rPr>
+              <a:t>推論</a:t>
+            </a:r>
+            <a:r>
+              <a:rPr lang="en-US" sz="1600" b="1" dirty="0" err="1">
+                <a:solidFill>
+                  <a:srgbClr val="27323A"/>
+                </a:solidFill>
+                <a:latin typeface="微軟正黑體" panose="020B0604030504040204" pitchFamily="34" charset="-120"/>
+                <a:ea typeface="微軟正黑體" panose="020B0604030504040204" pitchFamily="34" charset="-120"/>
+                <a:cs typeface="Noto Sans CJK TC" pitchFamily="34" charset="-120"/>
+              </a:rPr>
               <a:t>成本</a:t>
+            </a:r>
+            <a:r>
+              <a:rPr lang="zh-TW" altLang="en-US" sz="1600" b="1" dirty="0">
+                <a:solidFill>
+                  <a:srgbClr val="27323A"/>
+                </a:solidFill>
+                <a:latin typeface="微軟正黑體" panose="020B0604030504040204" pitchFamily="34" charset="-120"/>
+                <a:ea typeface="微軟正黑體" panose="020B0604030504040204" pitchFamily="34" charset="-120"/>
+                <a:cs typeface="Noto Sans CJK TC" pitchFamily="34" charset="-120"/>
+              </a:rPr>
+              <a:t>與加速推論</a:t>
             </a:r>
             <a:r>
               <a:rPr lang="en-US" sz="1600" b="1" dirty="0">
@@ -33858,139 +33883,349 @@
           </a:p>
         </p:txBody>
       </p:sp>
-      <p:sp>
-        <p:nvSpPr>
-          <p:cNvPr id="16" name="Shape 8">
+      <p:grpSp>
+        <p:nvGrpSpPr>
+          <p:cNvPr id="2" name="群組 1">
             <a:extLst>
               <a:ext uri="{FF2B5EF4-FFF2-40B4-BE49-F238E27FC236}">
-                <a16:creationId xmlns:a16="http://schemas.microsoft.com/office/drawing/2014/main" id="{D636A4ED-0CDB-5815-2A3F-D4D8056E766D}"/>
+                <a16:creationId xmlns:a16="http://schemas.microsoft.com/office/drawing/2014/main" id="{91F28A17-C89B-11A2-E672-6A81182DCB87}"/>
               </a:ext>
             </a:extLst>
           </p:cNvPr>
-          <p:cNvSpPr/>
+          <p:cNvGrpSpPr/>
           <p:nvPr/>
-        </p:nvSpPr>
-        <p:spPr>
-          <a:xfrm flipV="1">
-            <a:off x="5177871" y="2749612"/>
-            <a:ext cx="1080000" cy="5504"/>
+        </p:nvGrpSpPr>
+        <p:grpSpPr>
+          <a:xfrm>
+            <a:off x="2335135" y="2328810"/>
+            <a:ext cx="7049290" cy="957875"/>
+            <a:chOff x="1008585" y="2264650"/>
+            <a:chExt cx="7049290" cy="957875"/>
           </a:xfrm>
-          <a:prstGeom prst="line">
-            <a:avLst/>
-          </a:prstGeom>
-          <a:noFill/>
-          <a:ln w="12700">
+        </p:grpSpPr>
+        <p:sp>
+          <p:nvSpPr>
+            <p:cNvPr id="11" name="Shape 8">
+              <a:extLst>
+                <a:ext uri="{FF2B5EF4-FFF2-40B4-BE49-F238E27FC236}">
+                  <a16:creationId xmlns:a16="http://schemas.microsoft.com/office/drawing/2014/main" id="{BE2123A7-5657-506C-0440-C41A37A7C777}"/>
+                </a:ext>
+              </a:extLst>
+            </p:cNvPr>
+            <p:cNvSpPr/>
+            <p:nvPr/>
+          </p:nvSpPr>
+          <p:spPr>
+            <a:xfrm flipV="1">
+              <a:off x="2297883" y="2752364"/>
+              <a:ext cx="1080000" cy="5504"/>
+            </a:xfrm>
+            <a:prstGeom prst="line">
+              <a:avLst/>
+            </a:prstGeom>
+            <a:noFill/>
+            <a:ln w="12700">
+              <a:solidFill>
+                <a:srgbClr val="5B839B"/>
+              </a:solidFill>
+              <a:prstDash val="solid"/>
+              <a:headEnd type="none"/>
+              <a:tailEnd type="triangle"/>
+            </a:ln>
+          </p:spPr>
+          <p:txBody>
+            <a:bodyPr/>
+            <a:lstStyle/>
+            <a:p>
+              <a:endParaRPr lang="zh-TW" altLang="en-US"/>
+            </a:p>
+          </p:txBody>
+        </p:sp>
+        <p:sp>
+          <p:nvSpPr>
+            <p:cNvPr id="12" name="Text 11">
+              <a:extLst>
+                <a:ext uri="{FF2B5EF4-FFF2-40B4-BE49-F238E27FC236}">
+                  <a16:creationId xmlns:a16="http://schemas.microsoft.com/office/drawing/2014/main" id="{610B4AEF-9601-8981-AF8D-0A367E00D703}"/>
+                </a:ext>
+              </a:extLst>
+            </p:cNvPr>
+            <p:cNvSpPr/>
+            <p:nvPr/>
+          </p:nvSpPr>
+          <p:spPr>
+            <a:xfrm>
+              <a:off x="1008585" y="2277973"/>
+              <a:ext cx="1285240" cy="900000"/>
+            </a:xfrm>
+            <a:prstGeom prst="rect">
+              <a:avLst/>
+            </a:prstGeom>
+            <a:noFill/>
+            <a:ln>
+              <a:noFill/>
+            </a:ln>
+          </p:spPr>
+          <p:txBody>
+            <a:bodyPr wrap="square" lIns="635" tIns="635" rIns="635" bIns="635" rtlCol="0" anchor="ctr">
+              <a:normAutofit/>
+            </a:bodyPr>
+            <a:lstStyle/>
+            <a:p>
+              <a:pPr marL="0" indent="0" algn="ctr">
+                <a:buNone/>
+              </a:pPr>
+              <a:r>
+                <a:rPr lang="en-US" sz="1600" b="1" dirty="0">
+                  <a:solidFill>
+                    <a:srgbClr val="27323A"/>
+                  </a:solidFill>
+                  <a:latin typeface="微軟正黑體" panose="020B0604030504040204" pitchFamily="34" charset="-120"/>
+                  <a:ea typeface="微軟正黑體" panose="020B0604030504040204" pitchFamily="34" charset="-120"/>
+                  <a:cs typeface="Noto Sans CJK TC" pitchFamily="34" charset="-120"/>
+                </a:rPr>
+                <a:t>Input</a:t>
+              </a:r>
+              <a:r>
+                <a:rPr lang="en-US" sz="1600" dirty="0">
+                  <a:latin typeface="微軟正黑體" panose="020B0604030504040204" pitchFamily="34" charset="-120"/>
+                  <a:ea typeface="微軟正黑體" panose="020B0604030504040204" pitchFamily="34" charset="-120"/>
+                </a:rPr>
+                <a:t>: </a:t>
+              </a:r>
+              <a:r>
+                <a:rPr lang="en-US" sz="1600" b="1" dirty="0">
+                  <a:solidFill>
+                    <a:srgbClr val="27323A"/>
+                  </a:solidFill>
+                  <a:latin typeface="微軟正黑體" panose="020B0604030504040204" pitchFamily="34" charset="-120"/>
+                  <a:ea typeface="微軟正黑體" panose="020B0604030504040204" pitchFamily="34" charset="-120"/>
+                  <a:cs typeface="Noto Sans CJK TC" pitchFamily="34" charset="-120"/>
+                </a:rPr>
+                <a:t>t₀</a:t>
+              </a:r>
+              <a:endParaRPr lang="en-US" sz="1600" dirty="0">
+                <a:latin typeface="微軟正黑體" panose="020B0604030504040204" pitchFamily="34" charset="-120"/>
+                <a:ea typeface="微軟正黑體" panose="020B0604030504040204" pitchFamily="34" charset="-120"/>
+              </a:endParaRPr>
+            </a:p>
+          </p:txBody>
+        </p:sp>
+        <p:sp>
+          <p:nvSpPr>
+            <p:cNvPr id="13" name="Text 13">
+              <a:extLst>
+                <a:ext uri="{FF2B5EF4-FFF2-40B4-BE49-F238E27FC236}">
+                  <a16:creationId xmlns:a16="http://schemas.microsoft.com/office/drawing/2014/main" id="{78320403-216C-E725-4CC6-A86BC60C4514}"/>
+                </a:ext>
+              </a:extLst>
+            </p:cNvPr>
+            <p:cNvSpPr/>
+            <p:nvPr/>
+          </p:nvSpPr>
+          <p:spPr>
+            <a:xfrm>
+              <a:off x="3377879" y="2322525"/>
+              <a:ext cx="1800000" cy="900000"/>
+            </a:xfrm>
+            <a:prstGeom prst="rect">
+              <a:avLst/>
+            </a:prstGeom>
             <a:solidFill>
-              <a:srgbClr val="5B839B"/>
+              <a:srgbClr val="FFF3C8"/>
             </a:solidFill>
-            <a:prstDash val="solid"/>
-            <a:headEnd type="none"/>
-            <a:tailEnd type="triangle"/>
-          </a:ln>
-        </p:spPr>
-        <p:txBody>
-          <a:bodyPr/>
-          <a:lstStyle/>
-          <a:p>
-            <a:endParaRPr lang="zh-TW" altLang="en-US"/>
-          </a:p>
-        </p:txBody>
-      </p:sp>
-      <p:sp>
-        <p:nvSpPr>
-          <p:cNvPr id="17" name="Text 13">
-            <a:extLst>
-              <a:ext uri="{FF2B5EF4-FFF2-40B4-BE49-F238E27FC236}">
-                <a16:creationId xmlns:a16="http://schemas.microsoft.com/office/drawing/2014/main" id="{B593E249-C2DA-3C9D-D738-D897E2040B90}"/>
-              </a:ext>
-            </a:extLst>
-          </p:cNvPr>
-          <p:cNvSpPr/>
-          <p:nvPr/>
-        </p:nvSpPr>
-        <p:spPr>
-          <a:xfrm>
-            <a:off x="6249743" y="2307868"/>
-            <a:ext cx="1800000" cy="900000"/>
-          </a:xfrm>
-          <a:prstGeom prst="rect">
-            <a:avLst/>
-          </a:prstGeom>
-          <a:solidFill>
-            <a:schemeClr val="accent5">
-              <a:lumMod val="20000"/>
-              <a:lumOff val="80000"/>
-            </a:schemeClr>
-          </a:solidFill>
-          <a:ln>
-            <a:solidFill>
-              <a:srgbClr val="C8D6DE"/>
-            </a:solidFill>
-          </a:ln>
-        </p:spPr>
-        <p:txBody>
-          <a:bodyPr wrap="square" lIns="635" tIns="635" rIns="635" bIns="635" rtlCol="0" anchor="ctr">
-            <a:normAutofit/>
-          </a:bodyPr>
-          <a:lstStyle/>
-          <a:p>
-            <a:pPr algn="ctr"/>
-            <a:r>
-              <a:rPr lang="en-US" altLang="zh-TW" sz="1600" dirty="0">
-                <a:solidFill>
-                  <a:srgbClr val="27323A"/>
-                </a:solidFill>
-                <a:latin typeface="微軟正黑體" panose="020B0604030504040204" pitchFamily="34" charset="-120"/>
-                <a:ea typeface="微軟正黑體" panose="020B0604030504040204" pitchFamily="34" charset="-120"/>
-                <a:cs typeface="Noto Sans CJK TC" pitchFamily="34" charset="-120"/>
-              </a:rPr>
-              <a:t>self-speculative decoding</a:t>
-            </a:r>
-            <a:endParaRPr lang="en-US" sz="1600" dirty="0">
-              <a:latin typeface="微軟正黑體" panose="020B0604030504040204" pitchFamily="34" charset="-120"/>
-              <a:ea typeface="微軟正黑體" panose="020B0604030504040204" pitchFamily="34" charset="-120"/>
-            </a:endParaRPr>
-          </a:p>
-        </p:txBody>
-      </p:sp>
-      <p:sp>
-        <p:nvSpPr>
-          <p:cNvPr id="18" name="Shape 8">
-            <a:extLst>
-              <a:ext uri="{FF2B5EF4-FFF2-40B4-BE49-F238E27FC236}">
-                <a16:creationId xmlns:a16="http://schemas.microsoft.com/office/drawing/2014/main" id="{D60F4829-8322-075A-A3AC-A78060E7551B}"/>
-              </a:ext>
-            </a:extLst>
-          </p:cNvPr>
-          <p:cNvSpPr/>
-          <p:nvPr/>
-        </p:nvSpPr>
-        <p:spPr>
-          <a:xfrm flipV="1">
-            <a:off x="8057859" y="2737126"/>
-            <a:ext cx="1080000" cy="5504"/>
-          </a:xfrm>
-          <a:prstGeom prst="line">
-            <a:avLst/>
-          </a:prstGeom>
-          <a:noFill/>
-          <a:ln w="12700">
-            <a:solidFill>
-              <a:srgbClr val="5B839B"/>
-            </a:solidFill>
-            <a:prstDash val="solid"/>
-            <a:headEnd type="none"/>
-            <a:tailEnd type="triangle"/>
-          </a:ln>
-        </p:spPr>
-        <p:txBody>
-          <a:bodyPr/>
-          <a:lstStyle/>
-          <a:p>
-            <a:endParaRPr lang="zh-TW" altLang="en-US"/>
-          </a:p>
-        </p:txBody>
-      </p:sp>
+            <a:ln>
+              <a:solidFill>
+                <a:srgbClr val="C8D6DE"/>
+              </a:solidFill>
+            </a:ln>
+          </p:spPr>
+          <p:txBody>
+            <a:bodyPr wrap="square" lIns="635" tIns="635" rIns="635" bIns="635" rtlCol="0" anchor="ctr">
+              <a:normAutofit/>
+            </a:bodyPr>
+            <a:lstStyle/>
+            <a:p>
+              <a:pPr marL="0" indent="0" algn="ctr">
+                <a:buNone/>
+              </a:pPr>
+              <a:r>
+                <a:rPr lang="en-US" sz="1600" dirty="0">
+                  <a:solidFill>
+                    <a:srgbClr val="27323A"/>
+                  </a:solidFill>
+                  <a:latin typeface="微軟正黑體" panose="020B0604030504040204" pitchFamily="34" charset="-120"/>
+                  <a:ea typeface="微軟正黑體" panose="020B0604030504040204" pitchFamily="34" charset="-120"/>
+                  <a:cs typeface="Noto Sans CJK TC" pitchFamily="34" charset="-120"/>
+                </a:rPr>
+                <a:t>Model</a:t>
+              </a:r>
+            </a:p>
+            <a:p>
+              <a:pPr marL="0" indent="0" algn="ctr">
+                <a:buNone/>
+              </a:pPr>
+              <a:r>
+                <a:rPr lang="en-US" altLang="zh-TW" sz="1600" dirty="0">
+                  <a:solidFill>
+                    <a:srgbClr val="27323A"/>
+                  </a:solidFill>
+                  <a:latin typeface="微軟正黑體" panose="020B0604030504040204" pitchFamily="34" charset="-120"/>
+                  <a:ea typeface="微軟正黑體" panose="020B0604030504040204" pitchFamily="34" charset="-120"/>
+                </a:rPr>
+                <a:t>(target + draft)</a:t>
+              </a:r>
+              <a:endParaRPr lang="en-US" sz="1600" dirty="0">
+                <a:latin typeface="微軟正黑體" panose="020B0604030504040204" pitchFamily="34" charset="-120"/>
+                <a:ea typeface="微軟正黑體" panose="020B0604030504040204" pitchFamily="34" charset="-120"/>
+              </a:endParaRPr>
+            </a:p>
+          </p:txBody>
+        </p:sp>
+        <p:sp>
+          <p:nvSpPr>
+            <p:cNvPr id="14" name="Text 15">
+              <a:extLst>
+                <a:ext uri="{FF2B5EF4-FFF2-40B4-BE49-F238E27FC236}">
+                  <a16:creationId xmlns:a16="http://schemas.microsoft.com/office/drawing/2014/main" id="{655F93E8-79DA-8CA5-012E-0FEA8456961F}"/>
+                </a:ext>
+              </a:extLst>
+            </p:cNvPr>
+            <p:cNvSpPr/>
+            <p:nvPr/>
+          </p:nvSpPr>
+          <p:spPr>
+            <a:xfrm>
+              <a:off x="6257875" y="2264650"/>
+              <a:ext cx="1800000" cy="900000"/>
+            </a:xfrm>
+            <a:prstGeom prst="rect">
+              <a:avLst/>
+            </a:prstGeom>
+            <a:noFill/>
+            <a:ln>
+              <a:noFill/>
+            </a:ln>
+          </p:spPr>
+          <p:txBody>
+            <a:bodyPr wrap="square" lIns="635" tIns="635" rIns="635" bIns="635" rtlCol="0" anchor="ctr">
+              <a:normAutofit/>
+            </a:bodyPr>
+            <a:lstStyle/>
+            <a:p>
+              <a:pPr algn="ctr"/>
+              <a:r>
+                <a:rPr lang="en-US" sz="1600" b="1" dirty="0">
+                  <a:solidFill>
+                    <a:srgbClr val="27323A"/>
+                  </a:solidFill>
+                  <a:latin typeface="微軟正黑體" panose="020B0604030504040204" pitchFamily="34" charset="-120"/>
+                  <a:ea typeface="微軟正黑體" panose="020B0604030504040204" pitchFamily="34" charset="-120"/>
+                  <a:cs typeface="Noto Sans CJK TC" pitchFamily="34" charset="-120"/>
+                </a:rPr>
+                <a:t>Output: </a:t>
+              </a:r>
+              <a:r>
+                <a:rPr lang="en-US" altLang="zh-TW" sz="1600" b="1" dirty="0">
+                  <a:solidFill>
+                    <a:srgbClr val="27323A"/>
+                  </a:solidFill>
+                  <a:latin typeface="微軟正黑體" panose="020B0604030504040204" pitchFamily="34" charset="-120"/>
+                  <a:ea typeface="微軟正黑體" panose="020B0604030504040204" pitchFamily="34" charset="-120"/>
+                  <a:cs typeface="Noto Sans CJK TC" pitchFamily="34" charset="-120"/>
+                </a:rPr>
+                <a:t>t</a:t>
+              </a:r>
+              <a:r>
+                <a:rPr lang="en-US" altLang="zh-TW" sz="1600" b="1" baseline="-25000" dirty="0">
+                  <a:solidFill>
+                    <a:srgbClr val="27323A"/>
+                  </a:solidFill>
+                  <a:latin typeface="微軟正黑體" panose="020B0604030504040204" pitchFamily="34" charset="-120"/>
+                  <a:ea typeface="微軟正黑體" panose="020B0604030504040204" pitchFamily="34" charset="-120"/>
+                  <a:cs typeface="Noto Sans CJK TC" pitchFamily="34" charset="-120"/>
+                </a:rPr>
+                <a:t>1</a:t>
+              </a:r>
+              <a:r>
+                <a:rPr lang="en-US" altLang="zh-TW" sz="1600" b="1" dirty="0">
+                  <a:solidFill>
+                    <a:srgbClr val="27323A"/>
+                  </a:solidFill>
+                  <a:latin typeface="微軟正黑體" panose="020B0604030504040204" pitchFamily="34" charset="-120"/>
+                  <a:ea typeface="微軟正黑體" panose="020B0604030504040204" pitchFamily="34" charset="-120"/>
+                  <a:cs typeface="Noto Sans CJK TC" pitchFamily="34" charset="-120"/>
+                </a:rPr>
+                <a:t>… </a:t>
+              </a:r>
+              <a:r>
+                <a:rPr lang="en-US" altLang="zh-TW" sz="1600" b="1" dirty="0" err="1">
+                  <a:solidFill>
+                    <a:srgbClr val="27323A"/>
+                  </a:solidFill>
+                  <a:latin typeface="微軟正黑體" panose="020B0604030504040204" pitchFamily="34" charset="-120"/>
+                  <a:ea typeface="微軟正黑體" panose="020B0604030504040204" pitchFamily="34" charset="-120"/>
+                  <a:cs typeface="Noto Sans CJK TC" pitchFamily="34" charset="-120"/>
+                </a:rPr>
+                <a:t>t</a:t>
+              </a:r>
+              <a:r>
+                <a:rPr lang="en-US" altLang="zh-TW" sz="1600" b="1" baseline="-25000" dirty="0" err="1">
+                  <a:solidFill>
+                    <a:srgbClr val="27323A"/>
+                  </a:solidFill>
+                  <a:latin typeface="微軟正黑體" panose="020B0604030504040204" pitchFamily="34" charset="-120"/>
+                  <a:ea typeface="微軟正黑體" panose="020B0604030504040204" pitchFamily="34" charset="-120"/>
+                  <a:cs typeface="Noto Sans CJK TC" pitchFamily="34" charset="-120"/>
+                </a:rPr>
+                <a:t>k</a:t>
+              </a:r>
+              <a:endParaRPr lang="en-US" sz="1600" baseline="-25000" dirty="0">
+                <a:latin typeface="微軟正黑體" panose="020B0604030504040204" pitchFamily="34" charset="-120"/>
+                <a:ea typeface="微軟正黑體" panose="020B0604030504040204" pitchFamily="34" charset="-120"/>
+              </a:endParaRPr>
+            </a:p>
+          </p:txBody>
+        </p:sp>
+        <p:sp>
+          <p:nvSpPr>
+            <p:cNvPr id="18" name="Shape 8">
+              <a:extLst>
+                <a:ext uri="{FF2B5EF4-FFF2-40B4-BE49-F238E27FC236}">
+                  <a16:creationId xmlns:a16="http://schemas.microsoft.com/office/drawing/2014/main" id="{D60F4829-8322-075A-A3AC-A78060E7551B}"/>
+                </a:ext>
+              </a:extLst>
+            </p:cNvPr>
+            <p:cNvSpPr/>
+            <p:nvPr/>
+          </p:nvSpPr>
+          <p:spPr>
+            <a:xfrm flipV="1">
+              <a:off x="5177875" y="2718559"/>
+              <a:ext cx="1080000" cy="5504"/>
+            </a:xfrm>
+            <a:prstGeom prst="line">
+              <a:avLst/>
+            </a:prstGeom>
+            <a:noFill/>
+            <a:ln w="12700">
+              <a:solidFill>
+                <a:srgbClr val="5B839B"/>
+              </a:solidFill>
+              <a:prstDash val="solid"/>
+              <a:headEnd type="none"/>
+              <a:tailEnd type="triangle"/>
+            </a:ln>
+          </p:spPr>
+          <p:txBody>
+            <a:bodyPr/>
+            <a:lstStyle/>
+            <a:p>
+              <a:endParaRPr lang="zh-TW" altLang="en-US"/>
+            </a:p>
+          </p:txBody>
+        </p:sp>
+      </p:grpSp>
     </p:spTree>
     <p:extLst>
       <p:ext uri="{BB962C8B-B14F-4D97-AF65-F5344CB8AC3E}">
@@ -34269,7 +34504,29 @@
                 <a:ea typeface="微軟正黑體" panose="020B0604030504040204" pitchFamily="34" charset="-120"/>
                 <a:cs typeface="Noto Sans CJK TC" pitchFamily="34" charset="-120"/>
               </a:rPr>
-              <a:t>標準 MTP 只用 CE loss 訓練每個 target, draft model，但不同 </a:t>
+              <a:t>標準 MTP 只用 CE loss </a:t>
+            </a:r>
+            <a:r>
+              <a:rPr lang="en-US" sz="1600" b="1" dirty="0" err="1">
+                <a:solidFill>
+                  <a:srgbClr val="27323A"/>
+                </a:solidFill>
+                <a:latin typeface="微軟正黑體" panose="020B0604030504040204" pitchFamily="34" charset="-120"/>
+                <a:ea typeface="微軟正黑體" panose="020B0604030504040204" pitchFamily="34" charset="-120"/>
+                <a:cs typeface="Noto Sans CJK TC" pitchFamily="34" charset="-120"/>
+              </a:rPr>
+              <a:t>訓練每個</a:t>
+            </a:r>
+            <a:r>
+              <a:rPr lang="en-US" sz="1600" b="1" dirty="0">
+                <a:solidFill>
+                  <a:srgbClr val="27323A"/>
+                </a:solidFill>
+                <a:latin typeface="微軟正黑體" panose="020B0604030504040204" pitchFamily="34" charset="-120"/>
+                <a:ea typeface="微軟正黑體" panose="020B0604030504040204" pitchFamily="34" charset="-120"/>
+                <a:cs typeface="Noto Sans CJK TC" pitchFamily="34" charset="-120"/>
+              </a:rPr>
+              <a:t> </a:t>
             </a:r>
             <a:r>
               <a:rPr lang="en-US" altLang="zh-TW" sz="1600" b="1" dirty="0">
@@ -34280,7 +34537,51 @@
                 <a:ea typeface="微軟正黑體" panose="020B0604030504040204" pitchFamily="34" charset="-120"/>
                 <a:cs typeface="Noto Sans CJK TC" pitchFamily="34" charset="-120"/>
               </a:rPr>
-              <a:t>model</a:t>
+              <a:t>prediction </a:t>
+            </a:r>
+            <a:r>
+              <a:rPr lang="en-US" altLang="zh-TW" sz="1600" b="1" dirty="0" err="1">
+                <a:solidFill>
+                  <a:srgbClr val="27323A"/>
+                </a:solidFill>
+                <a:latin typeface="微軟正黑體" panose="020B0604030504040204" pitchFamily="34" charset="-120"/>
+                <a:ea typeface="微軟正黑體" panose="020B0604030504040204" pitchFamily="34" charset="-120"/>
+                <a:cs typeface="Noto Sans CJK TC" pitchFamily="34" charset="-120"/>
+              </a:rPr>
+              <a:t>heads</a:t>
+            </a:r>
+            <a:r>
+              <a:rPr lang="en-US" sz="1600" b="1" dirty="0" err="1">
+                <a:solidFill>
+                  <a:srgbClr val="27323A"/>
+                </a:solidFill>
+                <a:latin typeface="微軟正黑體" panose="020B0604030504040204" pitchFamily="34" charset="-120"/>
+                <a:ea typeface="微軟正黑體" panose="020B0604030504040204" pitchFamily="34" charset="-120"/>
+                <a:cs typeface="Noto Sans CJK TC" pitchFamily="34" charset="-120"/>
+              </a:rPr>
+              <a:t>，但不同</a:t>
+            </a:r>
+            <a:r>
+              <a:rPr lang="en-US" sz="1600" b="1" dirty="0">
+                <a:solidFill>
+                  <a:srgbClr val="27323A"/>
+                </a:solidFill>
+                <a:latin typeface="微軟正黑體" panose="020B0604030504040204" pitchFamily="34" charset="-120"/>
+                <a:ea typeface="微軟正黑體" panose="020B0604030504040204" pitchFamily="34" charset="-120"/>
+                <a:cs typeface="Noto Sans CJK TC" pitchFamily="34" charset="-120"/>
+              </a:rPr>
+              <a:t> </a:t>
+            </a:r>
+            <a:r>
+              <a:rPr lang="en-US" altLang="zh-TW" sz="1600" b="1" dirty="0">
+                <a:solidFill>
+                  <a:srgbClr val="27323A"/>
+                </a:solidFill>
+                <a:latin typeface="微軟正黑體" panose="020B0604030504040204" pitchFamily="34" charset="-120"/>
+                <a:ea typeface="微軟正黑體" panose="020B0604030504040204" pitchFamily="34" charset="-120"/>
+                <a:cs typeface="Noto Sans CJK TC" pitchFamily="34" charset="-120"/>
+              </a:rPr>
+              <a:t>heads</a:t>
             </a:r>
             <a:r>
               <a:rPr lang="en-US" sz="1600" b="1" dirty="0">
@@ -34512,7 +34813,7 @@
                   <a:ea typeface="微軟正黑體" panose="020B0604030504040204" pitchFamily="34" charset="-120"/>
                   <a:cs typeface="Noto Sans CJK TC" pitchFamily="34" charset="-120"/>
                 </a:rPr>
-                <a:t>Draft model</a:t>
+                <a:t>prediction head</a:t>
               </a:r>
               <a:r>
                 <a:rPr lang="zh-TW" altLang="en-US" sz="1600" dirty="0">
@@ -34588,7 +34889,7 @@
                   <a:ea typeface="微軟正黑體" panose="020B0604030504040204" pitchFamily="34" charset="-120"/>
                   <a:cs typeface="Noto Sans CJK TC" pitchFamily="34" charset="-120"/>
                 </a:rPr>
-                <a:t>Draft model</a:t>
+                <a:t>prediction head </a:t>
               </a:r>
               <a:r>
                 <a:rPr lang="zh-TW" altLang="en-US" sz="1600" dirty="0">
@@ -34599,7 +34900,7 @@
                   <a:ea typeface="微軟正黑體" panose="020B0604030504040204" pitchFamily="34" charset="-120"/>
                   <a:cs typeface="Noto Sans CJK TC" pitchFamily="34" charset="-120"/>
                 </a:rPr>
-                <a:t> 預測</a:t>
+                <a:t>預測</a:t>
               </a:r>
               <a:r>
                 <a:rPr lang="en-US" altLang="zh-TW" sz="1600" dirty="0">
@@ -41187,7 +41488,7 @@
         <p:spPr>
           <a:xfrm>
             <a:off x="350282" y="5572343"/>
-            <a:ext cx="10294044" cy="738664"/>
+            <a:ext cx="11472910" cy="523220"/>
           </a:xfrm>
           <a:prstGeom prst="rect">
             <a:avLst/>
@@ -41223,7 +41524,7 @@
                 <a:latin typeface="微軟正黑體" panose="020B0604030504040204" pitchFamily="34" charset="-120"/>
                 <a:ea typeface="微軟正黑體" panose="020B0604030504040204" pitchFamily="34" charset="-120"/>
               </a:rPr>
-              <a:t>next-token prediction (target model)</a:t>
+              <a:t>next-token prediction (next-token output head)</a:t>
             </a:r>
             <a:r>
               <a:rPr lang="zh-TW" altLang="en-US" sz="1400" dirty="0">
@@ -41239,84 +41540,60 @@
               <a:buChar char="•"/>
             </a:pPr>
             <a:r>
+              <a:rPr lang="zh-TW" altLang="en-US" sz="1400" dirty="0">
+                <a:latin typeface="微軟正黑體" panose="020B0604030504040204" pitchFamily="34" charset="-120"/>
+                <a:ea typeface="微軟正黑體" panose="020B0604030504040204" pitchFamily="34" charset="-120"/>
+              </a:rPr>
+              <a:t>計算成本主要來自 </a:t>
+            </a:r>
+            <a:r>
               <a:rPr lang="en-US" altLang="zh-TW" sz="1400" dirty="0">
                 <a:latin typeface="微軟正黑體" panose="020B0604030504040204" pitchFamily="34" charset="-120"/>
                 <a:ea typeface="微軟正黑體" panose="020B0604030504040204" pitchFamily="34" charset="-120"/>
               </a:rPr>
-              <a:t>Head 2~K </a:t>
+              <a:t>shared trunk</a:t>
             </a:r>
             <a:r>
               <a:rPr lang="zh-TW" altLang="en-US" sz="1400" dirty="0">
                 <a:latin typeface="微軟正黑體" panose="020B0604030504040204" pitchFamily="34" charset="-120"/>
                 <a:ea typeface="微軟正黑體" panose="020B0604030504040204" pitchFamily="34" charset="-120"/>
               </a:rPr>
-              <a:t>對應 </a:t>
+              <a:t>，多個 </a:t>
             </a:r>
             <a:r>
               <a:rPr lang="en-US" altLang="zh-TW" sz="1400" dirty="0">
                 <a:latin typeface="微軟正黑體" panose="020B0604030504040204" pitchFamily="34" charset="-120"/>
                 <a:ea typeface="微軟正黑體" panose="020B0604030504040204" pitchFamily="34" charset="-120"/>
               </a:rPr>
-              <a:t>draft model</a:t>
+              <a:t>prediction heads </a:t>
             </a:r>
             <a:r>
               <a:rPr lang="zh-TW" altLang="en-US" sz="1400" dirty="0">
                 <a:latin typeface="微軟正黑體" panose="020B0604030504040204" pitchFamily="34" charset="-120"/>
                 <a:ea typeface="微軟正黑體" panose="020B0604030504040204" pitchFamily="34" charset="-120"/>
               </a:rPr>
-              <a:t>。</a:t>
-            </a:r>
-            <a:endParaRPr lang="en-US" altLang="zh-TW" sz="1400" dirty="0">
-              <a:latin typeface="微軟正黑體" panose="020B0604030504040204" pitchFamily="34" charset="-120"/>
-              <a:ea typeface="微軟正黑體" panose="020B0604030504040204" pitchFamily="34" charset="-120"/>
-            </a:endParaRPr>
-          </a:p>
-          <a:p>
-            <a:pPr marL="285750" indent="-285750">
-              <a:buFont typeface="Arial" panose="020B0604020202020204" pitchFamily="34" charset="0"/>
-              <a:buChar char="•"/>
-            </a:pPr>
+              <a:t>的額外成本相對有限，因此可透過一次預測多個 </a:t>
+            </a:r>
+            <a:r>
+              <a:rPr lang="en-US" altLang="zh-TW" sz="1400" dirty="0">
+                <a:latin typeface="微軟正黑體" panose="020B0604030504040204" pitchFamily="34" charset="-120"/>
+                <a:ea typeface="微軟正黑體" panose="020B0604030504040204" pitchFamily="34" charset="-120"/>
+              </a:rPr>
+              <a:t>future tokens </a:t>
+            </a:r>
             <a:r>
               <a:rPr lang="zh-TW" altLang="en-US" sz="1400" dirty="0">
                 <a:latin typeface="微軟正黑體" panose="020B0604030504040204" pitchFamily="34" charset="-120"/>
                 <a:ea typeface="微軟正黑體" panose="020B0604030504040204" pitchFamily="34" charset="-120"/>
               </a:rPr>
-              <a:t>計算成本主要集中在 </a:t>
+              <a:t>加速 </a:t>
             </a:r>
             <a:r>
               <a:rPr lang="en-US" altLang="zh-TW" sz="1400" dirty="0">
                 <a:latin typeface="微軟正黑體" panose="020B0604030504040204" pitchFamily="34" charset="-120"/>
                 <a:ea typeface="微軟正黑體" panose="020B0604030504040204" pitchFamily="34" charset="-120"/>
               </a:rPr>
-              <a:t>shared trunk</a:t>
-            </a:r>
-            <a:r>
-              <a:rPr lang="zh-TW" altLang="en-US" sz="1400" dirty="0">
-                <a:latin typeface="微軟正黑體" panose="020B0604030504040204" pitchFamily="34" charset="-120"/>
-                <a:ea typeface="微軟正黑體" panose="020B0604030504040204" pitchFamily="34" charset="-120"/>
-              </a:rPr>
-              <a:t>；多個 </a:t>
-            </a:r>
-            <a:r>
-              <a:rPr lang="en-US" altLang="zh-TW" sz="1400" dirty="0">
-                <a:latin typeface="微軟正黑體" panose="020B0604030504040204" pitchFamily="34" charset="-120"/>
-                <a:ea typeface="微軟正黑體" panose="020B0604030504040204" pitchFamily="34" charset="-120"/>
-              </a:rPr>
-              <a:t>heads </a:t>
-            </a:r>
-            <a:r>
-              <a:rPr lang="zh-TW" altLang="en-US" sz="1400" dirty="0">
-                <a:latin typeface="微軟正黑體" panose="020B0604030504040204" pitchFamily="34" charset="-120"/>
-                <a:ea typeface="微軟正黑體" panose="020B0604030504040204" pitchFamily="34" charset="-120"/>
-              </a:rPr>
-              <a:t>的額外成本相對較小，因此可用於 </a:t>
-            </a:r>
-            <a:r>
-              <a:rPr lang="en-US" altLang="zh-TW" sz="1400" dirty="0">
-                <a:latin typeface="微軟正黑體" panose="020B0604030504040204" pitchFamily="34" charset="-120"/>
-                <a:ea typeface="微軟正黑體" panose="020B0604030504040204" pitchFamily="34" charset="-120"/>
-              </a:rPr>
-              <a:t>draft token prediction</a:t>
+              <a:t>decoding</a:t>
             </a:r>
             <a:r>
               <a:rPr lang="zh-TW" altLang="en-US" sz="1400" dirty="0">

--- a/doc/mtp_with_consistency_method_v2.pptx
+++ b/doc/mtp_with_consistency_method_v2.pptx
@@ -5198,65 +5198,61 @@
               <a:buNone/>
             </a:pPr>
             <a:r>
-              <a:rPr lang="zh-TW" altLang="en-US" sz="1400" b="1">
+              <a:rPr lang="zh-TW" altLang="en-US" sz="1400" b="1" dirty="0">
                 <a:latin typeface="微軟正黑體" panose="020B0604030504040204" pitchFamily="34" charset="-120"/>
                 <a:ea typeface="微軟正黑體" panose="020B0604030504040204" pitchFamily="34" charset="-120"/>
               </a:rPr>
               <a:t>未加入 </a:t>
             </a:r>
             <a:r>
-              <a:rPr lang="en-US" sz="1400" b="1">
+              <a:rPr lang="en-US" sz="1400" b="1" dirty="0">
                 <a:latin typeface="微軟正黑體" panose="020B0604030504040204" pitchFamily="34" charset="-120"/>
                 <a:ea typeface="微軟正黑體" panose="020B0604030504040204" pitchFamily="34" charset="-120"/>
               </a:rPr>
               <a:t>consistency </a:t>
             </a:r>
             <a:r>
-              <a:rPr lang="zh-TW" altLang="en-US" sz="1400" b="1">
+              <a:rPr lang="zh-TW" altLang="en-US" sz="1400" b="1" dirty="0">
                 <a:latin typeface="微軟正黑體" panose="020B0604030504040204" pitchFamily="34" charset="-120"/>
                 <a:ea typeface="微軟正黑體" panose="020B0604030504040204" pitchFamily="34" charset="-120"/>
               </a:rPr>
               <a:t>時，各 </a:t>
             </a:r>
             <a:r>
-              <a:rPr lang="en-US" sz="1400" b="1">
-                <a:latin typeface="微軟正黑體" panose="020B0604030504040204" pitchFamily="34" charset="-120"/>
-                <a:ea typeface="微軟正黑體" panose="020B0604030504040204" pitchFamily="34" charset="-120"/>
-              </a:rPr>
-              <a:t>head </a:t>
-            </a:r>
-            <a:r>
-              <a:rPr lang="zh-TW" altLang="en-US" sz="1400" b="1">
+              <a:rPr lang="en-US" sz="1400" b="1" dirty="0">
+                <a:latin typeface="微軟正黑體" panose="020B0604030504040204" pitchFamily="34" charset="-120"/>
+                <a:ea typeface="微軟正黑體" panose="020B0604030504040204" pitchFamily="34" charset="-120"/>
+              </a:rPr>
+              <a:t>heads </a:t>
+            </a:r>
+            <a:r>
+              <a:rPr lang="zh-TW" altLang="en-US" sz="1400" b="1" dirty="0">
                 <a:latin typeface="微軟正黑體" panose="020B0604030504040204" pitchFamily="34" charset="-120"/>
                 <a:ea typeface="微軟正黑體" panose="020B0604030504040204" pitchFamily="34" charset="-120"/>
               </a:rPr>
               <a:t>僅針對對應的 </a:t>
             </a:r>
             <a:r>
-              <a:rPr lang="en-US" sz="1400" b="1">
+              <a:rPr lang="en-US" sz="1400" b="1" dirty="0">
                 <a:latin typeface="微軟正黑體" panose="020B0604030504040204" pitchFamily="34" charset="-120"/>
                 <a:ea typeface="微軟正黑體" panose="020B0604030504040204" pitchFamily="34" charset="-120"/>
               </a:rPr>
               <a:t>ground-truth token </a:t>
             </a:r>
             <a:r>
-              <a:rPr lang="zh-TW" altLang="en-US" sz="1400" b="1">
+              <a:rPr lang="zh-TW" altLang="en-US" sz="1400" b="1" dirty="0">
                 <a:latin typeface="微軟正黑體" panose="020B0604030504040204" pitchFamily="34" charset="-120"/>
                 <a:ea typeface="微軟正黑體" panose="020B0604030504040204" pitchFamily="34" charset="-120"/>
               </a:rPr>
               <a:t>獨立計算 </a:t>
             </a:r>
             <a:r>
-              <a:rPr lang="en-US" sz="1400" b="1">
+              <a:rPr lang="en-US" sz="1400" b="1" dirty="0">
                 <a:latin typeface="微軟正黑體" panose="020B0604030504040204" pitchFamily="34" charset="-120"/>
                 <a:ea typeface="微軟正黑體" panose="020B0604030504040204" pitchFamily="34" charset="-120"/>
               </a:rPr>
               <a:t>CE loss。</a:t>
             </a:r>
-            <a:endParaRPr lang="en-US" sz="1400" b="1" dirty="0">
-              <a:latin typeface="微軟正黑體" panose="020B0604030504040204" pitchFamily="34" charset="-120"/>
-              <a:ea typeface="微軟正黑體" panose="020B0604030504040204" pitchFamily="34" charset="-120"/>
-            </a:endParaRPr>
           </a:p>
         </p:txBody>
       </p:sp>
@@ -24263,6 +24259,10 @@
             </a:endParaRPr>
           </a:p>
           <a:p>
+            <a:pPr marL="285750" indent="-285750">
+              <a:buFont typeface="Arial" panose="020B0604020202020204" pitchFamily="34" charset="0"/>
+              <a:buChar char="•"/>
+            </a:pPr>
             <a:r>
               <a:rPr lang="en-US" altLang="zh-TW" sz="1400" dirty="0">
                 <a:latin typeface="微軟正黑體" panose="020B0604030504040204" pitchFamily="34" charset="-120"/>
@@ -24319,18 +24319,43 @@
               </a:rPr>
               <a:t>的提升較明顯。</a:t>
             </a:r>
-            <a:br>
+            <a:endParaRPr lang="en-US" altLang="zh-TW" sz="1400" dirty="0">
+              <a:latin typeface="微軟正黑體" panose="020B0604030504040204" pitchFamily="34" charset="-120"/>
+              <a:ea typeface="微軟正黑體" panose="020B0604030504040204" pitchFamily="34" charset="-120"/>
+            </a:endParaRPr>
+          </a:p>
+          <a:p>
+            <a:pPr marL="285750" indent="-285750">
+              <a:buFont typeface="Arial" panose="020B0604020202020204" pitchFamily="34" charset="0"/>
+              <a:buChar char="•"/>
+            </a:pPr>
+            <a:r>
+              <a:rPr lang="en-US" altLang="zh-TW" sz="1400" dirty="0" err="1">
+                <a:latin typeface="微軟正黑體" panose="020B0604030504040204" pitchFamily="34" charset="-120"/>
+                <a:ea typeface="微軟正黑體" panose="020B0604030504040204" pitchFamily="34" charset="-120"/>
+              </a:rPr>
+              <a:t>WikiText</a:t>
+            </a:r>
+            <a:r>
+              <a:rPr lang="en-US" altLang="zh-TW" sz="1400" dirty="0">
+                <a:latin typeface="微軟正黑體" panose="020B0604030504040204" pitchFamily="34" charset="-120"/>
+                <a:ea typeface="微軟正黑體" panose="020B0604030504040204" pitchFamily="34" charset="-120"/>
+              </a:rPr>
+              <a:t> </a:t>
+            </a:r>
+            <a:r>
               <a:rPr lang="zh-TW" altLang="en-US" sz="1400" dirty="0">
                 <a:latin typeface="微軟正黑體" panose="020B0604030504040204" pitchFamily="34" charset="-120"/>
                 <a:ea typeface="微軟正黑體" panose="020B0604030504040204" pitchFamily="34" charset="-120"/>
               </a:rPr>
-            </a:br>
+              <a:t>與 </a:t>
+            </a:r>
             <a:r>
               <a:rPr lang="en-US" altLang="zh-TW" sz="1400" dirty="0" err="1">
                 <a:latin typeface="微軟正黑體" panose="020B0604030504040204" pitchFamily="34" charset="-120"/>
                 <a:ea typeface="微軟正黑體" panose="020B0604030504040204" pitchFamily="34" charset="-120"/>
               </a:rPr>
-              <a:t>WikiText</a:t>
+              <a:t>OpenWebText</a:t>
             </a:r>
             <a:r>
               <a:rPr lang="en-US" altLang="zh-TW" sz="1400" dirty="0">
@@ -24344,77 +24369,60 @@
                 <a:latin typeface="微軟正黑體" panose="020B0604030504040204" pitchFamily="34" charset="-120"/>
                 <a:ea typeface="微軟正黑體" panose="020B0604030504040204" pitchFamily="34" charset="-120"/>
               </a:rPr>
-              <a:t>與 </a:t>
-            </a:r>
-            <a:r>
-              <a:rPr lang="en-US" altLang="zh-TW" sz="1400" dirty="0" err="1">
-                <a:latin typeface="微軟正黑體" panose="020B0604030504040204" pitchFamily="34" charset="-120"/>
-                <a:ea typeface="微軟正黑體" panose="020B0604030504040204" pitchFamily="34" charset="-120"/>
-              </a:rPr>
-              <a:t>OpenWebText</a:t>
+              <a:t>均屬於一般領域英文文本，可能因此呈現相似的表現趨勢；</a:t>
             </a:r>
             <a:r>
               <a:rPr lang="en-US" altLang="zh-TW" sz="1400" dirty="0">
                 <a:latin typeface="微軟正黑體" panose="020B0604030504040204" pitchFamily="34" charset="-120"/>
                 <a:ea typeface="微軟正黑體" panose="020B0604030504040204" pitchFamily="34" charset="-120"/>
               </a:rPr>
-              <a:t> </a:t>
+              <a:t>Head 1 </a:t>
             </a:r>
             <a:r>
               <a:rPr lang="zh-TW" altLang="en-US" sz="1400" dirty="0">
                 <a:latin typeface="微軟正黑體" panose="020B0604030504040204" pitchFamily="34" charset="-120"/>
                 <a:ea typeface="微軟正黑體" panose="020B0604030504040204" pitchFamily="34" charset="-120"/>
               </a:rPr>
-              <a:t>均屬於一般領域英文文本，可能因此呈現相似的表現趨勢；</a:t>
+              <a:t>改善有限，提升主要集中於 </a:t>
             </a:r>
             <a:r>
               <a:rPr lang="en-US" altLang="zh-TW" sz="1400" dirty="0">
                 <a:latin typeface="微軟正黑體" panose="020B0604030504040204" pitchFamily="34" charset="-120"/>
                 <a:ea typeface="微軟正黑體" panose="020B0604030504040204" pitchFamily="34" charset="-120"/>
               </a:rPr>
-              <a:t>Head 1 </a:t>
+              <a:t>Head 2</a:t>
             </a:r>
             <a:r>
               <a:rPr lang="zh-TW" altLang="en-US" sz="1400" dirty="0">
                 <a:latin typeface="微軟正黑體" panose="020B0604030504040204" pitchFamily="34" charset="-120"/>
                 <a:ea typeface="微軟正黑體" panose="020B0604030504040204" pitchFamily="34" charset="-120"/>
               </a:rPr>
-              <a:t>改善有限，提升主要集中於 </a:t>
+              <a:t>～</a:t>
             </a:r>
             <a:r>
               <a:rPr lang="en-US" altLang="zh-TW" sz="1400" dirty="0">
                 <a:latin typeface="微軟正黑體" panose="020B0604030504040204" pitchFamily="34" charset="-120"/>
                 <a:ea typeface="微軟正黑體" panose="020B0604030504040204" pitchFamily="34" charset="-120"/>
               </a:rPr>
-              <a:t>Head 2</a:t>
+              <a:t>4</a:t>
             </a:r>
             <a:r>
               <a:rPr lang="zh-TW" altLang="en-US" sz="1400" dirty="0">
                 <a:latin typeface="微軟正黑體" panose="020B0604030504040204" pitchFamily="34" charset="-120"/>
                 <a:ea typeface="微軟正黑體" panose="020B0604030504040204" pitchFamily="34" charset="-120"/>
               </a:rPr>
-              <a:t>～</a:t>
-            </a:r>
-            <a:r>
-              <a:rPr lang="en-US" altLang="zh-TW" sz="1400" dirty="0">
-                <a:latin typeface="微軟正黑體" panose="020B0604030504040204" pitchFamily="34" charset="-120"/>
-                <a:ea typeface="微軟正黑體" panose="020B0604030504040204" pitchFamily="34" charset="-120"/>
-              </a:rPr>
-              <a:t>4</a:t>
-            </a:r>
-            <a:r>
-              <a:rPr lang="zh-TW" altLang="en-US" sz="1400" dirty="0">
-                <a:latin typeface="微軟正黑體" panose="020B0604030504040204" pitchFamily="34" charset="-120"/>
-                <a:ea typeface="微軟正黑體" panose="020B0604030504040204" pitchFamily="34" charset="-120"/>
-              </a:rPr>
               <a:t>。</a:t>
             </a:r>
-            <a:br>
-              <a:rPr lang="en-US" altLang="zh-TW" sz="1400" dirty="0">
-                <a:latin typeface="微軟正黑體" panose="020B0604030504040204" pitchFamily="34" charset="-120"/>
-                <a:ea typeface="微軟正黑體" panose="020B0604030504040204" pitchFamily="34" charset="-120"/>
-              </a:rPr>
-            </a:br>
+            <a:endParaRPr lang="en-US" altLang="zh-TW" sz="1400" dirty="0">
+              <a:latin typeface="微軟正黑體" panose="020B0604030504040204" pitchFamily="34" charset="-120"/>
+              <a:ea typeface="微軟正黑體" panose="020B0604030504040204" pitchFamily="34" charset="-120"/>
+            </a:endParaRPr>
+          </a:p>
+          <a:p>
+            <a:pPr marL="285750" indent="-285750">
+              <a:buFont typeface="Arial" panose="020B0604020202020204" pitchFamily="34" charset="0"/>
+              <a:buChar char="•"/>
+            </a:pPr>
             <a:r>
               <a:rPr lang="zh-TW" altLang="en-US" sz="1400" dirty="0">
                 <a:latin typeface="微軟正黑體" panose="020B0604030504040204" pitchFamily="34" charset="-120"/>
@@ -32254,8 +32262,8 @@
         </p:nvSpPr>
         <p:spPr>
           <a:xfrm>
-            <a:off x="914400" y="4892040"/>
-            <a:ext cx="10608816" cy="502920"/>
+            <a:off x="347472" y="4892040"/>
+            <a:ext cx="11475720" cy="502920"/>
           </a:xfrm>
           <a:prstGeom prst="rect">
             <a:avLst/>
@@ -32271,68 +32279,55 @@
           </a:bodyPr>
           <a:lstStyle/>
           <a:p>
-            <a:pPr marL="0" indent="0">
-              <a:buNone/>
-            </a:pPr>
             <a:r>
               <a:rPr lang="en-US" sz="1600" b="1" dirty="0">
-                <a:solidFill>
-                  <a:srgbClr val="27323A"/>
-                </a:solidFill>
-                <a:latin typeface="微軟正黑體" panose="020B0604030504040204" pitchFamily="34" charset="-120"/>
-                <a:ea typeface="微軟正黑體" panose="020B0604030504040204" pitchFamily="34" charset="-120"/>
-                <a:cs typeface="Noto Sans CJK TC" pitchFamily="34" charset="-120"/>
-              </a:rPr>
-              <a:t>consistency-based training 能</a:t>
+                <a:latin typeface="微軟正黑體" panose="020B0604030504040204" pitchFamily="34" charset="-120"/>
+                <a:ea typeface="微軟正黑體" panose="020B0604030504040204" pitchFamily="34" charset="-120"/>
+              </a:rPr>
+              <a:t>Consistency-based training </a:t>
             </a:r>
             <a:r>
               <a:rPr lang="zh-TW" altLang="en-US" sz="1600" b="1" dirty="0">
-                <a:solidFill>
-                  <a:srgbClr val="27323A"/>
-                </a:solidFill>
-                <a:latin typeface="微軟正黑體" panose="020B0604030504040204" pitchFamily="34" charset="-120"/>
-                <a:ea typeface="微軟正黑體" panose="020B0604030504040204" pitchFamily="34" charset="-120"/>
-                <a:cs typeface="Noto Sans CJK TC" pitchFamily="34" charset="-120"/>
-              </a:rPr>
-              <a:t>提升</a:t>
+                <a:latin typeface="微軟正黑體" panose="020B0604030504040204" pitchFamily="34" charset="-120"/>
+                <a:ea typeface="微軟正黑體" panose="020B0604030504040204" pitchFamily="34" charset="-120"/>
+              </a:rPr>
+              <a:t>透過加強各 </a:t>
             </a:r>
             <a:r>
               <a:rPr lang="en-US" sz="1600" b="1" dirty="0">
-                <a:solidFill>
-                  <a:srgbClr val="27323A"/>
-                </a:solidFill>
-                <a:latin typeface="微軟正黑體" panose="020B0604030504040204" pitchFamily="34" charset="-120"/>
-                <a:ea typeface="微軟正黑體" panose="020B0604030504040204" pitchFamily="34" charset="-120"/>
-                <a:cs typeface="Noto Sans CJK TC" pitchFamily="34" charset="-120"/>
-              </a:rPr>
-              <a:t> draft heads 的</a:t>
+                <a:latin typeface="微軟正黑體" panose="020B0604030504040204" pitchFamily="34" charset="-120"/>
+                <a:ea typeface="微軟正黑體" panose="020B0604030504040204" pitchFamily="34" charset="-120"/>
+              </a:rPr>
+              <a:t>prediction head </a:t>
             </a:r>
             <a:r>
               <a:rPr lang="zh-TW" altLang="en-US" sz="1600" b="1" dirty="0">
-                <a:solidFill>
-                  <a:srgbClr val="27323A"/>
-                </a:solidFill>
-                <a:latin typeface="微軟正黑體" panose="020B0604030504040204" pitchFamily="34" charset="-120"/>
-                <a:ea typeface="微軟正黑體" panose="020B0604030504040204" pitchFamily="34" charset="-120"/>
-                <a:cs typeface="Noto Sans CJK TC" pitchFamily="34" charset="-120"/>
-              </a:rPr>
-              <a:t>最佳化</a:t>
+                <a:latin typeface="微軟正黑體" panose="020B0604030504040204" pitchFamily="34" charset="-120"/>
+                <a:ea typeface="微軟正黑體" panose="020B0604030504040204" pitchFamily="34" charset="-120"/>
+              </a:rPr>
+              <a:t>之間的一致性，提升模型的最佳化效果，進而穩定 </a:t>
             </a:r>
             <a:r>
               <a:rPr lang="en-US" sz="1600" b="1" dirty="0">
-                <a:solidFill>
-                  <a:srgbClr val="27323A"/>
-                </a:solidFill>
-                <a:latin typeface="微軟正黑體" panose="020B0604030504040204" pitchFamily="34" charset="-120"/>
-                <a:ea typeface="微軟正黑體" panose="020B0604030504040204" pitchFamily="34" charset="-120"/>
-                <a:cs typeface="Noto Sans CJK TC" pitchFamily="34" charset="-120"/>
-              </a:rPr>
-              <a:t>，使 semi-autoregressive generation 更穩定。</a:t>
-            </a:r>
-            <a:endParaRPr lang="en-US" sz="1600" b="1" dirty="0">
-              <a:latin typeface="微軟正黑體" panose="020B0604030504040204" pitchFamily="34" charset="-120"/>
-              <a:ea typeface="微軟正黑體" panose="020B0604030504040204" pitchFamily="34" charset="-120"/>
-            </a:endParaRPr>
+                <a:latin typeface="微軟正黑體" panose="020B0604030504040204" pitchFamily="34" charset="-120"/>
+                <a:ea typeface="微軟正黑體" panose="020B0604030504040204" pitchFamily="34" charset="-120"/>
+              </a:rPr>
+              <a:t>autoregressive </a:t>
+            </a:r>
+            <a:r>
+              <a:rPr lang="zh-TW" altLang="en-US" sz="1600" b="1" dirty="0">
+                <a:latin typeface="微軟正黑體" panose="020B0604030504040204" pitchFamily="34" charset="-120"/>
+                <a:ea typeface="微軟正黑體" panose="020B0604030504040204" pitchFamily="34" charset="-120"/>
+              </a:rPr>
+              <a:t>與 </a:t>
+            </a:r>
+            <a:r>
+              <a:rPr lang="en-US" sz="1600" b="1" dirty="0">
+                <a:latin typeface="微軟正黑體" panose="020B0604030504040204" pitchFamily="34" charset="-120"/>
+                <a:ea typeface="微軟正黑體" panose="020B0604030504040204" pitchFamily="34" charset="-120"/>
+              </a:rPr>
+              <a:t>semi-autoregressive generation。</a:t>
+            </a:r>
           </a:p>
         </p:txBody>
       </p:sp>
@@ -32422,7 +32417,7 @@
                 <a:latin typeface="微軟正黑體" panose="020B0604030504040204" pitchFamily="34" charset="-120"/>
                 <a:ea typeface="微軟正黑體" panose="020B0604030504040204" pitchFamily="34" charset="-120"/>
               </a:rPr>
-              <a:t>draft head </a:t>
+              <a:t>prediction heads </a:t>
             </a:r>
             <a:r>
               <a:rPr lang="zh-TW" altLang="en-US" sz="1600" dirty="0">
@@ -33701,7 +33696,7 @@
           <a:lstStyle/>
           <a:p>
             <a:r>
-              <a:rPr lang="en-US" sz="1600" b="1" dirty="0">
+              <a:rPr lang="en-US" sz="1400" b="1" dirty="0">
                 <a:solidFill>
                   <a:srgbClr val="27323A"/>
                 </a:solidFill>
@@ -33712,7 +33707,7 @@
               <a:t>若</a:t>
             </a:r>
             <a:r>
-              <a:rPr lang="zh-TW" altLang="en-US" sz="1600" b="1" dirty="0">
+              <a:rPr lang="en-US" altLang="zh-TW" sz="1400" b="1" dirty="0">
                 <a:solidFill>
                   <a:srgbClr val="27323A"/>
                 </a:solidFill>
@@ -33720,10 +33715,10 @@
                 <a:ea typeface="微軟正黑體" panose="020B0604030504040204" pitchFamily="34" charset="-120"/>
                 <a:cs typeface="Noto Sans CJK TC" pitchFamily="34" charset="-120"/>
               </a:rPr>
-              <a:t>其他 </a:t>
-            </a:r>
-            <a:r>
-              <a:rPr lang="en-US" altLang="zh-TW" sz="1600" b="1" dirty="0">
+              <a:t> next-token output head(Head 1) 與</a:t>
+            </a:r>
+            <a:r>
+              <a:rPr lang="zh-TW" altLang="en-US" sz="1400" b="1" dirty="0">
                 <a:solidFill>
                   <a:srgbClr val="27323A"/>
                 </a:solidFill>
@@ -33731,10 +33726,10 @@
                 <a:ea typeface="微軟正黑體" panose="020B0604030504040204" pitchFamily="34" charset="-120"/>
                 <a:cs typeface="Noto Sans CJK TC" pitchFamily="34" charset="-120"/>
               </a:rPr>
-              <a:t>prediction heads</a:t>
-            </a:r>
-            <a:r>
-              <a:rPr lang="zh-TW" altLang="en-US" sz="1600" b="1" dirty="0">
+              <a:t>其他 </a:t>
+            </a:r>
+            <a:r>
+              <a:rPr lang="en-US" altLang="zh-TW" sz="1400" b="1" dirty="0">
                 <a:solidFill>
                   <a:srgbClr val="27323A"/>
                 </a:solidFill>
@@ -33742,10 +33737,10 @@
                 <a:ea typeface="微軟正黑體" panose="020B0604030504040204" pitchFamily="34" charset="-120"/>
                 <a:cs typeface="Noto Sans CJK TC" pitchFamily="34" charset="-120"/>
               </a:rPr>
-              <a:t> </a:t>
-            </a:r>
-            <a:r>
-              <a:rPr lang="en-US" sz="1600" b="1" dirty="0" err="1">
+              <a:t>prediction heads</a:t>
+            </a:r>
+            <a:r>
+              <a:rPr lang="zh-TW" altLang="en-US" sz="1400" b="1" dirty="0">
                 <a:solidFill>
                   <a:srgbClr val="27323A"/>
                 </a:solidFill>
@@ -33753,10 +33748,10 @@
                 <a:ea typeface="微軟正黑體" panose="020B0604030504040204" pitchFamily="34" charset="-120"/>
                 <a:cs typeface="Noto Sans CJK TC" pitchFamily="34" charset="-120"/>
               </a:rPr>
-              <a:t>的預測與</a:t>
-            </a:r>
-            <a:r>
-              <a:rPr lang="zh-TW" altLang="en-US" sz="1600" b="1" dirty="0">
+              <a:t> </a:t>
+            </a:r>
+            <a:r>
+              <a:rPr lang="en-US" sz="1400" b="1" dirty="0" err="1">
                 <a:solidFill>
                   <a:srgbClr val="27323A"/>
                 </a:solidFill>
@@ -33764,10 +33759,10 @@
                 <a:ea typeface="微軟正黑體" panose="020B0604030504040204" pitchFamily="34" charset="-120"/>
                 <a:cs typeface="Noto Sans CJK TC" pitchFamily="34" charset="-120"/>
               </a:rPr>
-              <a:t> </a:t>
-            </a:r>
-            <a:r>
-              <a:rPr lang="en-US" sz="1600" b="1" dirty="0">
+              <a:t>的預測一致，就能一次接受多個</a:t>
+            </a:r>
+            <a:r>
+              <a:rPr lang="en-US" sz="1400" b="1" dirty="0">
                 <a:solidFill>
                   <a:srgbClr val="27323A"/>
                 </a:solidFill>
@@ -33775,10 +33770,10 @@
                 <a:ea typeface="微軟正黑體" panose="020B0604030504040204" pitchFamily="34" charset="-120"/>
                 <a:cs typeface="Noto Sans CJK TC" pitchFamily="34" charset="-120"/>
               </a:rPr>
-              <a:t>next-token output head</a:t>
-            </a:r>
-            <a:r>
-              <a:rPr lang="zh-TW" altLang="en-US" sz="1600" b="1" dirty="0">
+              <a:t> token</a:t>
+            </a:r>
+            <a:r>
+              <a:rPr lang="zh-TW" altLang="en-US" sz="1400" b="1" dirty="0">
                 <a:solidFill>
                   <a:srgbClr val="27323A"/>
                 </a:solidFill>
@@ -33789,7 +33784,7 @@
               <a:t> </a:t>
             </a:r>
             <a:r>
-              <a:rPr lang="en-US" sz="1600" b="1" dirty="0" err="1">
+              <a:rPr lang="en-US" sz="1400" b="1" dirty="0" err="1">
                 <a:solidFill>
                   <a:srgbClr val="27323A"/>
                 </a:solidFill>
@@ -33797,10 +33792,10 @@
                 <a:ea typeface="微軟正黑體" panose="020B0604030504040204" pitchFamily="34" charset="-120"/>
                 <a:cs typeface="Noto Sans CJK TC" pitchFamily="34" charset="-120"/>
               </a:rPr>
-              <a:t>一致，就能一次接受多個</a:t>
-            </a:r>
-            <a:r>
-              <a:rPr lang="en-US" sz="1600" b="1" dirty="0">
+              <a:t>降低實際</a:t>
+            </a:r>
+            <a:r>
+              <a:rPr lang="zh-TW" altLang="en-US" sz="1400" b="1" dirty="0">
                 <a:solidFill>
                   <a:srgbClr val="27323A"/>
                 </a:solidFill>
@@ -33808,10 +33803,10 @@
                 <a:ea typeface="微軟正黑體" panose="020B0604030504040204" pitchFamily="34" charset="-120"/>
                 <a:cs typeface="Noto Sans CJK TC" pitchFamily="34" charset="-120"/>
               </a:rPr>
-              <a:t> token</a:t>
-            </a:r>
-            <a:r>
-              <a:rPr lang="zh-TW" altLang="en-US" sz="1600" b="1" dirty="0">
+              <a:t>推論</a:t>
+            </a:r>
+            <a:r>
+              <a:rPr lang="en-US" sz="1400" b="1" dirty="0" err="1">
                 <a:solidFill>
                   <a:srgbClr val="27323A"/>
                 </a:solidFill>
@@ -33819,10 +33814,10 @@
                 <a:ea typeface="微軟正黑體" panose="020B0604030504040204" pitchFamily="34" charset="-120"/>
                 <a:cs typeface="Noto Sans CJK TC" pitchFamily="34" charset="-120"/>
               </a:rPr>
-              <a:t> </a:t>
-            </a:r>
-            <a:r>
-              <a:rPr lang="en-US" sz="1600" b="1" dirty="0" err="1">
+              <a:t>成本</a:t>
+            </a:r>
+            <a:r>
+              <a:rPr lang="zh-TW" altLang="en-US" sz="1400" b="1" dirty="0">
                 <a:solidFill>
                   <a:srgbClr val="27323A"/>
                 </a:solidFill>
@@ -33830,10 +33825,10 @@
                 <a:ea typeface="微軟正黑體" panose="020B0604030504040204" pitchFamily="34" charset="-120"/>
                 <a:cs typeface="Noto Sans CJK TC" pitchFamily="34" charset="-120"/>
               </a:rPr>
-              <a:t>降低實際</a:t>
-            </a:r>
-            <a:r>
-              <a:rPr lang="zh-TW" altLang="en-US" sz="1600" b="1" dirty="0">
+              <a:t>與加速推論</a:t>
+            </a:r>
+            <a:r>
+              <a:rPr lang="en-US" sz="1400" b="1" dirty="0">
                 <a:solidFill>
                   <a:srgbClr val="27323A"/>
                 </a:solidFill>
@@ -33841,42 +33836,9 @@
                 <a:ea typeface="微軟正黑體" panose="020B0604030504040204" pitchFamily="34" charset="-120"/>
                 <a:cs typeface="Noto Sans CJK TC" pitchFamily="34" charset="-120"/>
               </a:rPr>
-              <a:t>推論</a:t>
-            </a:r>
-            <a:r>
-              <a:rPr lang="en-US" sz="1600" b="1" dirty="0" err="1">
-                <a:solidFill>
-                  <a:srgbClr val="27323A"/>
-                </a:solidFill>
-                <a:latin typeface="微軟正黑體" panose="020B0604030504040204" pitchFamily="34" charset="-120"/>
-                <a:ea typeface="微軟正黑體" panose="020B0604030504040204" pitchFamily="34" charset="-120"/>
-                <a:cs typeface="Noto Sans CJK TC" pitchFamily="34" charset="-120"/>
-              </a:rPr>
-              <a:t>成本</a:t>
-            </a:r>
-            <a:r>
-              <a:rPr lang="zh-TW" altLang="en-US" sz="1600" b="1" dirty="0">
-                <a:solidFill>
-                  <a:srgbClr val="27323A"/>
-                </a:solidFill>
-                <a:latin typeface="微軟正黑體" panose="020B0604030504040204" pitchFamily="34" charset="-120"/>
-                <a:ea typeface="微軟正黑體" panose="020B0604030504040204" pitchFamily="34" charset="-120"/>
-                <a:cs typeface="Noto Sans CJK TC" pitchFamily="34" charset="-120"/>
-              </a:rPr>
-              <a:t>與加速推論</a:t>
-            </a:r>
-            <a:r>
-              <a:rPr lang="en-US" sz="1600" b="1" dirty="0">
-                <a:solidFill>
-                  <a:srgbClr val="27323A"/>
-                </a:solidFill>
-                <a:latin typeface="微軟正黑體" panose="020B0604030504040204" pitchFamily="34" charset="-120"/>
-                <a:ea typeface="微軟正黑體" panose="020B0604030504040204" pitchFamily="34" charset="-120"/>
-                <a:cs typeface="Noto Sans CJK TC" pitchFamily="34" charset="-120"/>
-              </a:rPr>
               <a:t>。</a:t>
             </a:r>
-            <a:endParaRPr lang="en-US" sz="1600" b="1" dirty="0">
+            <a:endParaRPr lang="en-US" sz="1400" b="1" dirty="0">
               <a:latin typeface="微軟正黑體" panose="020B0604030504040204" pitchFamily="34" charset="-120"/>
               <a:ea typeface="微軟正黑體" panose="020B0604030504040204" pitchFamily="34" charset="-120"/>
             </a:endParaRPr>
@@ -34066,19 +34028,16 @@
                 <a:buNone/>
               </a:pPr>
               <a:r>
-                <a:rPr lang="en-US" altLang="zh-TW" sz="1600" dirty="0">
+                <a:rPr lang="en-US" sz="1600" dirty="0">
                   <a:solidFill>
                     <a:srgbClr val="27323A"/>
                   </a:solidFill>
                   <a:latin typeface="微軟正黑體" panose="020B0604030504040204" pitchFamily="34" charset="-120"/>
                   <a:ea typeface="微軟正黑體" panose="020B0604030504040204" pitchFamily="34" charset="-120"/>
+                  <a:cs typeface="Noto Sans CJK TC" pitchFamily="34" charset="-120"/>
                 </a:rPr>
-                <a:t>(target + draft)</a:t>
+                <a:t>(Head 1~k)</a:t>
               </a:r>
-              <a:endParaRPr lang="en-US" sz="1600" dirty="0">
-                <a:latin typeface="微軟正黑體" panose="020B0604030504040204" pitchFamily="34" charset="-120"/>
-                <a:ea typeface="微軟正黑體" panose="020B0604030504040204" pitchFamily="34" charset="-120"/>
-              </a:endParaRPr>
             </a:p>
           </p:txBody>
         </p:sp>
@@ -35297,7 +35256,7 @@
         </p:nvGrpSpPr>
         <p:grpSpPr>
           <a:xfrm>
-            <a:off x="573942" y="2625300"/>
+            <a:off x="573942" y="2660812"/>
             <a:ext cx="3207671" cy="1799425"/>
             <a:chOff x="801019" y="1982462"/>
             <a:chExt cx="3207671" cy="1799425"/>
@@ -35436,7 +35395,7 @@
         <p:spPr>
           <a:xfrm>
             <a:off x="502919" y="1494551"/>
-            <a:ext cx="5755837" cy="1015663"/>
+            <a:ext cx="5755837" cy="1231106"/>
           </a:xfrm>
           <a:prstGeom prst="rect">
             <a:avLst/>
@@ -35476,7 +35435,7 @@
                 <a:latin typeface="微軟正黑體" panose="020B0604030504040204" pitchFamily="34" charset="-120"/>
                 <a:ea typeface="微軟正黑體" panose="020B0604030504040204" pitchFamily="34" charset="-120"/>
               </a:rPr>
-              <a:t>student output probability distribution align teacher output probability distribution</a:t>
+              <a:t>student(Head 2~k) output probability distribution align teacher(Head 1) output probability distribution</a:t>
             </a:r>
             <a:endParaRPr lang="zh-TW" altLang="en-US" sz="1400" dirty="0">
               <a:latin typeface="微軟正黑體" panose="020B0604030504040204" pitchFamily="34" charset="-120"/>
@@ -36218,9 +36177,9 @@
         <p:grpSpPr>
           <a:xfrm>
             <a:off x="653396" y="1099656"/>
-            <a:ext cx="10730884" cy="720000"/>
+            <a:ext cx="10885208" cy="787392"/>
             <a:chOff x="653396" y="1099656"/>
-            <a:chExt cx="10730884" cy="720000"/>
+            <a:chExt cx="10885208" cy="787392"/>
           </a:xfrm>
         </p:grpSpPr>
         <p:sp>
@@ -36286,7 +36245,7 @@
           <p:spPr>
             <a:xfrm>
               <a:off x="1600200" y="1527048"/>
-              <a:ext cx="9784080" cy="292608"/>
+              <a:ext cx="9938404" cy="360000"/>
             </a:xfrm>
             <a:prstGeom prst="rect">
               <a:avLst/>
@@ -36296,7 +36255,7 @@
           </p:spPr>
           <p:txBody>
             <a:bodyPr wrap="square" lIns="0" tIns="0" rIns="0" bIns="0" rtlCol="0" anchor="ctr">
-              <a:normAutofit/>
+              <a:noAutofit/>
             </a:bodyPr>
             <a:lstStyle/>
             <a:p>
@@ -36312,7 +36271,7 @@
                   <a:ea typeface="微軟正黑體" panose="020B0604030504040204" pitchFamily="34" charset="-120"/>
                   <a:cs typeface="Noto Sans CJK TC" pitchFamily="34" charset="-120"/>
                 </a:rPr>
-                <a:t>在</a:t>
+                <a:t>在 </a:t>
               </a:r>
               <a:r>
                 <a:rPr lang="en-US" altLang="zh-TW" sz="1200" dirty="0">
@@ -36323,7 +36282,7 @@
                   <a:ea typeface="微軟正黑體" panose="020B0604030504040204" pitchFamily="34" charset="-120"/>
                   <a:cs typeface="Noto Sans CJK TC" pitchFamily="34" charset="-120"/>
                 </a:rPr>
-                <a:t>pretrain</a:t>
+                <a:t>pre-training </a:t>
               </a:r>
               <a:r>
                 <a:rPr lang="zh-TW" altLang="en-US" sz="1200" dirty="0">
@@ -36334,7 +36293,7 @@
                   <a:ea typeface="微軟正黑體" panose="020B0604030504040204" pitchFamily="34" charset="-120"/>
                   <a:cs typeface="Noto Sans CJK TC" pitchFamily="34" charset="-120"/>
                 </a:rPr>
-                <a:t>階段，我們提出</a:t>
+                <a:t>階段，我們引入 </a:t>
               </a:r>
               <a:r>
                 <a:rPr lang="en-US" altLang="zh-TW" sz="1200" dirty="0">
@@ -36345,7 +36304,7 @@
                   <a:ea typeface="微軟正黑體" panose="020B0604030504040204" pitchFamily="34" charset="-120"/>
                   <a:cs typeface="Noto Sans CJK TC" pitchFamily="34" charset="-120"/>
                 </a:rPr>
-                <a:t>SDC</a:t>
+                <a:t>SDC </a:t>
               </a:r>
               <a:r>
                 <a:rPr lang="zh-TW" altLang="en-US" sz="1200" dirty="0">
@@ -36356,7 +36315,7 @@
                   <a:ea typeface="微軟正黑體" panose="020B0604030504040204" pitchFamily="34" charset="-120"/>
                   <a:cs typeface="Noto Sans CJK TC" pitchFamily="34" charset="-120"/>
                 </a:rPr>
-                <a:t>來當作</a:t>
+                <a:t>作為 </a:t>
               </a:r>
               <a:r>
                 <a:rPr lang="en-US" altLang="zh-TW" sz="1200" dirty="0">
@@ -36367,7 +36326,7 @@
                   <a:ea typeface="微軟正黑體" panose="020B0604030504040204" pitchFamily="34" charset="-120"/>
                   <a:cs typeface="Noto Sans CJK TC" pitchFamily="34" charset="-120"/>
                 </a:rPr>
-                <a:t>loss</a:t>
+                <a:t>consistency regularization term</a:t>
               </a:r>
               <a:r>
                 <a:rPr lang="zh-TW" altLang="en-US" sz="1200" dirty="0">
@@ -36378,7 +36337,7 @@
                   <a:ea typeface="微軟正黑體" panose="020B0604030504040204" pitchFamily="34" charset="-120"/>
                   <a:cs typeface="Noto Sans CJK TC" pitchFamily="34" charset="-120"/>
                 </a:rPr>
-                <a:t>的</a:t>
+                <a:t>，以 </a:t>
               </a:r>
               <a:r>
                 <a:rPr lang="en-US" altLang="zh-TW" sz="1200" dirty="0">
@@ -36389,7 +36348,7 @@
                   <a:ea typeface="微軟正黑體" panose="020B0604030504040204" pitchFamily="34" charset="-120"/>
                   <a:cs typeface="Noto Sans CJK TC" pitchFamily="34" charset="-120"/>
                 </a:rPr>
-                <a:t>regulation term</a:t>
+                <a:t>teacher model </a:t>
               </a:r>
               <a:r>
                 <a:rPr lang="zh-TW" altLang="en-US" sz="1200" dirty="0">
@@ -36400,7 +36359,7 @@
                   <a:ea typeface="微軟正黑體" panose="020B0604030504040204" pitchFamily="34" charset="-120"/>
                   <a:cs typeface="Noto Sans CJK TC" pitchFamily="34" charset="-120"/>
                 </a:rPr>
-                <a:t>，以此約束</a:t>
+                <a:t>的預測分布監督 </a:t>
               </a:r>
               <a:r>
                 <a:rPr lang="en-US" altLang="zh-TW" sz="1200" dirty="0">
@@ -36411,7 +36370,7 @@
                   <a:ea typeface="微軟正黑體" panose="020B0604030504040204" pitchFamily="34" charset="-120"/>
                   <a:cs typeface="Noto Sans CJK TC" pitchFamily="34" charset="-120"/>
                 </a:rPr>
-                <a:t>draft model</a:t>
+                <a:t>student model</a:t>
               </a:r>
               <a:r>
                 <a:rPr lang="zh-TW" altLang="en-US" sz="1200" dirty="0">
@@ -36422,62 +36381,7 @@
                   <a:ea typeface="微軟正黑體" panose="020B0604030504040204" pitchFamily="34" charset="-120"/>
                   <a:cs typeface="Noto Sans CJK TC" pitchFamily="34" charset="-120"/>
                 </a:rPr>
-                <a:t>，讓其的預測結果更符合</a:t>
-              </a:r>
-              <a:r>
-                <a:rPr lang="en-US" altLang="zh-TW" sz="1200" dirty="0">
-                  <a:solidFill>
-                    <a:srgbClr val="27323A"/>
-                  </a:solidFill>
-                  <a:latin typeface="微軟正黑體" panose="020B0604030504040204" pitchFamily="34" charset="-120"/>
-                  <a:ea typeface="微軟正黑體" panose="020B0604030504040204" pitchFamily="34" charset="-120"/>
-                  <a:cs typeface="Noto Sans CJK TC" pitchFamily="34" charset="-120"/>
-                </a:rPr>
-                <a:t>teacher</a:t>
-              </a:r>
-              <a:r>
-                <a:rPr lang="zh-TW" altLang="en-US" sz="1200" dirty="0">
-                  <a:solidFill>
-                    <a:srgbClr val="27323A"/>
-                  </a:solidFill>
-                  <a:latin typeface="微軟正黑體" panose="020B0604030504040204" pitchFamily="34" charset="-120"/>
-                  <a:ea typeface="微軟正黑體" panose="020B0604030504040204" pitchFamily="34" charset="-120"/>
-                  <a:cs typeface="Noto Sans CJK TC" pitchFamily="34" charset="-120"/>
-                </a:rPr>
-                <a:t> </a:t>
-              </a:r>
-              <a:r>
-                <a:rPr lang="en-US" altLang="zh-TW" sz="1200" dirty="0">
-                  <a:solidFill>
-                    <a:srgbClr val="27323A"/>
-                  </a:solidFill>
-                  <a:latin typeface="微軟正黑體" panose="020B0604030504040204" pitchFamily="34" charset="-120"/>
-                  <a:ea typeface="微軟正黑體" panose="020B0604030504040204" pitchFamily="34" charset="-120"/>
-                  <a:cs typeface="Noto Sans CJK TC" pitchFamily="34" charset="-120"/>
-                </a:rPr>
-                <a:t>model</a:t>
-              </a:r>
-              <a:r>
-                <a:rPr lang="zh-TW" altLang="en-US" sz="1200" dirty="0">
-                  <a:solidFill>
-                    <a:srgbClr val="27323A"/>
-                  </a:solidFill>
-                  <a:latin typeface="微軟正黑體" panose="020B0604030504040204" pitchFamily="34" charset="-120"/>
-                  <a:ea typeface="微軟正黑體" panose="020B0604030504040204" pitchFamily="34" charset="-120"/>
-                  <a:cs typeface="Noto Sans CJK TC" pitchFamily="34" charset="-120"/>
-                </a:rPr>
-                <a:t>所期待的</a:t>
-              </a:r>
-              <a:r>
-                <a:rPr lang="en-US" sz="1200" dirty="0">
-                  <a:solidFill>
-                    <a:srgbClr val="27323A"/>
-                  </a:solidFill>
-                  <a:latin typeface="微軟正黑體" panose="020B0604030504040204" pitchFamily="34" charset="-120"/>
-                  <a:ea typeface="微軟正黑體" panose="020B0604030504040204" pitchFamily="34" charset="-120"/>
-                  <a:cs typeface="Noto Sans CJK TC" pitchFamily="34" charset="-120"/>
-                </a:rPr>
-                <a:t>。</a:t>
+                <a:t>，提升兩者預測結果的一致性。</a:t>
               </a:r>
               <a:endParaRPr lang="en-US" sz="1200" dirty="0">
                 <a:latin typeface="微軟正黑體" panose="020B0604030504040204" pitchFamily="34" charset="-120"/>
@@ -36899,7 +36803,7 @@
                   <a:latin typeface="微軟正黑體" panose="020B0604030504040204" pitchFamily="34" charset="-120"/>
                   <a:ea typeface="微軟正黑體" panose="020B0604030504040204" pitchFamily="34" charset="-120"/>
                 </a:rPr>
-                <a:t>從實驗結果來看能發現，</a:t>
+                <a:t>從實驗結果能發現，</a:t>
               </a:r>
               <a:r>
                 <a:rPr lang="en-US" altLang="zh-TW" sz="1200" dirty="0">
@@ -41524,7 +41428,7 @@
                 <a:latin typeface="微軟正黑體" panose="020B0604030504040204" pitchFamily="34" charset="-120"/>
                 <a:ea typeface="微軟正黑體" panose="020B0604030504040204" pitchFamily="34" charset="-120"/>
               </a:rPr>
-              <a:t>next-token prediction (next-token output head)</a:t>
+              <a:t>next-token prediction</a:t>
             </a:r>
             <a:r>
               <a:rPr lang="zh-TW" altLang="en-US" sz="1400" dirty="0">

--- a/doc/mtp_with_consistency_method_v2.pptx
+++ b/doc/mtp_with_consistency_method_v2.pptx
@@ -17083,8 +17083,8 @@
             <a:chExt cx="5728232" cy="786364"/>
           </a:xfrm>
         </p:grpSpPr>
-        <mc:AlternateContent xmlns:mc="http://schemas.openxmlformats.org/markup-compatibility/2006">
-          <mc:Choice xmlns:a14="http://schemas.microsoft.com/office/drawing/2010/main" Requires="a14">
+        <mc:AlternateContent xmlns:mc="http://schemas.openxmlformats.org/markup-compatibility/2006" xmlns:a14="http://schemas.microsoft.com/office/drawing/2010/main">
+          <mc:Choice Requires="a14">
             <p:sp>
               <p:nvSpPr>
                 <p:cNvPr id="87" name="文字方塊 86">
@@ -17190,7 +17190,7 @@
               </p:txBody>
             </p:sp>
           </mc:Choice>
-          <mc:Fallback>
+          <mc:Fallback xmlns="">
             <p:sp>
               <p:nvSpPr>
                 <p:cNvPr id="87" name="文字方塊 86">
@@ -17235,8 +17235,8 @@
             </p:sp>
           </mc:Fallback>
         </mc:AlternateContent>
-        <mc:AlternateContent xmlns:mc="http://schemas.openxmlformats.org/markup-compatibility/2006">
-          <mc:Choice xmlns:a14="http://schemas.microsoft.com/office/drawing/2010/main" Requires="a14">
+        <mc:AlternateContent xmlns:mc="http://schemas.openxmlformats.org/markup-compatibility/2006" xmlns:a14="http://schemas.microsoft.com/office/drawing/2010/main">
+          <mc:Choice Requires="a14">
             <p:sp>
               <p:nvSpPr>
                 <p:cNvPr id="88" name="文字方塊 87">
@@ -17466,7 +17466,7 @@
               </p:txBody>
             </p:sp>
           </mc:Choice>
-          <mc:Fallback>
+          <mc:Fallback xmlns="">
             <p:sp>
               <p:nvSpPr>
                 <p:cNvPr id="88" name="文字方塊 87">
@@ -17940,8 +17940,8 @@
           </a:p>
         </p:txBody>
       </p:sp>
-      <mc:AlternateContent xmlns:mc="http://schemas.openxmlformats.org/markup-compatibility/2006">
-        <mc:Choice xmlns:a14="http://schemas.microsoft.com/office/drawing/2010/main" Requires="a14">
+      <mc:AlternateContent xmlns:mc="http://schemas.openxmlformats.org/markup-compatibility/2006" xmlns:a14="http://schemas.microsoft.com/office/drawing/2010/main">
+        <mc:Choice Requires="a14">
           <p:graphicFrame>
             <p:nvGraphicFramePr>
               <p:cNvPr id="10" name="表格 9">
@@ -18839,7 +18839,7 @@
             </a:graphic>
           </p:graphicFrame>
         </mc:Choice>
-        <mc:Fallback>
+        <mc:Fallback xmlns="">
           <p:graphicFrame>
             <p:nvGraphicFramePr>
               <p:cNvPr id="10" name="表格 9">
@@ -24095,7 +24095,7 @@
           <p:nvPr>
             <p:extLst>
               <p:ext uri="{D42A27DB-BD31-4B8C-83A1-F6EECF244321}">
-                <p14:modId xmlns:p14="http://schemas.microsoft.com/office/powerpoint/2010/main" val="3283059764"/>
+                <p14:modId xmlns:p14="http://schemas.microsoft.com/office/powerpoint/2010/main" val="276994543"/>
               </p:ext>
             </p:extLst>
           </p:nvPr>
@@ -24249,7 +24249,7 @@
                       <a:pPr algn="ctr"/>
                       <a:r>
                         <a:rPr lang="en-US" altLang="zh-TW" dirty="0"/>
-                        <a:t>Observation</a:t>
+                        <a:t>Possible Explanation</a:t>
                       </a:r>
                       <a:endParaRPr lang="zh-TW" altLang="en-US" dirty="0"/>
                     </a:p>
@@ -34467,35 +34467,35 @@
                 <a:latin typeface="微軟正黑體" panose="020B0604030504040204" pitchFamily="34" charset="-120"/>
                 <a:ea typeface="微軟正黑體" panose="020B0604030504040204" pitchFamily="34" charset="-120"/>
               </a:rPr>
-              <a:t> 的最佳化效果，進而提升  </a:t>
+              <a:t> 的最佳化效果，進而提升 </a:t>
             </a:r>
             <a:r>
               <a:rPr lang="en-US" sz="1600" b="1" dirty="0">
                 <a:latin typeface="微軟正黑體" panose="020B0604030504040204" pitchFamily="34" charset="-120"/>
                 <a:ea typeface="微軟正黑體" panose="020B0604030504040204" pitchFamily="34" charset="-120"/>
               </a:rPr>
-              <a:t>autoregressive </a:t>
+              <a:t>MTP </a:t>
             </a:r>
             <a:r>
               <a:rPr lang="zh-TW" altLang="en-US" sz="1600" b="1" dirty="0">
                 <a:latin typeface="微軟正黑體" panose="020B0604030504040204" pitchFamily="34" charset="-120"/>
                 <a:ea typeface="微軟正黑體" panose="020B0604030504040204" pitchFamily="34" charset="-120"/>
               </a:rPr>
-              <a:t>或 </a:t>
+              <a:t>的 </a:t>
             </a:r>
             <a:r>
               <a:rPr lang="en-US" sz="1600" b="1" dirty="0">
                 <a:latin typeface="微軟正黑體" panose="020B0604030504040204" pitchFamily="34" charset="-120"/>
                 <a:ea typeface="微軟正黑體" panose="020B0604030504040204" pitchFamily="34" charset="-120"/>
               </a:rPr>
-              <a:t>semi-autoregressive generation </a:t>
+              <a:t>block decoding</a:t>
             </a:r>
             <a:r>
               <a:rPr lang="zh-TW" altLang="en-US" sz="1600" b="1" dirty="0">
                 <a:latin typeface="微軟正黑體" panose="020B0604030504040204" pitchFamily="34" charset="-120"/>
                 <a:ea typeface="微軟正黑體" panose="020B0604030504040204" pitchFamily="34" charset="-120"/>
               </a:rPr>
-              <a:t>的穩定性。</a:t>
+              <a:t> 的穩定性。</a:t>
             </a:r>
             <a:endParaRPr lang="en-US" sz="1600" b="1" dirty="0">
               <a:latin typeface="微軟正黑體" panose="020B0604030504040204" pitchFamily="34" charset="-120"/>
@@ -38775,7 +38775,7 @@
                   <a:ea typeface="微軟正黑體" panose="020B0604030504040204" pitchFamily="34" charset="-120"/>
                   <a:cs typeface="Noto Sans CJK TC" pitchFamily="34" charset="-120"/>
                 </a:rPr>
-                <a:t>Experimental Results</a:t>
+                <a:t>Comprehensive Experimental Validation</a:t>
               </a:r>
               <a:endParaRPr lang="en-US" sz="1400" dirty="0">
                 <a:latin typeface="微軟正黑體" panose="020B0604030504040204" pitchFamily="34" charset="-120"/>
@@ -39023,7 +39023,7 @@
                   <a:latin typeface="微軟正黑體" panose="020B0604030504040204" pitchFamily="34" charset="-120"/>
                   <a:ea typeface="微軟正黑體" panose="020B0604030504040204" pitchFamily="34" charset="-120"/>
                 </a:rPr>
-                <a:t>SDC + LCM joint Training</a:t>
+                <a:t>Joint Training of SDC and LCM</a:t>
               </a:r>
             </a:p>
           </p:txBody>

--- a/doc/mtp_with_consistency_method_v2.pptx
+++ b/doc/mtp_with_consistency_method_v2.pptx
@@ -24095,14 +24095,14 @@
           <p:nvPr>
             <p:extLst>
               <p:ext uri="{D42A27DB-BD31-4B8C-83A1-F6EECF244321}">
-                <p14:modId xmlns:p14="http://schemas.microsoft.com/office/powerpoint/2010/main" val="276994543"/>
+                <p14:modId xmlns:p14="http://schemas.microsoft.com/office/powerpoint/2010/main" val="4226792464"/>
               </p:ext>
             </p:extLst>
           </p:nvPr>
         </p:nvGraphicFramePr>
         <p:xfrm>
-          <a:off x="347470" y="1020570"/>
-          <a:ext cx="11475720" cy="3595110"/>
+          <a:off x="2451477" y="1081227"/>
+          <a:ext cx="6985485" cy="3595110"/>
         </p:xfrm>
         <a:graphic>
           <a:graphicData uri="http://schemas.openxmlformats.org/drawingml/2006/table">
@@ -24146,13 +24146,6 @@
                     </a:ext>
                   </a:extLst>
                 </a:gridCol>
-                <a:gridCol w="4490235">
-                  <a:extLst>
-                    <a:ext uri="{9D8B030D-6E8A-4147-A177-3AD203B41FA5}">
-                      <a16:colId xmlns:a16="http://schemas.microsoft.com/office/drawing/2014/main" val="2185817678"/>
-                    </a:ext>
-                  </a:extLst>
-                </a:gridCol>
               </a:tblGrid>
               <a:tr h="599185">
                 <a:tc>
@@ -24241,21 +24234,6 @@
                   </a:txBody>
                   <a:tcPr anchor="ctr"/>
                 </a:tc>
-                <a:tc>
-                  <a:txBody>
-                    <a:bodyPr/>
-                    <a:lstStyle/>
-                    <a:p>
-                      <a:pPr algn="ctr"/>
-                      <a:r>
-                        <a:rPr lang="en-US" altLang="zh-TW" dirty="0"/>
-                        <a:t>Possible Explanation</a:t>
-                      </a:r>
-                      <a:endParaRPr lang="zh-TW" altLang="en-US" dirty="0"/>
-                    </a:p>
-                  </a:txBody>
-                  <a:tcPr anchor="ctr"/>
-                </a:tc>
                 <a:extLst>
                   <a:ext uri="{0D108BD9-81ED-4DB2-BD59-A6C34878D82A}">
                     <a16:rowId xmlns:a16="http://schemas.microsoft.com/office/drawing/2014/main" val="57095099"/>
@@ -24329,58 +24307,6 @@
                       <a:r>
                         <a:rPr lang="en-US" altLang="zh-TW" dirty="0"/>
                         <a:t>5.62%</a:t>
-                      </a:r>
-                    </a:p>
-                  </a:txBody>
-                  <a:tcPr anchor="ctr"/>
-                </a:tc>
-                <a:tc>
-                  <a:txBody>
-                    <a:bodyPr/>
-                    <a:lstStyle/>
-                    <a:p>
-                      <a:pPr algn="ctr"/>
-                      <a:r>
-                        <a:rPr lang="en-US" altLang="zh-TW" sz="1400" dirty="0" err="1">
-                          <a:latin typeface="微軟正黑體" panose="020B0604030504040204" pitchFamily="34" charset="-120"/>
-                          <a:ea typeface="微軟正黑體" panose="020B0604030504040204" pitchFamily="34" charset="-120"/>
-                        </a:rPr>
-                        <a:t>WikiText</a:t>
-                      </a:r>
-                      <a:r>
-                        <a:rPr lang="en-US" altLang="zh-TW" sz="1400" dirty="0">
-                          <a:latin typeface="微軟正黑體" panose="020B0604030504040204" pitchFamily="34" charset="-120"/>
-                          <a:ea typeface="微軟正黑體" panose="020B0604030504040204" pitchFamily="34" charset="-120"/>
-                        </a:rPr>
-                        <a:t> </a:t>
-                      </a:r>
-                      <a:r>
-                        <a:rPr lang="zh-TW" altLang="en-US" sz="1400" dirty="0">
-                          <a:latin typeface="微軟正黑體" panose="020B0604030504040204" pitchFamily="34" charset="-120"/>
-                          <a:ea typeface="微軟正黑體" panose="020B0604030504040204" pitchFamily="34" charset="-120"/>
-                        </a:rPr>
-                        <a:t>與 </a:t>
-                      </a:r>
-                      <a:r>
-                        <a:rPr lang="en-US" altLang="zh-TW" sz="1400" dirty="0" err="1">
-                          <a:latin typeface="微軟正黑體" panose="020B0604030504040204" pitchFamily="34" charset="-120"/>
-                          <a:ea typeface="微軟正黑體" panose="020B0604030504040204" pitchFamily="34" charset="-120"/>
-                        </a:rPr>
-                        <a:t>OpenWebText</a:t>
-                      </a:r>
-                      <a:r>
-                        <a:rPr lang="en-US" altLang="zh-TW" sz="1400" dirty="0">
-                          <a:latin typeface="微軟正黑體" panose="020B0604030504040204" pitchFamily="34" charset="-120"/>
-                          <a:ea typeface="微軟正黑體" panose="020B0604030504040204" pitchFamily="34" charset="-120"/>
-                        </a:rPr>
-                        <a:t> </a:t>
-                      </a:r>
-                      <a:r>
-                        <a:rPr lang="zh-TW" altLang="en-US" sz="1400" dirty="0">
-                          <a:latin typeface="微軟正黑體" panose="020B0604030504040204" pitchFamily="34" charset="-120"/>
-                          <a:ea typeface="微軟正黑體" panose="020B0604030504040204" pitchFamily="34" charset="-120"/>
-                        </a:rPr>
-                        <a:t>均屬於涵蓋多主題的一般英文文本，因此可能呈現相似的表現趨勢。</a:t>
                       </a:r>
                     </a:p>
                   </a:txBody>
@@ -24463,37 +24389,6 @@
                   </a:txBody>
                   <a:tcPr anchor="ctr"/>
                 </a:tc>
-                <a:tc>
-                  <a:txBody>
-                    <a:bodyPr/>
-                    <a:lstStyle/>
-                    <a:p>
-                      <a:pPr algn="ctr"/>
-                      <a:r>
-                        <a:rPr lang="zh-TW" altLang="en-US" sz="1400" dirty="0">
-                          <a:latin typeface="微軟正黑體" panose="020B0604030504040204" pitchFamily="34" charset="-120"/>
-                          <a:ea typeface="微軟正黑體" panose="020B0604030504040204" pitchFamily="34" charset="-120"/>
-                        </a:rPr>
-                        <a:t>較正式且規則的句子結構，可能有助於所有 </a:t>
-                      </a:r>
-                      <a:r>
-                        <a:rPr lang="en-US" altLang="zh-TW" sz="1400" dirty="0">
-                          <a:latin typeface="微軟正黑體" panose="020B0604030504040204" pitchFamily="34" charset="-120"/>
-                          <a:ea typeface="微軟正黑體" panose="020B0604030504040204" pitchFamily="34" charset="-120"/>
-                        </a:rPr>
-                        <a:t>prediction heads </a:t>
-                      </a:r>
-                      <a:r>
-                        <a:rPr lang="zh-TW" altLang="en-US" sz="1400" dirty="0">
-                          <a:latin typeface="微軟正黑體" panose="020B0604030504040204" pitchFamily="34" charset="-120"/>
-                          <a:ea typeface="微軟正黑體" panose="020B0604030504040204" pitchFamily="34" charset="-120"/>
-                        </a:rPr>
-                        <a:t>都獲得一致的改善。</a:t>
-                      </a:r>
-                    </a:p>
-                  </a:txBody>
-                  <a:tcPr anchor="ctr"/>
-                </a:tc>
                 <a:extLst>
                   <a:ext uri="{0D108BD9-81ED-4DB2-BD59-A6C34878D82A}">
                     <a16:rowId xmlns:a16="http://schemas.microsoft.com/office/drawing/2014/main" val="1088568622"/>
@@ -24568,57 +24463,6 @@
                         <a:rPr lang="en-US" altLang="zh-TW" dirty="0"/>
                         <a:t>3.27%</a:t>
                       </a:r>
-                    </a:p>
-                  </a:txBody>
-                  <a:tcPr anchor="ctr"/>
-                </a:tc>
-                <a:tc>
-                  <a:txBody>
-                    <a:bodyPr/>
-                    <a:lstStyle/>
-                    <a:p>
-                      <a:pPr marL="0" marR="0" lvl="0" indent="0" algn="ctr" defTabSz="914400" rtl="0" eaLnBrk="1" fontAlgn="auto" latinLnBrk="0" hangingPunct="1">
-                        <a:lnSpc>
-                          <a:spcPct val="100000"/>
-                        </a:lnSpc>
-                        <a:spcBef>
-                          <a:spcPts val="0"/>
-                        </a:spcBef>
-                        <a:spcAft>
-                          <a:spcPts val="0"/>
-                        </a:spcAft>
-                        <a:buClrTx/>
-                        <a:buSzTx/>
-                        <a:buFontTx/>
-                        <a:buNone/>
-                        <a:tabLst/>
-                        <a:defRPr/>
-                      </a:pPr>
-                      <a:r>
-                        <a:rPr lang="zh-TW" altLang="en-US" sz="1400" dirty="0">
-                          <a:latin typeface="微軟正黑體" panose="020B0604030504040204" pitchFamily="34" charset="-120"/>
-                          <a:ea typeface="微軟正黑體" panose="020B0604030504040204" pitchFamily="34" charset="-120"/>
-                        </a:rPr>
-                        <a:t>對長距離上下文的高度依賴，可能是 </a:t>
-                      </a:r>
-                      <a:r>
-                        <a:rPr lang="en-US" altLang="zh-TW" sz="1400" dirty="0">
-                          <a:latin typeface="微軟正黑體" panose="020B0604030504040204" pitchFamily="34" charset="-120"/>
-                          <a:ea typeface="微軟正黑體" panose="020B0604030504040204" pitchFamily="34" charset="-120"/>
-                        </a:rPr>
-                        <a:t>Head 1 </a:t>
-                      </a:r>
-                      <a:r>
-                        <a:rPr lang="zh-TW" altLang="en-US" sz="1400" dirty="0">
-                          <a:latin typeface="微軟正黑體" panose="020B0604030504040204" pitchFamily="34" charset="-120"/>
-                          <a:ea typeface="微軟正黑體" panose="020B0604030504040204" pitchFamily="34" charset="-120"/>
-                        </a:rPr>
-                        <a:t>改善幅度較大的原因。</a:t>
-                      </a:r>
-                      <a:endParaRPr lang="en-US" altLang="zh-TW" sz="1400" dirty="0">
-                        <a:latin typeface="微軟正黑體" panose="020B0604030504040204" pitchFamily="34" charset="-120"/>
-                        <a:ea typeface="微軟正黑體" panose="020B0604030504040204" pitchFamily="34" charset="-120"/>
-                      </a:endParaRPr>
                     </a:p>
                   </a:txBody>
                   <a:tcPr anchor="ctr"/>
@@ -24701,51 +24545,6 @@
                   </a:txBody>
                   <a:tcPr anchor="ctr"/>
                 </a:tc>
-                <a:tc>
-                  <a:txBody>
-                    <a:bodyPr/>
-                    <a:lstStyle/>
-                    <a:p>
-                      <a:pPr algn="ctr"/>
-                      <a:r>
-                        <a:rPr lang="zh-TW" altLang="en-US" sz="1400" dirty="0">
-                          <a:latin typeface="微軟正黑體" panose="020B0604030504040204" pitchFamily="34" charset="-120"/>
-                          <a:ea typeface="微軟正黑體" panose="020B0604030504040204" pitchFamily="34" charset="-120"/>
-                        </a:rPr>
-                        <a:t>文本包含大量 </a:t>
-                      </a:r>
-                      <a:r>
-                        <a:rPr lang="en-US" altLang="zh-TW" sz="1400" dirty="0">
-                          <a:latin typeface="微軟正黑體" panose="020B0604030504040204" pitchFamily="34" charset="-120"/>
-                          <a:ea typeface="微軟正黑體" panose="020B0604030504040204" pitchFamily="34" charset="-120"/>
-                        </a:rPr>
-                        <a:t>LaTeX </a:t>
-                      </a:r>
-                      <a:r>
-                        <a:rPr lang="zh-TW" altLang="en-US" sz="1400" dirty="0">
-                          <a:latin typeface="微軟正黑體" panose="020B0604030504040204" pitchFamily="34" charset="-120"/>
-                          <a:ea typeface="微軟正黑體" panose="020B0604030504040204" pitchFamily="34" charset="-120"/>
-                        </a:rPr>
-                        <a:t>公式與特殊符號，可能限制各 </a:t>
-                      </a:r>
-                      <a:r>
-                        <a:rPr lang="en-US" altLang="zh-TW" sz="1400" dirty="0">
-                          <a:latin typeface="微軟正黑體" panose="020B0604030504040204" pitchFamily="34" charset="-120"/>
-                          <a:ea typeface="微軟正黑體" panose="020B0604030504040204" pitchFamily="34" charset="-120"/>
-                        </a:rPr>
-                        <a:t>prediction head </a:t>
-                      </a:r>
-                      <a:r>
-                        <a:rPr lang="zh-TW" altLang="en-US" sz="1400" dirty="0">
-                          <a:latin typeface="微軟正黑體" panose="020B0604030504040204" pitchFamily="34" charset="-120"/>
-                          <a:ea typeface="微軟正黑體" panose="020B0604030504040204" pitchFamily="34" charset="-120"/>
-                        </a:rPr>
-                        <a:t>的改善幅度。</a:t>
-                      </a:r>
-                    </a:p>
-                  </a:txBody>
-                  <a:tcPr anchor="ctr"/>
-                </a:tc>
                 <a:extLst>
                   <a:ext uri="{0D108BD9-81ED-4DB2-BD59-A6C34878D82A}">
                     <a16:rowId xmlns:a16="http://schemas.microsoft.com/office/drawing/2014/main" val="678960123"/>
@@ -24819,37 +24618,6 @@
                       <a:r>
                         <a:rPr lang="en-US" altLang="zh-TW" dirty="0"/>
                         <a:t>8.26%</a:t>
-                      </a:r>
-                    </a:p>
-                  </a:txBody>
-                  <a:tcPr anchor="ctr"/>
-                </a:tc>
-                <a:tc>
-                  <a:txBody>
-                    <a:bodyPr/>
-                    <a:lstStyle/>
-                    <a:p>
-                      <a:pPr algn="ctr"/>
-                      <a:r>
-                        <a:rPr lang="zh-TW" altLang="en-US" sz="1400" dirty="0">
-                          <a:latin typeface="微軟正黑體" panose="020B0604030504040204" pitchFamily="34" charset="-120"/>
-                          <a:ea typeface="微軟正黑體" panose="020B0604030504040204" pitchFamily="34" charset="-120"/>
-                        </a:rPr>
-                        <a:t>結構化且領域一致的寫作風格，可能有助於所有 </a:t>
-                      </a:r>
-                      <a:r>
-                        <a:rPr lang="en-US" altLang="zh-TW" sz="1400" dirty="0">
-                          <a:latin typeface="微軟正黑體" panose="020B0604030504040204" pitchFamily="34" charset="-120"/>
-                          <a:ea typeface="微軟正黑體" panose="020B0604030504040204" pitchFamily="34" charset="-120"/>
-                        </a:rPr>
-                        <a:t>prediction heads </a:t>
-                      </a:r>
-                      <a:r>
-                        <a:rPr lang="zh-TW" altLang="en-US" sz="1400" dirty="0">
-                          <a:latin typeface="微軟正黑體" panose="020B0604030504040204" pitchFamily="34" charset="-120"/>
-                          <a:ea typeface="微軟正黑體" panose="020B0604030504040204" pitchFamily="34" charset="-120"/>
-                        </a:rPr>
-                        <a:t>獲得穩定改善。</a:t>
                       </a:r>
                     </a:p>
                   </a:txBody>

--- a/doc/mtp_with_consistency_method_v2.pptx
+++ b/doc/mtp_with_consistency_method_v2.pptx
@@ -24095,14 +24095,14 @@
           <p:nvPr>
             <p:extLst>
               <p:ext uri="{D42A27DB-BD31-4B8C-83A1-F6EECF244321}">
-                <p14:modId xmlns:p14="http://schemas.microsoft.com/office/powerpoint/2010/main" val="4226792464"/>
+                <p14:modId xmlns:p14="http://schemas.microsoft.com/office/powerpoint/2010/main" val="71075901"/>
               </p:ext>
             </p:extLst>
           </p:nvPr>
         </p:nvGraphicFramePr>
         <p:xfrm>
-          <a:off x="2451477" y="1081227"/>
-          <a:ext cx="6985485" cy="3595110"/>
+          <a:off x="347471" y="1081227"/>
+          <a:ext cx="11193500" cy="3595110"/>
         </p:xfrm>
         <a:graphic>
           <a:graphicData uri="http://schemas.openxmlformats.org/drawingml/2006/table">
@@ -24111,35 +24111,35 @@
                 <a:tableStyleId>{5FD0F851-EC5A-4D38-B0AD-8093EC10F338}</a:tableStyleId>
               </a:tblPr>
               <a:tblGrid>
-                <a:gridCol w="1912620">
+                <a:gridCol w="3064771">
                   <a:extLst>
                     <a:ext uri="{9D8B030D-6E8A-4147-A177-3AD203B41FA5}">
                       <a16:colId xmlns:a16="http://schemas.microsoft.com/office/drawing/2014/main" val="2880323015"/>
                     </a:ext>
                   </a:extLst>
                 </a:gridCol>
-                <a:gridCol w="1273223">
+                <a:gridCol w="2040205">
                   <a:extLst>
                     <a:ext uri="{9D8B030D-6E8A-4147-A177-3AD203B41FA5}">
                       <a16:colId xmlns:a16="http://schemas.microsoft.com/office/drawing/2014/main" val="3421584875"/>
                     </a:ext>
                   </a:extLst>
                 </a:gridCol>
-                <a:gridCol w="1207363">
+                <a:gridCol w="1934671">
                   <a:extLst>
                     <a:ext uri="{9D8B030D-6E8A-4147-A177-3AD203B41FA5}">
                       <a16:colId xmlns:a16="http://schemas.microsoft.com/office/drawing/2014/main" val="1184110547"/>
                     </a:ext>
                   </a:extLst>
                 </a:gridCol>
-                <a:gridCol w="1233996">
+                <a:gridCol w="1977348">
                   <a:extLst>
                     <a:ext uri="{9D8B030D-6E8A-4147-A177-3AD203B41FA5}">
                       <a16:colId xmlns:a16="http://schemas.microsoft.com/office/drawing/2014/main" val="3781708433"/>
                     </a:ext>
                   </a:extLst>
                 </a:gridCol>
-                <a:gridCol w="1358283">
+                <a:gridCol w="2176505">
                   <a:extLst>
                     <a:ext uri="{9D8B030D-6E8A-4147-A177-3AD203B41FA5}">
                       <a16:colId xmlns:a16="http://schemas.microsoft.com/office/drawing/2014/main" val="107327293"/>
